--- a/SousSysteme_Entrees/Documentation/PRESENTATION/Presentation_3_SAE_S6.pptx
+++ b/SousSysteme_Entrees/Documentation/PRESENTATION/Presentation_3_SAE_S6.pptx
@@ -5,32 +5,35 @@
     <p:sldMasterId id="2147483660" r:id="rId4"/>
   </p:sldMasterIdLst>
   <p:notesMasterIdLst>
-    <p:notesMasterId r:id="rId25"/>
+    <p:notesMasterId r:id="rId28"/>
   </p:notesMasterIdLst>
   <p:handoutMasterIdLst>
-    <p:handoutMasterId r:id="rId26"/>
+    <p:handoutMasterId r:id="rId29"/>
   </p:handoutMasterIdLst>
   <p:sldIdLst>
     <p:sldId id="257" r:id="rId5"/>
     <p:sldId id="268" r:id="rId6"/>
     <p:sldId id="277" r:id="rId7"/>
-    <p:sldId id="312" r:id="rId8"/>
-    <p:sldId id="320" r:id="rId9"/>
-    <p:sldId id="313" r:id="rId10"/>
-    <p:sldId id="311" r:id="rId11"/>
-    <p:sldId id="319" r:id="rId12"/>
-    <p:sldId id="317" r:id="rId13"/>
-    <p:sldId id="322" r:id="rId14"/>
-    <p:sldId id="302" r:id="rId15"/>
-    <p:sldId id="308" r:id="rId16"/>
-    <p:sldId id="310" r:id="rId17"/>
-    <p:sldId id="323" r:id="rId18"/>
-    <p:sldId id="309" r:id="rId19"/>
-    <p:sldId id="325" r:id="rId20"/>
-    <p:sldId id="307" r:id="rId21"/>
-    <p:sldId id="275" r:id="rId22"/>
-    <p:sldId id="303" r:id="rId23"/>
-    <p:sldId id="304" r:id="rId24"/>
+    <p:sldId id="305" r:id="rId8"/>
+    <p:sldId id="306" r:id="rId9"/>
+    <p:sldId id="312" r:id="rId10"/>
+    <p:sldId id="313" r:id="rId11"/>
+    <p:sldId id="311" r:id="rId12"/>
+    <p:sldId id="320" r:id="rId13"/>
+    <p:sldId id="319" r:id="rId14"/>
+    <p:sldId id="317" r:id="rId15"/>
+    <p:sldId id="322" r:id="rId16"/>
+    <p:sldId id="302" r:id="rId17"/>
+    <p:sldId id="308" r:id="rId18"/>
+    <p:sldId id="310" r:id="rId19"/>
+    <p:sldId id="323" r:id="rId20"/>
+    <p:sldId id="309" r:id="rId21"/>
+    <p:sldId id="325" r:id="rId22"/>
+    <p:sldId id="327" r:id="rId23"/>
+    <p:sldId id="307" r:id="rId24"/>
+    <p:sldId id="275" r:id="rId25"/>
+    <p:sldId id="303" r:id="rId26"/>
+    <p:sldId id="304" r:id="rId27"/>
   </p:sldIdLst>
   <p:sldSz cx="12188825" cy="6858000"/>
   <p:notesSz cx="6858000" cy="9144000"/>
@@ -137,10 +140,12 @@
             <p14:sldId id="257"/>
             <p14:sldId id="268"/>
             <p14:sldId id="277"/>
+            <p14:sldId id="305"/>
+            <p14:sldId id="306"/>
             <p14:sldId id="312"/>
-            <p14:sldId id="320"/>
             <p14:sldId id="313"/>
             <p14:sldId id="311"/>
+            <p14:sldId id="320"/>
             <p14:sldId id="319"/>
             <p14:sldId id="317"/>
             <p14:sldId id="322"/>
@@ -150,6 +155,7 @@
             <p14:sldId id="323"/>
             <p14:sldId id="309"/>
             <p14:sldId id="325"/>
+            <p14:sldId id="327"/>
             <p14:sldId id="307"/>
             <p14:sldId id="275"/>
           </p14:sldIdLst>
@@ -199,7 +205,7 @@
   <pc:docChgLst>
     <pc:chgData name="Styxie x" userId="44e5248c228d5751" providerId="LiveId" clId="{BC3AD439-EA75-47CC-AFFB-98D1B066A9EB}"/>
     <pc:docChg chg="undo redo custSel addSld delSld modSld sldOrd modSection">
-      <pc:chgData name="Styxie x" userId="44e5248c228d5751" providerId="LiveId" clId="{BC3AD439-EA75-47CC-AFFB-98D1B066A9EB}" dt="2025-05-01T19:41:41.911" v="1658" actId="478"/>
+      <pc:chgData name="Styxie x" userId="44e5248c228d5751" providerId="LiveId" clId="{BC3AD439-EA75-47CC-AFFB-98D1B066A9EB}" dt="2025-05-02T11:15:31.861" v="2274" actId="1076"/>
       <pc:docMkLst>
         <pc:docMk/>
       </pc:docMkLst>
@@ -534,8 +540,8 @@
           <pc:sldMk cId="2935233943" sldId="301"/>
         </pc:sldMkLst>
       </pc:sldChg>
-      <pc:sldChg chg="modSp mod ord">
-        <pc:chgData name="Styxie x" userId="44e5248c228d5751" providerId="LiveId" clId="{BC3AD439-EA75-47CC-AFFB-98D1B066A9EB}" dt="2025-05-01T19:39:35.362" v="1626" actId="403"/>
+      <pc:sldChg chg="addSp modSp mod ord">
+        <pc:chgData name="Styxie x" userId="44e5248c228d5751" providerId="LiveId" clId="{BC3AD439-EA75-47CC-AFFB-98D1B066A9EB}" dt="2025-05-02T11:15:31.861" v="2274" actId="1076"/>
         <pc:sldMkLst>
           <pc:docMk/>
           <pc:sldMk cId="2264781907" sldId="302"/>
@@ -548,6 +554,30 @@
             <ac:spMk id="8" creationId="{A99D3EAC-125A-9165-7691-9A03E7826437}"/>
           </ac:spMkLst>
         </pc:spChg>
+        <pc:picChg chg="add mod">
+          <ac:chgData name="Styxie x" userId="44e5248c228d5751" providerId="LiveId" clId="{BC3AD439-EA75-47CC-AFFB-98D1B066A9EB}" dt="2025-05-02T11:15:27.166" v="2272" actId="1076"/>
+          <ac:picMkLst>
+            <pc:docMk/>
+            <pc:sldMk cId="2264781907" sldId="302"/>
+            <ac:picMk id="4" creationId="{3AF2BEB1-2DC8-FC6C-0507-66D376AE05AB}"/>
+          </ac:picMkLst>
+        </pc:picChg>
+        <pc:picChg chg="mod">
+          <ac:chgData name="Styxie x" userId="44e5248c228d5751" providerId="LiveId" clId="{BC3AD439-EA75-47CC-AFFB-98D1B066A9EB}" dt="2025-05-02T11:15:28.695" v="2273" actId="1076"/>
+          <ac:picMkLst>
+            <pc:docMk/>
+            <pc:sldMk cId="2264781907" sldId="302"/>
+            <ac:picMk id="1026" creationId="{1764E54E-E689-1BAD-855F-1476A5DC53C2}"/>
+          </ac:picMkLst>
+        </pc:picChg>
+        <pc:picChg chg="mod">
+          <ac:chgData name="Styxie x" userId="44e5248c228d5751" providerId="LiveId" clId="{BC3AD439-EA75-47CC-AFFB-98D1B066A9EB}" dt="2025-05-02T11:15:31.861" v="2274" actId="1076"/>
+          <ac:picMkLst>
+            <pc:docMk/>
+            <pc:sldMk cId="2264781907" sldId="302"/>
+            <ac:picMk id="1028" creationId="{7E604B1E-8670-1FCF-F628-9CC15794CAF5}"/>
+          </ac:picMkLst>
+        </pc:picChg>
       </pc:sldChg>
       <pc:sldChg chg="modSp mod">
         <pc:chgData name="Styxie x" userId="44e5248c228d5751" providerId="LiveId" clId="{BC3AD439-EA75-47CC-AFFB-98D1B066A9EB}" dt="2025-05-01T19:41:21.722" v="1653" actId="403"/>
@@ -579,28 +609,36 @@
           </ac:spMkLst>
         </pc:spChg>
       </pc:sldChg>
-      <pc:sldChg chg="del">
-        <pc:chgData name="Styxie x" userId="44e5248c228d5751" providerId="LiveId" clId="{BC3AD439-EA75-47CC-AFFB-98D1B066A9EB}" dt="2025-05-01T13:37:07.044" v="197" actId="47"/>
+      <pc:sldChg chg="add del">
+        <pc:chgData name="Styxie x" userId="44e5248c228d5751" providerId="LiveId" clId="{BC3AD439-EA75-47CC-AFFB-98D1B066A9EB}" dt="2025-05-02T08:05:41.672" v="1668"/>
         <pc:sldMkLst>
           <pc:docMk/>
           <pc:sldMk cId="2877027844" sldId="305"/>
         </pc:sldMkLst>
       </pc:sldChg>
-      <pc:sldChg chg="del">
-        <pc:chgData name="Styxie x" userId="44e5248c228d5751" providerId="LiveId" clId="{BC3AD439-EA75-47CC-AFFB-98D1B066A9EB}" dt="2025-05-01T13:37:08.080" v="198" actId="47"/>
+      <pc:sldChg chg="add del">
+        <pc:chgData name="Styxie x" userId="44e5248c228d5751" providerId="LiveId" clId="{BC3AD439-EA75-47CC-AFFB-98D1B066A9EB}" dt="2025-05-02T08:05:41.672" v="1668"/>
         <pc:sldMkLst>
           <pc:docMk/>
           <pc:sldMk cId="459590912" sldId="306"/>
         </pc:sldMkLst>
       </pc:sldChg>
-      <pc:sldChg chg="modSp mod">
-        <pc:chgData name="Styxie x" userId="44e5248c228d5751" providerId="LiveId" clId="{BC3AD439-EA75-47CC-AFFB-98D1B066A9EB}" dt="2025-05-01T19:41:12.959" v="1649" actId="404"/>
+      <pc:sldChg chg="addSp modSp mod">
+        <pc:chgData name="Styxie x" userId="44e5248c228d5751" providerId="LiveId" clId="{BC3AD439-EA75-47CC-AFFB-98D1B066A9EB}" dt="2025-05-02T10:56:10.421" v="1815" actId="20577"/>
         <pc:sldMkLst>
           <pc:docMk/>
           <pc:sldMk cId="4183765091" sldId="307"/>
         </pc:sldMkLst>
+        <pc:spChg chg="add mod">
+          <ac:chgData name="Styxie x" userId="44e5248c228d5751" providerId="LiveId" clId="{BC3AD439-EA75-47CC-AFFB-98D1B066A9EB}" dt="2025-05-02T10:56:10.421" v="1815" actId="20577"/>
+          <ac:spMkLst>
+            <pc:docMk/>
+            <pc:sldMk cId="4183765091" sldId="307"/>
+            <ac:spMk id="2" creationId="{7515A89D-BE03-2B61-7E2E-D8A781043D97}"/>
+          </ac:spMkLst>
+        </pc:spChg>
         <pc:spChg chg="mod">
-          <ac:chgData name="Styxie x" userId="44e5248c228d5751" providerId="LiveId" clId="{BC3AD439-EA75-47CC-AFFB-98D1B066A9EB}" dt="2025-05-01T19:36:12.965" v="1549" actId="20577"/>
+          <ac:chgData name="Styxie x" userId="44e5248c228d5751" providerId="LiveId" clId="{BC3AD439-EA75-47CC-AFFB-98D1B066A9EB}" dt="2025-05-02T10:55:46.719" v="1801" actId="313"/>
           <ac:spMkLst>
             <pc:docMk/>
             <pc:sldMk cId="4183765091" sldId="307"/>
@@ -616,7 +654,7 @@
           </ac:spMkLst>
         </pc:spChg>
         <pc:spChg chg="mod">
-          <ac:chgData name="Styxie x" userId="44e5248c228d5751" providerId="LiveId" clId="{BC3AD439-EA75-47CC-AFFB-98D1B066A9EB}" dt="2025-05-01T19:35:54.981" v="1518" actId="20577"/>
+          <ac:chgData name="Styxie x" userId="44e5248c228d5751" providerId="LiveId" clId="{BC3AD439-EA75-47CC-AFFB-98D1B066A9EB}" dt="2025-05-02T10:55:50.983" v="1802" actId="21"/>
           <ac:spMkLst>
             <pc:docMk/>
             <pc:sldMk cId="4183765091" sldId="307"/>
@@ -625,7 +663,7 @@
         </pc:spChg>
       </pc:sldChg>
       <pc:sldChg chg="modSp mod ord">
-        <pc:chgData name="Styxie x" userId="44e5248c228d5751" providerId="LiveId" clId="{BC3AD439-EA75-47CC-AFFB-98D1B066A9EB}" dt="2025-05-01T19:39:40.785" v="1630" actId="403"/>
+        <pc:chgData name="Styxie x" userId="44e5248c228d5751" providerId="LiveId" clId="{BC3AD439-EA75-47CC-AFFB-98D1B066A9EB}" dt="2025-05-02T11:03:52.094" v="2258" actId="20577"/>
         <pc:sldMkLst>
           <pc:docMk/>
           <pc:sldMk cId="1713950367" sldId="308"/>
@@ -636,6 +674,14 @@
             <pc:docMk/>
             <pc:sldMk cId="1713950367" sldId="308"/>
             <ac:spMk id="8" creationId="{1B837DA7-FE7F-374E-6D9D-170844107C4E}"/>
+          </ac:spMkLst>
+        </pc:spChg>
+        <pc:spChg chg="mod">
+          <ac:chgData name="Styxie x" userId="44e5248c228d5751" providerId="LiveId" clId="{BC3AD439-EA75-47CC-AFFB-98D1B066A9EB}" dt="2025-05-02T11:03:52.094" v="2258" actId="20577"/>
+          <ac:spMkLst>
+            <pc:docMk/>
+            <pc:sldMk cId="1713950367" sldId="308"/>
+            <ac:spMk id="12" creationId="{3BD6721C-F990-3993-8FD9-6B0ACBD0D1BD}"/>
           </ac:spMkLst>
         </pc:spChg>
         <pc:graphicFrameChg chg="mod modGraphic">
@@ -725,7 +771,7 @@
         </pc:picChg>
       </pc:sldChg>
       <pc:sldChg chg="addSp delSp modSp add mod">
-        <pc:chgData name="Styxie x" userId="44e5248c228d5751" providerId="LiveId" clId="{BC3AD439-EA75-47CC-AFFB-98D1B066A9EB}" dt="2025-05-01T19:38:32.289" v="1584" actId="403"/>
+        <pc:chgData name="Styxie x" userId="44e5248c228d5751" providerId="LiveId" clId="{BC3AD439-EA75-47CC-AFFB-98D1B066A9EB}" dt="2025-05-02T08:49:07.342" v="1715" actId="1076"/>
         <pc:sldMkLst>
           <pc:docMk/>
           <pc:sldMk cId="2065251002" sldId="311"/>
@@ -795,6 +841,14 @@
           </ac:picMkLst>
         </pc:picChg>
         <pc:picChg chg="add mod">
+          <ac:chgData name="Styxie x" userId="44e5248c228d5751" providerId="LiveId" clId="{BC3AD439-EA75-47CC-AFFB-98D1B066A9EB}" dt="2025-05-02T08:48:59.254" v="1714" actId="1076"/>
+          <ac:picMkLst>
+            <pc:docMk/>
+            <pc:sldMk cId="2065251002" sldId="311"/>
+            <ac:picMk id="5" creationId="{20BF3905-B21C-2370-20DD-A9F0C932D392}"/>
+          </ac:picMkLst>
+        </pc:picChg>
+        <pc:picChg chg="add mod">
           <ac:chgData name="Styxie x" userId="44e5248c228d5751" providerId="LiveId" clId="{BC3AD439-EA75-47CC-AFFB-98D1B066A9EB}" dt="2025-05-01T17:29:23.655" v="664"/>
           <ac:picMkLst>
             <pc:docMk/>
@@ -810,24 +864,24 @@
             <ac:picMk id="14" creationId="{9B32C724-DBCE-3B21-FCE5-2A17183C13DB}"/>
           </ac:picMkLst>
         </pc:picChg>
-        <pc:picChg chg="add mod">
-          <ac:chgData name="Styxie x" userId="44e5248c228d5751" providerId="LiveId" clId="{BC3AD439-EA75-47CC-AFFB-98D1B066A9EB}" dt="2025-05-01T17:42:14.108" v="709" actId="1076"/>
+        <pc:picChg chg="add mod modCrop">
+          <ac:chgData name="Styxie x" userId="44e5248c228d5751" providerId="LiveId" clId="{BC3AD439-EA75-47CC-AFFB-98D1B066A9EB}" dt="2025-05-02T08:48:52.996" v="1713" actId="732"/>
           <ac:picMkLst>
             <pc:docMk/>
             <pc:sldMk cId="2065251002" sldId="311"/>
             <ac:picMk id="16" creationId="{BBF791DB-EDDE-74E7-A8A5-9C30D07A2CDD}"/>
           </ac:picMkLst>
         </pc:picChg>
-        <pc:picChg chg="add mod">
-          <ac:chgData name="Styxie x" userId="44e5248c228d5751" providerId="LiveId" clId="{BC3AD439-EA75-47CC-AFFB-98D1B066A9EB}" dt="2025-05-01T17:42:25.919" v="711" actId="14100"/>
+        <pc:picChg chg="add mod modCrop">
+          <ac:chgData name="Styxie x" userId="44e5248c228d5751" providerId="LiveId" clId="{BC3AD439-EA75-47CC-AFFB-98D1B066A9EB}" dt="2025-05-02T08:48:02.572" v="1701" actId="1076"/>
           <ac:picMkLst>
             <pc:docMk/>
             <pc:sldMk cId="2065251002" sldId="311"/>
             <ac:picMk id="18" creationId="{BE39A7A8-4CC8-AF0D-04ED-1948B0DEEEC6}"/>
           </ac:picMkLst>
         </pc:picChg>
-        <pc:picChg chg="add mod">
-          <ac:chgData name="Styxie x" userId="44e5248c228d5751" providerId="LiveId" clId="{BC3AD439-EA75-47CC-AFFB-98D1B066A9EB}" dt="2025-05-01T17:42:11.657" v="708" actId="1076"/>
+        <pc:picChg chg="add mod modCrop">
+          <ac:chgData name="Styxie x" userId="44e5248c228d5751" providerId="LiveId" clId="{BC3AD439-EA75-47CC-AFFB-98D1B066A9EB}" dt="2025-05-02T08:48:00.385" v="1700" actId="1076"/>
           <ac:picMkLst>
             <pc:docMk/>
             <pc:sldMk cId="2065251002" sldId="311"/>
@@ -835,15 +889,15 @@
           </ac:picMkLst>
         </pc:picChg>
         <pc:picChg chg="add mod">
-          <ac:chgData name="Styxie x" userId="44e5248c228d5751" providerId="LiveId" clId="{BC3AD439-EA75-47CC-AFFB-98D1B066A9EB}" dt="2025-05-01T17:43:53.528" v="725" actId="688"/>
+          <ac:chgData name="Styxie x" userId="44e5248c228d5751" providerId="LiveId" clId="{BC3AD439-EA75-47CC-AFFB-98D1B066A9EB}" dt="2025-05-02T08:49:07.342" v="1715" actId="1076"/>
           <ac:picMkLst>
             <pc:docMk/>
             <pc:sldMk cId="2065251002" sldId="311"/>
             <ac:picMk id="22" creationId="{61563D19-A0E2-1F36-715F-C97B4F266F7F}"/>
           </ac:picMkLst>
         </pc:picChg>
-        <pc:picChg chg="add mod">
-          <ac:chgData name="Styxie x" userId="44e5248c228d5751" providerId="LiveId" clId="{BC3AD439-EA75-47CC-AFFB-98D1B066A9EB}" dt="2025-05-01T17:44:04.150" v="728" actId="1076"/>
+        <pc:picChg chg="add del mod">
+          <ac:chgData name="Styxie x" userId="44e5248c228d5751" providerId="LiveId" clId="{BC3AD439-EA75-47CC-AFFB-98D1B066A9EB}" dt="2025-05-02T08:48:09.127" v="1704" actId="478"/>
           <ac:picMkLst>
             <pc:docMk/>
             <pc:sldMk cId="2065251002" sldId="311"/>
@@ -867,7 +921,7 @@
         </pc:spChg>
       </pc:sldChg>
       <pc:sldChg chg="addSp delSp modSp add mod ord">
-        <pc:chgData name="Styxie x" userId="44e5248c228d5751" providerId="LiveId" clId="{BC3AD439-EA75-47CC-AFFB-98D1B066A9EB}" dt="2025-05-01T19:38:04.878" v="1568" actId="403"/>
+        <pc:chgData name="Styxie x" userId="44e5248c228d5751" providerId="LiveId" clId="{BC3AD439-EA75-47CC-AFFB-98D1B066A9EB}" dt="2025-05-02T11:14:44.576" v="2269" actId="1036"/>
         <pc:sldMkLst>
           <pc:docMk/>
           <pc:sldMk cId="1009216722" sldId="312"/>
@@ -878,6 +932,22 @@
             <pc:docMk/>
             <pc:sldMk cId="1009216722" sldId="312"/>
             <ac:spMk id="2" creationId="{F87FA042-1168-5119-36EE-99FBE3E3C0E4}"/>
+          </ac:spMkLst>
+        </pc:spChg>
+        <pc:spChg chg="add mod ord">
+          <ac:chgData name="Styxie x" userId="44e5248c228d5751" providerId="LiveId" clId="{BC3AD439-EA75-47CC-AFFB-98D1B066A9EB}" dt="2025-05-02T11:05:11.720" v="2266" actId="207"/>
+          <ac:spMkLst>
+            <pc:docMk/>
+            <pc:sldMk cId="1009216722" sldId="312"/>
+            <ac:spMk id="3" creationId="{A9E04BDD-1218-202A-C020-3998C33D5017}"/>
+          </ac:spMkLst>
+        </pc:spChg>
+        <pc:spChg chg="add mod ord">
+          <ac:chgData name="Styxie x" userId="44e5248c228d5751" providerId="LiveId" clId="{BC3AD439-EA75-47CC-AFFB-98D1B066A9EB}" dt="2025-05-02T11:04:33.767" v="2263" actId="167"/>
+          <ac:spMkLst>
+            <pc:docMk/>
+            <pc:sldMk cId="1009216722" sldId="312"/>
+            <ac:spMk id="4" creationId="{3AA39142-3313-99EF-86FE-38E1B614DE1B}"/>
           </ac:spMkLst>
         </pc:spChg>
         <pc:spChg chg="mod">
@@ -912,8 +982,8 @@
             <ac:picMk id="4" creationId="{0EC72639-EC88-6D44-812F-2687DFC8347A}"/>
           </ac:picMkLst>
         </pc:picChg>
-        <pc:picChg chg="add mod">
-          <ac:chgData name="Styxie x" userId="44e5248c228d5751" providerId="LiveId" clId="{BC3AD439-EA75-47CC-AFFB-98D1B066A9EB}" dt="2025-05-01T16:54:44.050" v="316" actId="14100"/>
+        <pc:picChg chg="add mod ord">
+          <ac:chgData name="Styxie x" userId="44e5248c228d5751" providerId="LiveId" clId="{BC3AD439-EA75-47CC-AFFB-98D1B066A9EB}" dt="2025-05-02T11:14:44.576" v="2269" actId="1036"/>
           <ac:picMkLst>
             <pc:docMk/>
             <pc:sldMk cId="1009216722" sldId="312"/>
@@ -950,8 +1020,8 @@
           <pc:sldMk cId="682931345" sldId="313"/>
         </pc:sldMkLst>
       </pc:sldChg>
-      <pc:sldChg chg="addSp delSp modSp add mod">
-        <pc:chgData name="Styxie x" userId="44e5248c228d5751" providerId="LiveId" clId="{BC3AD439-EA75-47CC-AFFB-98D1B066A9EB}" dt="2025-05-01T19:38:18.882" v="1576" actId="403"/>
+      <pc:sldChg chg="addSp delSp modSp add mod ord">
+        <pc:chgData name="Styxie x" userId="44e5248c228d5751" providerId="LiveId" clId="{BC3AD439-EA75-47CC-AFFB-98D1B066A9EB}" dt="2025-05-02T08:44:08.153" v="1687" actId="1076"/>
         <pc:sldMkLst>
           <pc:docMk/>
           <pc:sldMk cId="1307954809" sldId="313"/>
@@ -965,7 +1035,7 @@
           </ac:spMkLst>
         </pc:spChg>
         <pc:spChg chg="add mod">
-          <ac:chgData name="Styxie x" userId="44e5248c228d5751" providerId="LiveId" clId="{BC3AD439-EA75-47CC-AFFB-98D1B066A9EB}" dt="2025-05-01T17:15:28.113" v="576" actId="20577"/>
+          <ac:chgData name="Styxie x" userId="44e5248c228d5751" providerId="LiveId" clId="{BC3AD439-EA75-47CC-AFFB-98D1B066A9EB}" dt="2025-05-02T08:44:08.153" v="1687" actId="1076"/>
           <ac:spMkLst>
             <pc:docMk/>
             <pc:sldMk cId="1307954809" sldId="313"/>
@@ -1133,12 +1203,20 @@
           <pc:sldMk cId="2279740627" sldId="318"/>
         </pc:sldMkLst>
       </pc:sldChg>
-      <pc:sldChg chg="modSp add mod">
-        <pc:chgData name="Styxie x" userId="44e5248c228d5751" providerId="LiveId" clId="{BC3AD439-EA75-47CC-AFFB-98D1B066A9EB}" dt="2025-05-01T19:38:38.959" v="1588" actId="403"/>
+      <pc:sldChg chg="addSp delSp modSp add mod">
+        <pc:chgData name="Styxie x" userId="44e5248c228d5751" providerId="LiveId" clId="{BC3AD439-EA75-47CC-AFFB-98D1B066A9EB}" dt="2025-05-02T09:04:42.350" v="1728" actId="1076"/>
         <pc:sldMkLst>
           <pc:docMk/>
           <pc:sldMk cId="930243773" sldId="319"/>
         </pc:sldMkLst>
+        <pc:spChg chg="add del mod">
+          <ac:chgData name="Styxie x" userId="44e5248c228d5751" providerId="LiveId" clId="{BC3AD439-EA75-47CC-AFFB-98D1B066A9EB}" dt="2025-05-02T09:02:48.003" v="1722" actId="478"/>
+          <ac:spMkLst>
+            <pc:docMk/>
+            <pc:sldMk cId="930243773" sldId="319"/>
+            <ac:spMk id="6" creationId="{048F0E59-4CAE-0AC1-932C-68E157E7B7E6}"/>
+          </ac:spMkLst>
+        </pc:spChg>
         <pc:spChg chg="mod">
           <ac:chgData name="Styxie x" userId="44e5248c228d5751" providerId="LiveId" clId="{BC3AD439-EA75-47CC-AFFB-98D1B066A9EB}" dt="2025-05-01T19:38:38.959" v="1588" actId="403"/>
           <ac:spMkLst>
@@ -1147,6 +1225,30 @@
             <ac:spMk id="8" creationId="{E4E39261-32E1-0791-2C3E-3B9134B3EAA6}"/>
           </ac:spMkLst>
         </pc:spChg>
+        <pc:picChg chg="del">
+          <ac:chgData name="Styxie x" userId="44e5248c228d5751" providerId="LiveId" clId="{BC3AD439-EA75-47CC-AFFB-98D1B066A9EB}" dt="2025-05-02T09:02:35.996" v="1718" actId="478"/>
+          <ac:picMkLst>
+            <pc:docMk/>
+            <pc:sldMk cId="930243773" sldId="319"/>
+            <ac:picMk id="3" creationId="{1C76FD4F-85DE-2528-3CEB-D01686BFCC10}"/>
+          </ac:picMkLst>
+        </pc:picChg>
+        <pc:picChg chg="add del mod">
+          <ac:chgData name="Styxie x" userId="44e5248c228d5751" providerId="LiveId" clId="{BC3AD439-EA75-47CC-AFFB-98D1B066A9EB}" dt="2025-05-02T09:04:34.734" v="1725" actId="478"/>
+          <ac:picMkLst>
+            <pc:docMk/>
+            <pc:sldMk cId="930243773" sldId="319"/>
+            <ac:picMk id="10" creationId="{6035D9DA-D780-C9F7-89A4-DEF3B7D6CA2C}"/>
+          </ac:picMkLst>
+        </pc:picChg>
+        <pc:picChg chg="add mod">
+          <ac:chgData name="Styxie x" userId="44e5248c228d5751" providerId="LiveId" clId="{BC3AD439-EA75-47CC-AFFB-98D1B066A9EB}" dt="2025-05-02T09:04:42.350" v="1728" actId="1076"/>
+          <ac:picMkLst>
+            <pc:docMk/>
+            <pc:sldMk cId="930243773" sldId="319"/>
+            <ac:picMk id="1026" creationId="{47F9E110-BF9F-FDB2-4633-396C84454E05}"/>
+          </ac:picMkLst>
+        </pc:picChg>
       </pc:sldChg>
       <pc:sldChg chg="new del">
         <pc:chgData name="Styxie x" userId="44e5248c228d5751" providerId="LiveId" clId="{BC3AD439-EA75-47CC-AFFB-98D1B066A9EB}" dt="2025-05-01T17:29:50.127" v="668" actId="680"/>
@@ -1155,8 +1257,8 @@
           <pc:sldMk cId="75329157" sldId="320"/>
         </pc:sldMkLst>
       </pc:sldChg>
-      <pc:sldChg chg="addSp delSp modSp add mod ord">
-        <pc:chgData name="Styxie x" userId="44e5248c228d5751" providerId="LiveId" clId="{BC3AD439-EA75-47CC-AFFB-98D1B066A9EB}" dt="2025-05-01T19:38:12.475" v="1572" actId="403"/>
+      <pc:sldChg chg="addSp delSp modSp add mod ord modShow">
+        <pc:chgData name="Styxie x" userId="44e5248c228d5751" providerId="LiveId" clId="{BC3AD439-EA75-47CC-AFFB-98D1B066A9EB}" dt="2025-05-02T09:08:38.477" v="1735" actId="1076"/>
         <pc:sldMkLst>
           <pc:docMk/>
           <pc:sldMk cId="3043309872" sldId="320"/>
@@ -1178,7 +1280,7 @@
           </ac:spMkLst>
         </pc:spChg>
         <pc:picChg chg="add mod">
-          <ac:chgData name="Styxie x" userId="44e5248c228d5751" providerId="LiveId" clId="{BC3AD439-EA75-47CC-AFFB-98D1B066A9EB}" dt="2025-05-01T17:31:25.965" v="685" actId="1076"/>
+          <ac:chgData name="Styxie x" userId="44e5248c228d5751" providerId="LiveId" clId="{BC3AD439-EA75-47CC-AFFB-98D1B066A9EB}" dt="2025-05-02T09:08:34.213" v="1733" actId="1076"/>
           <ac:picMkLst>
             <pc:docMk/>
             <pc:sldMk cId="3043309872" sldId="320"/>
@@ -1193,8 +1295,8 @@
             <ac:picMk id="4" creationId="{438F8EA5-9C93-671C-0907-137F32B896CC}"/>
           </ac:picMkLst>
         </pc:picChg>
-        <pc:picChg chg="add mod">
-          <ac:chgData name="Styxie x" userId="44e5248c228d5751" providerId="LiveId" clId="{BC3AD439-EA75-47CC-AFFB-98D1B066A9EB}" dt="2025-05-01T17:31:24.300" v="684" actId="1076"/>
+        <pc:picChg chg="add del mod">
+          <ac:chgData name="Styxie x" userId="44e5248c228d5751" providerId="LiveId" clId="{BC3AD439-EA75-47CC-AFFB-98D1B066A9EB}" dt="2025-05-02T08:45:23.085" v="1688" actId="21"/>
           <ac:picMkLst>
             <pc:docMk/>
             <pc:sldMk cId="3043309872" sldId="320"/>
@@ -1202,7 +1304,7 @@
           </ac:picMkLst>
         </pc:picChg>
         <pc:picChg chg="add mod">
-          <ac:chgData name="Styxie x" userId="44e5248c228d5751" providerId="LiveId" clId="{BC3AD439-EA75-47CC-AFFB-98D1B066A9EB}" dt="2025-05-01T17:31:47.300" v="688" actId="1076"/>
+          <ac:chgData name="Styxie x" userId="44e5248c228d5751" providerId="LiveId" clId="{BC3AD439-EA75-47CC-AFFB-98D1B066A9EB}" dt="2025-05-02T09:08:38.477" v="1735" actId="1076"/>
           <ac:picMkLst>
             <pc:docMk/>
             <pc:sldMk cId="3043309872" sldId="320"/>
@@ -1210,7 +1312,7 @@
           </ac:picMkLst>
         </pc:picChg>
         <pc:picChg chg="add mod">
-          <ac:chgData name="Styxie x" userId="44e5248c228d5751" providerId="LiveId" clId="{BC3AD439-EA75-47CC-AFFB-98D1B066A9EB}" dt="2025-05-01T17:39:52.427" v="696" actId="1076"/>
+          <ac:chgData name="Styxie x" userId="44e5248c228d5751" providerId="LiveId" clId="{BC3AD439-EA75-47CC-AFFB-98D1B066A9EB}" dt="2025-05-02T09:08:31.741" v="1732" actId="1076"/>
           <ac:picMkLst>
             <pc:docMk/>
             <pc:sldMk cId="3043309872" sldId="320"/>
@@ -1218,7 +1320,7 @@
           </ac:picMkLst>
         </pc:picChg>
         <pc:picChg chg="add mod">
-          <ac:chgData name="Styxie x" userId="44e5248c228d5751" providerId="LiveId" clId="{BC3AD439-EA75-47CC-AFFB-98D1B066A9EB}" dt="2025-05-01T17:39:47.486" v="694" actId="1076"/>
+          <ac:chgData name="Styxie x" userId="44e5248c228d5751" providerId="LiveId" clId="{BC3AD439-EA75-47CC-AFFB-98D1B066A9EB}" dt="2025-05-02T09:08:36.039" v="1734" actId="1076"/>
           <ac:picMkLst>
             <pc:docMk/>
             <pc:sldMk cId="3043309872" sldId="320"/>
@@ -1348,8 +1450,8 @@
           <pc:sldMk cId="1918631215" sldId="324"/>
         </pc:sldMkLst>
       </pc:sldChg>
-      <pc:sldChg chg="modSp add mod">
-        <pc:chgData name="Styxie x" userId="44e5248c228d5751" providerId="LiveId" clId="{BC3AD439-EA75-47CC-AFFB-98D1B066A9EB}" dt="2025-05-01T19:39:03.685" v="1614" actId="20577"/>
+      <pc:sldChg chg="delSp modSp add mod">
+        <pc:chgData name="Styxie x" userId="44e5248c228d5751" providerId="LiveId" clId="{BC3AD439-EA75-47CC-AFFB-98D1B066A9EB}" dt="2025-05-02T10:56:28.604" v="1819" actId="1076"/>
         <pc:sldMkLst>
           <pc:docMk/>
           <pc:sldMk cId="3008443693" sldId="325"/>
@@ -1360,6 +1462,104 @@
             <pc:docMk/>
             <pc:sldMk cId="3008443693" sldId="325"/>
             <ac:spMk id="2" creationId="{EE5D6B0D-1987-8CFC-89D7-E3601DBB3979}"/>
+          </ac:spMkLst>
+        </pc:spChg>
+        <pc:picChg chg="mod">
+          <ac:chgData name="Styxie x" userId="44e5248c228d5751" providerId="LiveId" clId="{BC3AD439-EA75-47CC-AFFB-98D1B066A9EB}" dt="2025-05-02T10:56:28.604" v="1819" actId="1076"/>
+          <ac:picMkLst>
+            <pc:docMk/>
+            <pc:sldMk cId="3008443693" sldId="325"/>
+            <ac:picMk id="3" creationId="{9FF420A5-2D27-B4C8-4C62-47115B7F4DB7}"/>
+          </ac:picMkLst>
+        </pc:picChg>
+        <pc:picChg chg="del">
+          <ac:chgData name="Styxie x" userId="44e5248c228d5751" providerId="LiveId" clId="{BC3AD439-EA75-47CC-AFFB-98D1B066A9EB}" dt="2025-05-02T10:56:19.237" v="1816" actId="478"/>
+          <ac:picMkLst>
+            <pc:docMk/>
+            <pc:sldMk cId="3008443693" sldId="325"/>
+            <ac:picMk id="4" creationId="{B353D8F3-A43C-CD99-DACF-54427EF98658}"/>
+          </ac:picMkLst>
+        </pc:picChg>
+      </pc:sldChg>
+      <pc:sldChg chg="delSp new del mod">
+        <pc:chgData name="Styxie x" userId="44e5248c228d5751" providerId="LiveId" clId="{BC3AD439-EA75-47CC-AFFB-98D1B066A9EB}" dt="2025-05-02T09:05:19.793" v="1729" actId="47"/>
+        <pc:sldMkLst>
+          <pc:docMk/>
+          <pc:sldMk cId="645972807" sldId="326"/>
+        </pc:sldMkLst>
+        <pc:spChg chg="del">
+          <ac:chgData name="Styxie x" userId="44e5248c228d5751" providerId="LiveId" clId="{BC3AD439-EA75-47CC-AFFB-98D1B066A9EB}" dt="2025-05-02T09:04:23.569" v="1724" actId="478"/>
+          <ac:spMkLst>
+            <pc:docMk/>
+            <pc:sldMk cId="645972807" sldId="326"/>
+            <ac:spMk id="2" creationId="{191880EF-DC79-4C45-7DA7-44A3BD5A2087}"/>
+          </ac:spMkLst>
+        </pc:spChg>
+      </pc:sldChg>
+      <pc:sldChg chg="new del">
+        <pc:chgData name="Styxie x" userId="44e5248c228d5751" providerId="LiveId" clId="{BC3AD439-EA75-47CC-AFFB-98D1B066A9EB}" dt="2025-05-02T08:49:12.083" v="1717" actId="680"/>
+        <pc:sldMkLst>
+          <pc:docMk/>
+          <pc:sldMk cId="1704723026" sldId="326"/>
+        </pc:sldMkLst>
+      </pc:sldChg>
+      <pc:sldChg chg="new del">
+        <pc:chgData name="Styxie x" userId="44e5248c228d5751" providerId="LiveId" clId="{BC3AD439-EA75-47CC-AFFB-98D1B066A9EB}" dt="2025-05-02T10:56:58.167" v="1824" actId="47"/>
+        <pc:sldMkLst>
+          <pc:docMk/>
+          <pc:sldMk cId="2494117810" sldId="326"/>
+        </pc:sldMkLst>
+      </pc:sldChg>
+      <pc:sldChg chg="new del">
+        <pc:chgData name="Styxie x" userId="44e5248c228d5751" providerId="LiveId" clId="{BC3AD439-EA75-47CC-AFFB-98D1B066A9EB}" dt="2025-05-02T10:56:32.621" v="1821" actId="680"/>
+        <pc:sldMkLst>
+          <pc:docMk/>
+          <pc:sldMk cId="2895095336" sldId="326"/>
+        </pc:sldMkLst>
+      </pc:sldChg>
+      <pc:sldChg chg="new del">
+        <pc:chgData name="Styxie x" userId="44e5248c228d5751" providerId="LiveId" clId="{BC3AD439-EA75-47CC-AFFB-98D1B066A9EB}" dt="2025-05-02T08:05:43.850" v="1669" actId="47"/>
+        <pc:sldMkLst>
+          <pc:docMk/>
+          <pc:sldMk cId="3108122281" sldId="326"/>
+        </pc:sldMkLst>
+      </pc:sldChg>
+      <pc:sldChg chg="addSp modSp add mod">
+        <pc:chgData name="Styxie x" userId="44e5248c228d5751" providerId="LiveId" clId="{BC3AD439-EA75-47CC-AFFB-98D1B066A9EB}" dt="2025-05-02T11:03:25.818" v="2257" actId="207"/>
+        <pc:sldMkLst>
+          <pc:docMk/>
+          <pc:sldMk cId="2796311253" sldId="327"/>
+        </pc:sldMkLst>
+        <pc:spChg chg="mod">
+          <ac:chgData name="Styxie x" userId="44e5248c228d5751" providerId="LiveId" clId="{BC3AD439-EA75-47CC-AFFB-98D1B066A9EB}" dt="2025-05-02T11:02:31.968" v="2195" actId="1076"/>
+          <ac:spMkLst>
+            <pc:docMk/>
+            <pc:sldMk cId="2796311253" sldId="327"/>
+            <ac:spMk id="2" creationId="{11FEE1E1-E1B0-9A26-56D0-6F36F63833F7}"/>
+          </ac:spMkLst>
+        </pc:spChg>
+        <pc:spChg chg="add mod">
+          <ac:chgData name="Styxie x" userId="44e5248c228d5751" providerId="LiveId" clId="{BC3AD439-EA75-47CC-AFFB-98D1B066A9EB}" dt="2025-05-02T11:03:25.818" v="2257" actId="207"/>
+          <ac:spMkLst>
+            <pc:docMk/>
+            <pc:sldMk cId="2796311253" sldId="327"/>
+            <ac:spMk id="3" creationId="{466EBC71-532C-9464-C55D-AB4E15324ADC}"/>
+          </ac:spMkLst>
+        </pc:spChg>
+        <pc:spChg chg="mod">
+          <ac:chgData name="Styxie x" userId="44e5248c228d5751" providerId="LiveId" clId="{BC3AD439-EA75-47CC-AFFB-98D1B066A9EB}" dt="2025-05-02T11:02:09.894" v="2192" actId="207"/>
+          <ac:spMkLst>
+            <pc:docMk/>
+            <pc:sldMk cId="2796311253" sldId="327"/>
+            <ac:spMk id="4" creationId="{536858F8-76F1-475D-3F7A-837AD8526245}"/>
+          </ac:spMkLst>
+        </pc:spChg>
+        <pc:spChg chg="mod">
+          <ac:chgData name="Styxie x" userId="44e5248c228d5751" providerId="LiveId" clId="{BC3AD439-EA75-47CC-AFFB-98D1B066A9EB}" dt="2025-05-02T10:57:16.559" v="1840" actId="20577"/>
+          <ac:spMkLst>
+            <pc:docMk/>
+            <pc:sldMk cId="2796311253" sldId="327"/>
+            <ac:spMk id="9" creationId="{57F16CDF-38EC-ECFA-F850-E4081D6A70E9}"/>
           </ac:spMkLst>
         </pc:spChg>
       </pc:sldChg>
@@ -1452,7 +1652,7 @@
             <a:pPr algn="r" rtl="0"/>
             <a:fld id="{D8AF6929-4F16-43A6-8368-BF93843271D3}" type="datetime1">
               <a:rPr lang="fr-FR" smtClean="0"/>
-              <a:t>01/05/2025</a:t>
+              <a:t>02/05/2025</a:t>
             </a:fld>
             <a:endParaRPr lang="fr-FR" dirty="0"/>
           </a:p>
@@ -1622,7 +1822,7 @@
             <a:fld id="{4D9CF8A1-AC6C-4B34-A6AF-5306B09514F1}" type="datetime1">
               <a:rPr lang="fr-FR" smtClean="0"/>
               <a:pPr/>
-              <a:t>01/05/2025</a:t>
+              <a:t>02/05/2025</a:t>
             </a:fld>
             <a:endParaRPr lang="fr-FR" dirty="0"/>
           </a:p>
@@ -2132,7 +2332,93 @@
             <a:fld id="{3EBA5BD7-F043-4D1B-AA17-CD412FC534DE}" type="slidenum">
               <a:rPr lang="fr-FR" smtClean="0"/>
               <a:pPr algn="r"/>
-              <a:t>9</a:t>
+              <a:t>7</a:t>
+            </a:fld>
+            <a:endParaRPr lang="fr-FR" dirty="0"/>
+          </a:p>
+        </p:txBody>
+      </p:sp>
+    </p:spTree>
+    <p:extLst>
+      <p:ext uri="{BB962C8B-B14F-4D97-AF65-F5344CB8AC3E}">
+        <p14:creationId xmlns:p14="http://schemas.microsoft.com/office/powerpoint/2010/main" val="2016399827"/>
+      </p:ext>
+    </p:extLst>
+  </p:cSld>
+  <p:clrMapOvr>
+    <a:masterClrMapping/>
+  </p:clrMapOvr>
+</p:notes>
+</file>
+
+<file path=ppt/notesSlides/notesSlide4.xml><?xml version="1.0" encoding="utf-8"?>
+<p:notes xmlns:a="http://schemas.openxmlformats.org/drawingml/2006/main" xmlns:r="http://schemas.openxmlformats.org/officeDocument/2006/relationships" xmlns:p="http://schemas.openxmlformats.org/presentationml/2006/main">
+  <p:cSld>
+    <p:spTree>
+      <p:nvGrpSpPr>
+        <p:cNvPr id="1" name=""/>
+        <p:cNvGrpSpPr/>
+        <p:nvPr/>
+      </p:nvGrpSpPr>
+      <p:grpSpPr>
+        <a:xfrm>
+          <a:off x="0" y="0"/>
+          <a:ext cx="0" cy="0"/>
+          <a:chOff x="0" y="0"/>
+          <a:chExt cx="0" cy="0"/>
+        </a:xfrm>
+      </p:grpSpPr>
+      <p:sp>
+        <p:nvSpPr>
+          <p:cNvPr id="2" name="Slide Image Placeholder 1"/>
+          <p:cNvSpPr>
+            <a:spLocks noGrp="1" noRot="1" noChangeAspect="1"/>
+          </p:cNvSpPr>
+          <p:nvPr>
+            <p:ph type="sldImg"/>
+          </p:nvPr>
+        </p:nvSpPr>
+        <p:spPr/>
+      </p:sp>
+      <p:sp>
+        <p:nvSpPr>
+          <p:cNvPr id="3" name="Notes Placeholder 2"/>
+          <p:cNvSpPr>
+            <a:spLocks noGrp="1"/>
+          </p:cNvSpPr>
+          <p:nvPr>
+            <p:ph type="body" idx="1"/>
+          </p:nvPr>
+        </p:nvSpPr>
+        <p:spPr/>
+        <p:txBody>
+          <a:bodyPr/>
+          <a:lstStyle/>
+          <a:p>
+            <a:endParaRPr lang="fr-FR" dirty="0"/>
+          </a:p>
+        </p:txBody>
+      </p:sp>
+      <p:sp>
+        <p:nvSpPr>
+          <p:cNvPr id="4" name="Slide Number Placeholder 3"/>
+          <p:cNvSpPr>
+            <a:spLocks noGrp="1"/>
+          </p:cNvSpPr>
+          <p:nvPr>
+            <p:ph type="sldNum" sz="quarter" idx="5"/>
+          </p:nvPr>
+        </p:nvSpPr>
+        <p:spPr/>
+        <p:txBody>
+          <a:bodyPr/>
+          <a:lstStyle/>
+          <a:p>
+            <a:pPr algn="r"/>
+            <a:fld id="{3EBA5BD7-F043-4D1B-AA17-CD412FC534DE}" type="slidenum">
+              <a:rPr lang="fr-FR" smtClean="0"/>
+              <a:pPr algn="r"/>
+              <a:t>11</a:t>
             </a:fld>
             <a:endParaRPr lang="fr-FR" dirty="0"/>
           </a:p>
@@ -2151,7 +2437,7 @@
 </p:notes>
 </file>
 
-<file path=ppt/notesSlides/notesSlide4.xml><?xml version="1.0" encoding="utf-8"?>
+<file path=ppt/notesSlides/notesSlide5.xml><?xml version="1.0" encoding="utf-8"?>
 <p:notes xmlns:a="http://schemas.openxmlformats.org/drawingml/2006/main" xmlns:r="http://schemas.openxmlformats.org/officeDocument/2006/relationships" xmlns:p="http://schemas.openxmlformats.org/presentationml/2006/main">
   <p:cSld>
     <p:spTree>
@@ -2242,7 +2528,7 @@
             <a:fld id="{3EBA5BD7-F043-4D1B-AA17-CD412FC534DE}" type="slidenum">
               <a:rPr lang="fr-FR" smtClean="0"/>
               <a:pPr algn="r"/>
-              <a:t>10</a:t>
+              <a:t>12</a:t>
             </a:fld>
             <a:endParaRPr lang="fr-FR" dirty="0"/>
           </a:p>
@@ -2252,92 +2538,6 @@
     <p:extLst>
       <p:ext uri="{BB962C8B-B14F-4D97-AF65-F5344CB8AC3E}">
         <p14:creationId xmlns:p14="http://schemas.microsoft.com/office/powerpoint/2010/main" val="1906958966"/>
-      </p:ext>
-    </p:extLst>
-  </p:cSld>
-  <p:clrMapOvr>
-    <a:masterClrMapping/>
-  </p:clrMapOvr>
-</p:notes>
-</file>
-
-<file path=ppt/notesSlides/notesSlide5.xml><?xml version="1.0" encoding="utf-8"?>
-<p:notes xmlns:a="http://schemas.openxmlformats.org/drawingml/2006/main" xmlns:r="http://schemas.openxmlformats.org/officeDocument/2006/relationships" xmlns:p="http://schemas.openxmlformats.org/presentationml/2006/main">
-  <p:cSld>
-    <p:spTree>
-      <p:nvGrpSpPr>
-        <p:cNvPr id="1" name=""/>
-        <p:cNvGrpSpPr/>
-        <p:nvPr/>
-      </p:nvGrpSpPr>
-      <p:grpSpPr>
-        <a:xfrm>
-          <a:off x="0" y="0"/>
-          <a:ext cx="0" cy="0"/>
-          <a:chOff x="0" y="0"/>
-          <a:chExt cx="0" cy="0"/>
-        </a:xfrm>
-      </p:grpSpPr>
-      <p:sp>
-        <p:nvSpPr>
-          <p:cNvPr id="2" name="Slide Image Placeholder 1"/>
-          <p:cNvSpPr>
-            <a:spLocks noGrp="1" noRot="1" noChangeAspect="1"/>
-          </p:cNvSpPr>
-          <p:nvPr>
-            <p:ph type="sldImg"/>
-          </p:nvPr>
-        </p:nvSpPr>
-        <p:spPr/>
-      </p:sp>
-      <p:sp>
-        <p:nvSpPr>
-          <p:cNvPr id="3" name="Notes Placeholder 2"/>
-          <p:cNvSpPr>
-            <a:spLocks noGrp="1"/>
-          </p:cNvSpPr>
-          <p:nvPr>
-            <p:ph type="body" idx="1"/>
-          </p:nvPr>
-        </p:nvSpPr>
-        <p:spPr/>
-        <p:txBody>
-          <a:bodyPr/>
-          <a:lstStyle/>
-          <a:p>
-            <a:endParaRPr lang="fr-FR" dirty="0"/>
-          </a:p>
-        </p:txBody>
-      </p:sp>
-      <p:sp>
-        <p:nvSpPr>
-          <p:cNvPr id="4" name="Slide Number Placeholder 3"/>
-          <p:cNvSpPr>
-            <a:spLocks noGrp="1"/>
-          </p:cNvSpPr>
-          <p:nvPr>
-            <p:ph type="sldNum" sz="quarter" idx="5"/>
-          </p:nvPr>
-        </p:nvSpPr>
-        <p:spPr/>
-        <p:txBody>
-          <a:bodyPr/>
-          <a:lstStyle/>
-          <a:p>
-            <a:pPr algn="r"/>
-            <a:fld id="{3EBA5BD7-F043-4D1B-AA17-CD412FC534DE}" type="slidenum">
-              <a:rPr lang="fr-FR" smtClean="0"/>
-              <a:pPr algn="r"/>
-              <a:t>12</a:t>
-            </a:fld>
-            <a:endParaRPr lang="fr-FR" dirty="0"/>
-          </a:p>
-        </p:txBody>
-      </p:sp>
-    </p:spTree>
-    <p:extLst>
-      <p:ext uri="{BB962C8B-B14F-4D97-AF65-F5344CB8AC3E}">
-        <p14:creationId xmlns:p14="http://schemas.microsoft.com/office/powerpoint/2010/main" val="258671979"/>
       </p:ext>
     </p:extLst>
   </p:cSld>
@@ -2391,6 +2591,92 @@
           <a:bodyPr/>
           <a:lstStyle/>
           <a:p>
+            <a:endParaRPr lang="fr-FR" dirty="0"/>
+          </a:p>
+        </p:txBody>
+      </p:sp>
+      <p:sp>
+        <p:nvSpPr>
+          <p:cNvPr id="4" name="Slide Number Placeholder 3"/>
+          <p:cNvSpPr>
+            <a:spLocks noGrp="1"/>
+          </p:cNvSpPr>
+          <p:nvPr>
+            <p:ph type="sldNum" sz="quarter" idx="5"/>
+          </p:nvPr>
+        </p:nvSpPr>
+        <p:spPr/>
+        <p:txBody>
+          <a:bodyPr/>
+          <a:lstStyle/>
+          <a:p>
+            <a:pPr algn="r"/>
+            <a:fld id="{3EBA5BD7-F043-4D1B-AA17-CD412FC534DE}" type="slidenum">
+              <a:rPr lang="fr-FR" smtClean="0"/>
+              <a:pPr algn="r"/>
+              <a:t>14</a:t>
+            </a:fld>
+            <a:endParaRPr lang="fr-FR" dirty="0"/>
+          </a:p>
+        </p:txBody>
+      </p:sp>
+    </p:spTree>
+    <p:extLst>
+      <p:ext uri="{BB962C8B-B14F-4D97-AF65-F5344CB8AC3E}">
+        <p14:creationId xmlns:p14="http://schemas.microsoft.com/office/powerpoint/2010/main" val="258671979"/>
+      </p:ext>
+    </p:extLst>
+  </p:cSld>
+  <p:clrMapOvr>
+    <a:masterClrMapping/>
+  </p:clrMapOvr>
+</p:notes>
+</file>
+
+<file path=ppt/notesSlides/notesSlide7.xml><?xml version="1.0" encoding="utf-8"?>
+<p:notes xmlns:a="http://schemas.openxmlformats.org/drawingml/2006/main" xmlns:r="http://schemas.openxmlformats.org/officeDocument/2006/relationships" xmlns:p="http://schemas.openxmlformats.org/presentationml/2006/main">
+  <p:cSld>
+    <p:spTree>
+      <p:nvGrpSpPr>
+        <p:cNvPr id="1" name=""/>
+        <p:cNvGrpSpPr/>
+        <p:nvPr/>
+      </p:nvGrpSpPr>
+      <p:grpSpPr>
+        <a:xfrm>
+          <a:off x="0" y="0"/>
+          <a:ext cx="0" cy="0"/>
+          <a:chOff x="0" y="0"/>
+          <a:chExt cx="0" cy="0"/>
+        </a:xfrm>
+      </p:grpSpPr>
+      <p:sp>
+        <p:nvSpPr>
+          <p:cNvPr id="2" name="Slide Image Placeholder 1"/>
+          <p:cNvSpPr>
+            <a:spLocks noGrp="1" noRot="1" noChangeAspect="1"/>
+          </p:cNvSpPr>
+          <p:nvPr>
+            <p:ph type="sldImg"/>
+          </p:nvPr>
+        </p:nvSpPr>
+        <p:spPr/>
+      </p:sp>
+      <p:sp>
+        <p:nvSpPr>
+          <p:cNvPr id="3" name="Notes Placeholder 2"/>
+          <p:cNvSpPr>
+            <a:spLocks noGrp="1"/>
+          </p:cNvSpPr>
+          <p:nvPr>
+            <p:ph type="body" idx="1"/>
+          </p:nvPr>
+        </p:nvSpPr>
+        <p:spPr/>
+        <p:txBody>
+          <a:bodyPr/>
+          <a:lstStyle/>
+          <a:p>
             <a:pPr marL="0" marR="0" lvl="0" indent="0" algn="l" defTabSz="1218987" rtl="0" eaLnBrk="1" fontAlgn="auto" latinLnBrk="0" hangingPunct="1">
               <a:lnSpc>
                 <a:spcPct val="100000"/>
@@ -2431,7 +2717,7 @@
             <a:fld id="{3EBA5BD7-F043-4D1B-AA17-CD412FC534DE}" type="slidenum">
               <a:rPr lang="fr-FR" smtClean="0"/>
               <a:pPr algn="r"/>
-              <a:t>13</a:t>
+              <a:t>15</a:t>
             </a:fld>
             <a:endParaRPr lang="fr-FR" dirty="0"/>
           </a:p>
@@ -3212,7 +3498,7 @@
           <a:p>
             <a:fld id="{1BD9953E-5BC6-4666-A734-E77D5FB3D583}" type="datetime1">
               <a:rPr lang="fr-FR" smtClean="0"/>
-              <a:t>01/05/2025</a:t>
+              <a:t>02/05/2025</a:t>
             </a:fld>
             <a:endParaRPr lang="fr-FR" dirty="0"/>
           </a:p>
@@ -3418,7 +3704,7 @@
           <a:p>
             <a:fld id="{5C7676E2-973F-4113-AEBA-F1FEDA77C192}" type="datetime1">
               <a:rPr lang="fr-FR" smtClean="0"/>
-              <a:t>01/05/2025</a:t>
+              <a:t>02/05/2025</a:t>
             </a:fld>
             <a:endParaRPr lang="fr-FR" dirty="0"/>
           </a:p>
@@ -3634,7 +3920,7 @@
           <a:p>
             <a:fld id="{7FA23D85-784A-4D25-8A51-8A618AADDEDC}" type="datetime1">
               <a:rPr lang="fr-FR" smtClean="0"/>
-              <a:t>01/05/2025</a:t>
+              <a:t>02/05/2025</a:t>
             </a:fld>
             <a:endParaRPr lang="fr-FR" dirty="0"/>
           </a:p>
@@ -3840,7 +4126,7 @@
           <a:p>
             <a:fld id="{34E2683B-2A01-44F3-996F-0E755F28A700}" type="datetime1">
               <a:rPr lang="fr-FR" smtClean="0"/>
-              <a:t>01/05/2025</a:t>
+              <a:t>02/05/2025</a:t>
             </a:fld>
             <a:endParaRPr lang="fr-FR" dirty="0"/>
           </a:p>
@@ -4280,7 +4566,7 @@
           <a:p>
             <a:fld id="{07EC882C-578E-43CF-9E65-BCBD84298E0F}" type="datetime1">
               <a:rPr lang="fr-FR" smtClean="0"/>
-              <a:t>01/05/2025</a:t>
+              <a:t>02/05/2025</a:t>
             </a:fld>
             <a:endParaRPr lang="fr-FR" dirty="0"/>
           </a:p>
@@ -4592,7 +4878,7 @@
           <a:p>
             <a:fld id="{CA58C49A-26BC-4FB4-A911-B63E6643DEF4}" type="datetime1">
               <a:rPr lang="fr-FR" smtClean="0"/>
-              <a:t>01/05/2025</a:t>
+              <a:t>02/05/2025</a:t>
             </a:fld>
             <a:endParaRPr lang="fr-FR" dirty="0"/>
           </a:p>
@@ -5056,7 +5342,7 @@
           <a:p>
             <a:fld id="{10F8D90C-592A-4BB3-869D-943E473FE966}" type="datetime1">
               <a:rPr lang="fr-FR" smtClean="0"/>
-              <a:t>01/05/2025</a:t>
+              <a:t>02/05/2025</a:t>
             </a:fld>
             <a:endParaRPr lang="fr-FR" dirty="0"/>
           </a:p>
@@ -5194,7 +5480,7 @@
           <a:p>
             <a:fld id="{D6F639DD-CC71-40D6-8955-FCCBF169A9ED}" type="datetime1">
               <a:rPr lang="fr-FR" smtClean="0"/>
-              <a:t>01/05/2025</a:t>
+              <a:t>02/05/2025</a:t>
             </a:fld>
             <a:endParaRPr lang="fr-FR" dirty="0"/>
           </a:p>
@@ -5308,7 +5594,7 @@
           <a:p>
             <a:fld id="{5323D875-6F7C-483B-BF0E-1653BA82CB4B}" type="datetime1">
               <a:rPr lang="fr-FR" smtClean="0"/>
-              <a:t>01/05/2025</a:t>
+              <a:t>02/05/2025</a:t>
             </a:fld>
             <a:endParaRPr lang="fr-FR" dirty="0"/>
           </a:p>
@@ -5615,7 +5901,7 @@
           <a:p>
             <a:fld id="{EE084598-F858-4552-A076-315DD4B147D7}" type="datetime1">
               <a:rPr lang="fr-FR" smtClean="0"/>
-              <a:t>01/05/2025</a:t>
+              <a:t>02/05/2025</a:t>
             </a:fld>
             <a:endParaRPr lang="fr-FR" dirty="0"/>
           </a:p>
@@ -5912,7 +6198,7 @@
           <a:p>
             <a:fld id="{894F228E-727C-4D01-A256-B7DDCE3C73B8}" type="datetime1">
               <a:rPr lang="fr-FR" smtClean="0"/>
-              <a:t>01/05/2025</a:t>
+              <a:t>02/05/2025</a:t>
             </a:fld>
             <a:endParaRPr lang="fr-FR" dirty="0"/>
           </a:p>
@@ -6536,7 +6822,7 @@
           <a:p>
             <a:fld id="{6BFA7D55-BD47-4D12-8CDF-622FB6DC3FC6}" type="datetime1">
               <a:rPr lang="fr-FR" smtClean="0"/>
-              <a:t>01/05/2025</a:t>
+              <a:t>02/05/2025</a:t>
             </a:fld>
             <a:endParaRPr lang="fr-FR" dirty="0"/>
           </a:p>
@@ -7125,6 +7411,763 @@
         <p:cNvPr id="1" name="">
           <a:extLst>
             <a:ext uri="{FF2B5EF4-FFF2-40B4-BE49-F238E27FC236}">
+              <a16:creationId xmlns:a16="http://schemas.microsoft.com/office/drawing/2014/main" id="{1E8F1013-5BD0-92FD-E656-43A21555CFEA}"/>
+            </a:ext>
+          </a:extLst>
+        </p:cNvPr>
+        <p:cNvGrpSpPr/>
+        <p:nvPr/>
+      </p:nvGrpSpPr>
+      <p:grpSpPr>
+        <a:xfrm>
+          <a:off x="0" y="0"/>
+          <a:ext cx="0" cy="0"/>
+          <a:chOff x="0" y="0"/>
+          <a:chExt cx="0" cy="0"/>
+        </a:xfrm>
+      </p:grpSpPr>
+      <p:sp>
+        <p:nvSpPr>
+          <p:cNvPr id="2" name="Title 1">
+            <a:extLst>
+              <a:ext uri="{FF2B5EF4-FFF2-40B4-BE49-F238E27FC236}">
+                <a16:creationId xmlns:a16="http://schemas.microsoft.com/office/drawing/2014/main" id="{0E5C5D86-C650-1D4F-60F0-5F74D39FEB75}"/>
+              </a:ext>
+            </a:extLst>
+          </p:cNvPr>
+          <p:cNvSpPr>
+            <a:spLocks noGrp="1"/>
+          </p:cNvSpPr>
+          <p:nvPr>
+            <p:ph type="title"/>
+          </p:nvPr>
+        </p:nvSpPr>
+        <p:spPr>
+          <a:xfrm>
+            <a:off x="914161" y="-104109"/>
+            <a:ext cx="10360501" cy="1223963"/>
+          </a:xfrm>
+        </p:spPr>
+        <p:txBody>
+          <a:bodyPr>
+            <a:normAutofit/>
+          </a:bodyPr>
+          <a:lstStyle/>
+          <a:p>
+            <a:r>
+              <a:rPr lang="fr-FR" sz="4400" b="1" dirty="0">
+                <a:solidFill>
+                  <a:schemeClr val="accent1"/>
+                </a:solidFill>
+              </a:rPr>
+              <a:t>Conception</a:t>
+            </a:r>
+            <a:endParaRPr lang="fr-FR" sz="4400" dirty="0"/>
+          </a:p>
+        </p:txBody>
+      </p:sp>
+      <p:sp>
+        <p:nvSpPr>
+          <p:cNvPr id="7" name="Date Placeholder 6">
+            <a:extLst>
+              <a:ext uri="{FF2B5EF4-FFF2-40B4-BE49-F238E27FC236}">
+                <a16:creationId xmlns:a16="http://schemas.microsoft.com/office/drawing/2014/main" id="{F3E4CEF6-0463-3DF3-3A0C-68B1ECBC3D7F}"/>
+              </a:ext>
+            </a:extLst>
+          </p:cNvPr>
+          <p:cNvSpPr>
+            <a:spLocks noGrp="1"/>
+          </p:cNvSpPr>
+          <p:nvPr>
+            <p:ph type="dt" sz="half" idx="10"/>
+          </p:nvPr>
+        </p:nvSpPr>
+        <p:spPr/>
+        <p:txBody>
+          <a:bodyPr/>
+          <a:lstStyle/>
+          <a:p>
+            <a:fld id="{10F8D90C-592A-4BB3-869D-943E473FE966}" type="datetime1">
+              <a:rPr lang="fr-FR" smtClean="0"/>
+              <a:t>02/05/2025</a:t>
+            </a:fld>
+            <a:endParaRPr lang="fr-FR" dirty="0"/>
+          </a:p>
+        </p:txBody>
+      </p:sp>
+      <p:sp>
+        <p:nvSpPr>
+          <p:cNvPr id="8" name="Slide Number Placeholder 7">
+            <a:extLst>
+              <a:ext uri="{FF2B5EF4-FFF2-40B4-BE49-F238E27FC236}">
+                <a16:creationId xmlns:a16="http://schemas.microsoft.com/office/drawing/2014/main" id="{E4E39261-32E1-0791-2C3E-3B9134B3EAA6}"/>
+              </a:ext>
+            </a:extLst>
+          </p:cNvPr>
+          <p:cNvSpPr>
+            <a:spLocks noGrp="1"/>
+          </p:cNvSpPr>
+          <p:nvPr>
+            <p:ph type="sldNum" sz="quarter" idx="12"/>
+          </p:nvPr>
+        </p:nvSpPr>
+        <p:spPr/>
+        <p:txBody>
+          <a:bodyPr/>
+          <a:lstStyle/>
+          <a:p>
+            <a:pPr algn="r"/>
+            <a:fld id="{C014DD1E-5D91-48A3-AD6D-45FBA980D106}" type="slidenum">
+              <a:rPr lang="fr-FR" sz="2000" smtClean="0"/>
+              <a:pPr algn="r"/>
+              <a:t>10</a:t>
+            </a:fld>
+            <a:endParaRPr lang="fr-FR" sz="2000" dirty="0"/>
+          </a:p>
+        </p:txBody>
+      </p:sp>
+      <p:pic>
+        <p:nvPicPr>
+          <p:cNvPr id="4" name="Picture 3" descr="A computer circuit board with many different components&#10;&#10;AI-generated content may be incorrect.">
+            <a:extLst>
+              <a:ext uri="{FF2B5EF4-FFF2-40B4-BE49-F238E27FC236}">
+                <a16:creationId xmlns:a16="http://schemas.microsoft.com/office/drawing/2014/main" id="{B148C019-1EB0-5059-B09F-013EB2987F30}"/>
+              </a:ext>
+            </a:extLst>
+          </p:cNvPr>
+          <p:cNvPicPr>
+            <a:picLocks noChangeAspect="1"/>
+          </p:cNvPicPr>
+          <p:nvPr/>
+        </p:nvPicPr>
+        <p:blipFill>
+          <a:blip r:embed="rId2"/>
+          <a:stretch>
+            <a:fillRect/>
+          </a:stretch>
+        </p:blipFill>
+        <p:spPr>
+          <a:xfrm>
+            <a:off x="765820" y="1600886"/>
+            <a:ext cx="4817133" cy="3893322"/>
+          </a:xfrm>
+          <a:prstGeom prst="rect">
+            <a:avLst/>
+          </a:prstGeom>
+        </p:spPr>
+      </p:pic>
+      <p:pic>
+        <p:nvPicPr>
+          <p:cNvPr id="1026" name="Picture 2" descr="Carte Mere avec des modules">
+            <a:extLst>
+              <a:ext uri="{FF2B5EF4-FFF2-40B4-BE49-F238E27FC236}">
+                <a16:creationId xmlns:a16="http://schemas.microsoft.com/office/drawing/2014/main" id="{47F9E110-BF9F-FDB2-4633-396C84454E05}"/>
+              </a:ext>
+            </a:extLst>
+          </p:cNvPr>
+          <p:cNvPicPr>
+            <a:picLocks noChangeAspect="1" noChangeArrowheads="1"/>
+          </p:cNvPicPr>
+          <p:nvPr/>
+        </p:nvPicPr>
+        <p:blipFill>
+          <a:blip r:embed="rId3">
+            <a:extLst>
+              <a:ext uri="{28A0092B-C50C-407E-A947-70E740481C1C}">
+                <a14:useLocalDpi xmlns:a14="http://schemas.microsoft.com/office/drawing/2010/main" val="0"/>
+              </a:ext>
+            </a:extLst>
+          </a:blip>
+          <a:srcRect/>
+          <a:stretch>
+            <a:fillRect/>
+          </a:stretch>
+        </p:blipFill>
+        <p:spPr bwMode="auto">
+          <a:xfrm>
+            <a:off x="6596821" y="1403661"/>
+            <a:ext cx="4677841" cy="4287772"/>
+          </a:xfrm>
+          <a:prstGeom prst="rect">
+            <a:avLst/>
+          </a:prstGeom>
+          <a:noFill/>
+          <a:extLst>
+            <a:ext uri="{909E8E84-426E-40DD-AFC4-6F175D3DCCD1}">
+              <a14:hiddenFill xmlns:a14="http://schemas.microsoft.com/office/drawing/2010/main">
+                <a:solidFill>
+                  <a:srgbClr val="FFFFFF"/>
+                </a:solidFill>
+              </a14:hiddenFill>
+            </a:ext>
+          </a:extLst>
+        </p:spPr>
+      </p:pic>
+    </p:spTree>
+    <p:extLst>
+      <p:ext uri="{BB962C8B-B14F-4D97-AF65-F5344CB8AC3E}">
+        <p14:creationId xmlns:p14="http://schemas.microsoft.com/office/powerpoint/2010/main" val="930243773"/>
+      </p:ext>
+    </p:extLst>
+  </p:cSld>
+  <p:clrMapOvr>
+    <a:masterClrMapping/>
+  </p:clrMapOvr>
+  <mc:AlternateContent xmlns:mc="http://schemas.openxmlformats.org/markup-compatibility/2006" xmlns:p14="http://schemas.microsoft.com/office/powerpoint/2010/main">
+    <mc:Choice Requires="p14">
+      <p:transition spd="med" p14:dur="700">
+        <p:fade/>
+      </p:transition>
+    </mc:Choice>
+    <mc:Fallback xmlns="">
+      <p:transition spd="med">
+        <p:fade/>
+      </p:transition>
+    </mc:Fallback>
+  </mc:AlternateContent>
+</p:sld>
+</file>
+
+<file path=ppt/slides/slide11.xml><?xml version="1.0" encoding="utf-8"?>
+<p:sld xmlns:a="http://schemas.openxmlformats.org/drawingml/2006/main" xmlns:r="http://schemas.openxmlformats.org/officeDocument/2006/relationships" xmlns:p="http://schemas.openxmlformats.org/presentationml/2006/main">
+  <p:cSld>
+    <p:spTree>
+      <p:nvGrpSpPr>
+        <p:cNvPr id="1" name="">
+          <a:extLst>
+            <a:ext uri="{FF2B5EF4-FFF2-40B4-BE49-F238E27FC236}">
+              <a16:creationId xmlns:a16="http://schemas.microsoft.com/office/drawing/2014/main" id="{F6F1CE0A-1120-DFA4-B19D-209FB47BC8EE}"/>
+            </a:ext>
+          </a:extLst>
+        </p:cNvPr>
+        <p:cNvGrpSpPr/>
+        <p:nvPr/>
+      </p:nvGrpSpPr>
+      <p:grpSpPr>
+        <a:xfrm>
+          <a:off x="0" y="0"/>
+          <a:ext cx="0" cy="0"/>
+          <a:chOff x="0" y="0"/>
+          <a:chExt cx="0" cy="0"/>
+        </a:xfrm>
+      </p:grpSpPr>
+      <p:sp>
+        <p:nvSpPr>
+          <p:cNvPr id="2" name="Title 1">
+            <a:extLst>
+              <a:ext uri="{FF2B5EF4-FFF2-40B4-BE49-F238E27FC236}">
+                <a16:creationId xmlns:a16="http://schemas.microsoft.com/office/drawing/2014/main" id="{0D75051E-A06C-8A7E-3782-A35F9425B1C9}"/>
+              </a:ext>
+            </a:extLst>
+          </p:cNvPr>
+          <p:cNvSpPr>
+            <a:spLocks noGrp="1"/>
+          </p:cNvSpPr>
+          <p:nvPr>
+            <p:ph type="title"/>
+          </p:nvPr>
+        </p:nvSpPr>
+        <p:spPr>
+          <a:xfrm>
+            <a:off x="914161" y="-104109"/>
+            <a:ext cx="10360501" cy="1223963"/>
+          </a:xfrm>
+        </p:spPr>
+        <p:txBody>
+          <a:bodyPr>
+            <a:normAutofit/>
+          </a:bodyPr>
+          <a:lstStyle/>
+          <a:p>
+            <a:r>
+              <a:rPr lang="fr-FR" sz="4400" b="1" dirty="0">
+                <a:solidFill>
+                  <a:schemeClr val="accent1"/>
+                </a:solidFill>
+              </a:rPr>
+              <a:t>Vérification</a:t>
+            </a:r>
+          </a:p>
+        </p:txBody>
+      </p:sp>
+      <p:sp>
+        <p:nvSpPr>
+          <p:cNvPr id="7" name="Date Placeholder 6">
+            <a:extLst>
+              <a:ext uri="{FF2B5EF4-FFF2-40B4-BE49-F238E27FC236}">
+                <a16:creationId xmlns:a16="http://schemas.microsoft.com/office/drawing/2014/main" id="{FA0E684A-4C01-EA2D-87EC-9464713B7519}"/>
+              </a:ext>
+            </a:extLst>
+          </p:cNvPr>
+          <p:cNvSpPr>
+            <a:spLocks noGrp="1"/>
+          </p:cNvSpPr>
+          <p:nvPr>
+            <p:ph type="dt" sz="half" idx="10"/>
+          </p:nvPr>
+        </p:nvSpPr>
+        <p:spPr/>
+        <p:txBody>
+          <a:bodyPr/>
+          <a:lstStyle/>
+          <a:p>
+            <a:fld id="{10F8D90C-592A-4BB3-869D-943E473FE966}" type="datetime1">
+              <a:rPr lang="fr-FR" smtClean="0"/>
+              <a:t>02/05/2025</a:t>
+            </a:fld>
+            <a:endParaRPr lang="fr-FR" dirty="0"/>
+          </a:p>
+        </p:txBody>
+      </p:sp>
+      <p:sp>
+        <p:nvSpPr>
+          <p:cNvPr id="8" name="Slide Number Placeholder 7">
+            <a:extLst>
+              <a:ext uri="{FF2B5EF4-FFF2-40B4-BE49-F238E27FC236}">
+                <a16:creationId xmlns:a16="http://schemas.microsoft.com/office/drawing/2014/main" id="{1D46981B-22CC-2C69-2B2C-AAE2DC49C56C}"/>
+              </a:ext>
+            </a:extLst>
+          </p:cNvPr>
+          <p:cNvSpPr>
+            <a:spLocks noGrp="1"/>
+          </p:cNvSpPr>
+          <p:nvPr>
+            <p:ph type="sldNum" sz="quarter" idx="12"/>
+          </p:nvPr>
+        </p:nvSpPr>
+        <p:spPr/>
+        <p:txBody>
+          <a:bodyPr/>
+          <a:lstStyle/>
+          <a:p>
+            <a:pPr algn="r"/>
+            <a:fld id="{C014DD1E-5D91-48A3-AD6D-45FBA980D106}" type="slidenum">
+              <a:rPr lang="fr-FR" sz="2000" smtClean="0"/>
+              <a:pPr algn="r"/>
+              <a:t>11</a:t>
+            </a:fld>
+            <a:endParaRPr lang="fr-FR" sz="2000" dirty="0"/>
+          </a:p>
+        </p:txBody>
+      </p:sp>
+      <p:sp>
+        <p:nvSpPr>
+          <p:cNvPr id="3" name="Espace réservé du contenu 2">
+            <a:extLst>
+              <a:ext uri="{FF2B5EF4-FFF2-40B4-BE49-F238E27FC236}">
+                <a16:creationId xmlns:a16="http://schemas.microsoft.com/office/drawing/2014/main" id="{85C2CE01-9046-6255-F2E0-0A495BBDEF5E}"/>
+              </a:ext>
+            </a:extLst>
+          </p:cNvPr>
+          <p:cNvSpPr txBox="1">
+            <a:spLocks/>
+          </p:cNvSpPr>
+          <p:nvPr/>
+        </p:nvSpPr>
+        <p:spPr>
+          <a:xfrm>
+            <a:off x="1218882" y="1193372"/>
+            <a:ext cx="10736089" cy="2736304"/>
+          </a:xfrm>
+          <a:prstGeom prst="rect">
+            <a:avLst/>
+          </a:prstGeom>
+        </p:spPr>
+        <p:txBody>
+          <a:bodyPr vert="horz" lIns="121899" tIns="60949" rIns="121899" bIns="60949" rtlCol="0" anchor="t">
+            <a:noAutofit/>
+          </a:bodyPr>
+          <a:lstStyle>
+            <a:lvl1pPr marL="0" indent="0" algn="l" defTabSz="1218987" rtl="0" eaLnBrk="1" latinLnBrk="0" hangingPunct="1">
+              <a:lnSpc>
+                <a:spcPct val="90000"/>
+              </a:lnSpc>
+              <a:spcBef>
+                <a:spcPts val="0"/>
+              </a:spcBef>
+              <a:buClr>
+                <a:schemeClr val="accent1"/>
+              </a:buClr>
+              <a:buSzPct val="100000"/>
+              <a:buFont typeface="Arial" pitchFamily="34" charset="0"/>
+              <a:buNone/>
+              <a:defRPr sz="2800" b="0" kern="1200" cap="all" spc="200" baseline="0">
+                <a:solidFill>
+                  <a:schemeClr val="accent1"/>
+                </a:solidFill>
+                <a:latin typeface="+mn-lt"/>
+                <a:ea typeface="+mn-ea"/>
+                <a:cs typeface="+mn-cs"/>
+              </a:defRPr>
+            </a:lvl1pPr>
+            <a:lvl2pPr marL="609493" indent="0" algn="l" defTabSz="1218987" rtl="0" eaLnBrk="1" latinLnBrk="0" hangingPunct="1">
+              <a:lnSpc>
+                <a:spcPct val="90000"/>
+              </a:lnSpc>
+              <a:spcBef>
+                <a:spcPts val="800"/>
+              </a:spcBef>
+              <a:buClr>
+                <a:schemeClr val="accent1"/>
+              </a:buClr>
+              <a:buSzPct val="80000"/>
+              <a:buFont typeface="Arial" pitchFamily="34" charset="0"/>
+              <a:buNone/>
+              <a:defRPr sz="2700" b="1" kern="1200">
+                <a:solidFill>
+                  <a:schemeClr val="tx1"/>
+                </a:solidFill>
+                <a:latin typeface="+mn-lt"/>
+                <a:ea typeface="+mn-ea"/>
+                <a:cs typeface="+mn-cs"/>
+              </a:defRPr>
+            </a:lvl2pPr>
+            <a:lvl3pPr marL="1218987" indent="0" algn="l" defTabSz="1218987" rtl="0" eaLnBrk="1" latinLnBrk="0" hangingPunct="1">
+              <a:lnSpc>
+                <a:spcPct val="90000"/>
+              </a:lnSpc>
+              <a:spcBef>
+                <a:spcPts val="800"/>
+              </a:spcBef>
+              <a:buClr>
+                <a:schemeClr val="accent1"/>
+              </a:buClr>
+              <a:buSzPct val="80000"/>
+              <a:buFont typeface="Arial" pitchFamily="34" charset="0"/>
+              <a:buNone/>
+              <a:defRPr sz="2400" b="1" kern="1200">
+                <a:solidFill>
+                  <a:schemeClr val="tx1"/>
+                </a:solidFill>
+                <a:latin typeface="+mn-lt"/>
+                <a:ea typeface="+mn-ea"/>
+                <a:cs typeface="+mn-cs"/>
+              </a:defRPr>
+            </a:lvl3pPr>
+            <a:lvl4pPr marL="1828480" indent="0" algn="l" defTabSz="1218987" rtl="0" eaLnBrk="1" latinLnBrk="0" hangingPunct="1">
+              <a:lnSpc>
+                <a:spcPct val="90000"/>
+              </a:lnSpc>
+              <a:spcBef>
+                <a:spcPts val="800"/>
+              </a:spcBef>
+              <a:buClr>
+                <a:schemeClr val="accent1"/>
+              </a:buClr>
+              <a:buSzPct val="80000"/>
+              <a:buFont typeface="Arial" pitchFamily="34" charset="0"/>
+              <a:buNone/>
+              <a:defRPr sz="2100" b="1" kern="1200">
+                <a:solidFill>
+                  <a:schemeClr val="tx1"/>
+                </a:solidFill>
+                <a:latin typeface="+mn-lt"/>
+                <a:ea typeface="+mn-ea"/>
+                <a:cs typeface="+mn-cs"/>
+              </a:defRPr>
+            </a:lvl4pPr>
+            <a:lvl5pPr marL="2437973" indent="0" algn="l" defTabSz="1218987" rtl="0" eaLnBrk="1" latinLnBrk="0" hangingPunct="1">
+              <a:lnSpc>
+                <a:spcPct val="90000"/>
+              </a:lnSpc>
+              <a:spcBef>
+                <a:spcPts val="800"/>
+              </a:spcBef>
+              <a:buClr>
+                <a:schemeClr val="accent1"/>
+              </a:buClr>
+              <a:buSzPct val="80000"/>
+              <a:buFont typeface="Arial" pitchFamily="34" charset="0"/>
+              <a:buNone/>
+              <a:defRPr sz="2100" b="1" kern="1200">
+                <a:solidFill>
+                  <a:schemeClr val="tx1"/>
+                </a:solidFill>
+                <a:latin typeface="+mn-lt"/>
+                <a:ea typeface="+mn-ea"/>
+                <a:cs typeface="+mn-cs"/>
+              </a:defRPr>
+            </a:lvl5pPr>
+            <a:lvl6pPr marL="3047467" indent="0" algn="l" defTabSz="1218987" rtl="0" eaLnBrk="1" latinLnBrk="0" hangingPunct="1">
+              <a:lnSpc>
+                <a:spcPct val="90000"/>
+              </a:lnSpc>
+              <a:spcBef>
+                <a:spcPts val="800"/>
+              </a:spcBef>
+              <a:buClr>
+                <a:schemeClr val="accent1"/>
+              </a:buClr>
+              <a:buSzPct val="80000"/>
+              <a:buFont typeface="Arial" pitchFamily="34" charset="0"/>
+              <a:buNone/>
+              <a:defRPr sz="2100" b="1" kern="1200">
+                <a:solidFill>
+                  <a:schemeClr val="tx1"/>
+                </a:solidFill>
+                <a:latin typeface="+mn-lt"/>
+                <a:ea typeface="+mn-ea"/>
+                <a:cs typeface="+mn-cs"/>
+              </a:defRPr>
+            </a:lvl6pPr>
+            <a:lvl7pPr marL="3656960" indent="0" algn="l" defTabSz="1218987" rtl="0" eaLnBrk="1" latinLnBrk="0" hangingPunct="1">
+              <a:lnSpc>
+                <a:spcPct val="90000"/>
+              </a:lnSpc>
+              <a:spcBef>
+                <a:spcPts val="800"/>
+              </a:spcBef>
+              <a:buClr>
+                <a:schemeClr val="accent1"/>
+              </a:buClr>
+              <a:buSzPct val="80000"/>
+              <a:buFont typeface="Arial" pitchFamily="34" charset="0"/>
+              <a:buNone/>
+              <a:defRPr sz="2100" b="1" kern="1200">
+                <a:solidFill>
+                  <a:schemeClr val="tx1"/>
+                </a:solidFill>
+                <a:latin typeface="+mn-lt"/>
+                <a:ea typeface="+mn-ea"/>
+                <a:cs typeface="+mn-cs"/>
+              </a:defRPr>
+            </a:lvl7pPr>
+            <a:lvl8pPr marL="4266453" indent="0" algn="l" defTabSz="1218987" rtl="0" eaLnBrk="1" latinLnBrk="0" hangingPunct="1">
+              <a:lnSpc>
+                <a:spcPct val="90000"/>
+              </a:lnSpc>
+              <a:spcBef>
+                <a:spcPts val="800"/>
+              </a:spcBef>
+              <a:buClr>
+                <a:schemeClr val="accent1"/>
+              </a:buClr>
+              <a:buSzPct val="80000"/>
+              <a:buFont typeface="Arial" pitchFamily="34" charset="0"/>
+              <a:buNone/>
+              <a:defRPr sz="2100" b="1" kern="1200" baseline="0">
+                <a:solidFill>
+                  <a:schemeClr val="tx1"/>
+                </a:solidFill>
+                <a:latin typeface="+mn-lt"/>
+                <a:ea typeface="+mn-ea"/>
+                <a:cs typeface="+mn-cs"/>
+              </a:defRPr>
+            </a:lvl8pPr>
+            <a:lvl9pPr marL="4875947" indent="0" algn="l" defTabSz="1218987" rtl="0" eaLnBrk="1" latinLnBrk="0" hangingPunct="1">
+              <a:lnSpc>
+                <a:spcPct val="90000"/>
+              </a:lnSpc>
+              <a:spcBef>
+                <a:spcPts val="800"/>
+              </a:spcBef>
+              <a:buClr>
+                <a:schemeClr val="accent1"/>
+              </a:buClr>
+              <a:buSzPct val="80000"/>
+              <a:buFont typeface="Arial" pitchFamily="34" charset="0"/>
+              <a:buNone/>
+              <a:defRPr sz="2100" b="1" kern="1200" baseline="0">
+                <a:solidFill>
+                  <a:schemeClr val="tx1"/>
+                </a:solidFill>
+                <a:latin typeface="+mn-lt"/>
+                <a:ea typeface="+mn-ea"/>
+                <a:cs typeface="+mn-cs"/>
+              </a:defRPr>
+            </a:lvl9pPr>
+          </a:lstStyle>
+          <a:p>
+            <a:pPr marL="457200" indent="-457200">
+              <a:spcAft>
+                <a:spcPts val="800"/>
+              </a:spcAft>
+              <a:buFont typeface="Arial" panose="020B0604020202020204" pitchFamily="34" charset="0"/>
+              <a:buChar char="•"/>
+            </a:pPr>
+            <a:r>
+              <a:rPr lang="fr-FR" dirty="0"/>
+              <a:t>Approche PDCA (Plan – Do – Check – </a:t>
+            </a:r>
+            <a:r>
+              <a:rPr lang="fr-FR" dirty="0" err="1"/>
+              <a:t>Act</a:t>
+            </a:r>
+            <a:r>
+              <a:rPr lang="fr-FR" dirty="0"/>
+              <a:t>) :</a:t>
+            </a:r>
+          </a:p>
+          <a:p>
+            <a:pPr marL="1066693" lvl="1" indent="-457200">
+              <a:spcAft>
+                <a:spcPts val="800"/>
+              </a:spcAft>
+              <a:buFont typeface="Arial" panose="020B0604020202020204" pitchFamily="34" charset="0"/>
+              <a:buChar char="•"/>
+            </a:pPr>
+            <a:r>
+              <a:rPr lang="fr-FR" sz="2400" b="0" dirty="0">
+                <a:solidFill>
+                  <a:schemeClr val="tx1"/>
+                </a:solidFill>
+              </a:rPr>
+              <a:t>Plan : Planifier : définition des objectifs de tests et critères de validation</a:t>
+            </a:r>
+          </a:p>
+          <a:p>
+            <a:pPr marL="1066693" lvl="1" indent="-457200">
+              <a:spcAft>
+                <a:spcPts val="800"/>
+              </a:spcAft>
+              <a:buFont typeface="Arial" panose="020B0604020202020204" pitchFamily="34" charset="0"/>
+              <a:buChar char="•"/>
+            </a:pPr>
+            <a:r>
+              <a:rPr lang="fr-FR" sz="2400" b="0" dirty="0">
+                <a:solidFill>
+                  <a:schemeClr val="tx1"/>
+                </a:solidFill>
+              </a:rPr>
+              <a:t>Do : Déployer : exécution des tests unitaires et d'intégration</a:t>
+            </a:r>
+          </a:p>
+          <a:p>
+            <a:pPr marL="1066693" lvl="1" indent="-457200">
+              <a:spcAft>
+                <a:spcPts val="800"/>
+              </a:spcAft>
+              <a:buFont typeface="Arial" panose="020B0604020202020204" pitchFamily="34" charset="0"/>
+              <a:buChar char="•"/>
+            </a:pPr>
+            <a:r>
+              <a:rPr lang="fr-FR" sz="2400" b="0" dirty="0">
+                <a:solidFill>
+                  <a:schemeClr val="tx1"/>
+                </a:solidFill>
+              </a:rPr>
+              <a:t>Check : Contrôler : analyse des résultats, identification des écarts</a:t>
+            </a:r>
+          </a:p>
+          <a:p>
+            <a:pPr marL="1066693" lvl="1" indent="-457200">
+              <a:spcAft>
+                <a:spcPts val="800"/>
+              </a:spcAft>
+              <a:buFont typeface="Arial" panose="020B0604020202020204" pitchFamily="34" charset="0"/>
+              <a:buChar char="•"/>
+            </a:pPr>
+            <a:r>
+              <a:rPr lang="fr-FR" sz="2400" b="0" dirty="0" err="1">
+                <a:solidFill>
+                  <a:schemeClr val="tx1"/>
+                </a:solidFill>
+              </a:rPr>
+              <a:t>Act</a:t>
+            </a:r>
+            <a:r>
+              <a:rPr lang="fr-FR" sz="2400" b="0" dirty="0">
+                <a:solidFill>
+                  <a:schemeClr val="tx1"/>
+                </a:solidFill>
+              </a:rPr>
+              <a:t> : Ajuster : actions correctives et amélioration continue</a:t>
+            </a:r>
+          </a:p>
+          <a:p>
+            <a:pPr marL="1066693" lvl="1" indent="-457200">
+              <a:spcAft>
+                <a:spcPts val="800"/>
+              </a:spcAft>
+              <a:buFont typeface="Arial" panose="020B0604020202020204" pitchFamily="34" charset="0"/>
+              <a:buChar char="•"/>
+            </a:pPr>
+            <a:endParaRPr lang="fr-FR" sz="2400" b="0" dirty="0">
+              <a:solidFill>
+                <a:schemeClr val="tx1"/>
+              </a:solidFill>
+            </a:endParaRPr>
+          </a:p>
+        </p:txBody>
+      </p:sp>
+      <p:pic>
+        <p:nvPicPr>
+          <p:cNvPr id="1026" name="Picture 2" descr="Cycle PDCA ou Roue de deming">
+            <a:extLst>
+              <a:ext uri="{FF2B5EF4-FFF2-40B4-BE49-F238E27FC236}">
+                <a16:creationId xmlns:a16="http://schemas.microsoft.com/office/drawing/2014/main" id="{47F24401-7EEC-32C6-9B20-D2AD80489470}"/>
+              </a:ext>
+            </a:extLst>
+          </p:cNvPr>
+          <p:cNvPicPr>
+            <a:picLocks noChangeAspect="1" noChangeArrowheads="1"/>
+          </p:cNvPicPr>
+          <p:nvPr/>
+        </p:nvPicPr>
+        <p:blipFill rotWithShape="1">
+          <a:blip r:embed="rId3">
+            <a:extLst>
+              <a:ext uri="{28A0092B-C50C-407E-A947-70E740481C1C}">
+                <a14:useLocalDpi xmlns:a14="http://schemas.microsoft.com/office/drawing/2010/main" val="0"/>
+              </a:ext>
+            </a:extLst>
+          </a:blip>
+          <a:srcRect l="18966" r="20207"/>
+          <a:stretch/>
+        </p:blipFill>
+        <p:spPr bwMode="auto">
+          <a:xfrm>
+            <a:off x="4654252" y="4003194"/>
+            <a:ext cx="2592288" cy="2400299"/>
+          </a:xfrm>
+          <a:prstGeom prst="rect">
+            <a:avLst/>
+          </a:prstGeom>
+          <a:noFill/>
+          <a:extLst>
+            <a:ext uri="{909E8E84-426E-40DD-AFC4-6F175D3DCCD1}">
+              <a14:hiddenFill xmlns:a14="http://schemas.microsoft.com/office/drawing/2010/main">
+                <a:solidFill>
+                  <a:srgbClr val="FFFFFF"/>
+                </a:solidFill>
+              </a14:hiddenFill>
+            </a:ext>
+          </a:extLst>
+        </p:spPr>
+      </p:pic>
+    </p:spTree>
+    <p:extLst>
+      <p:ext uri="{BB962C8B-B14F-4D97-AF65-F5344CB8AC3E}">
+        <p14:creationId xmlns:p14="http://schemas.microsoft.com/office/powerpoint/2010/main" val="1102197686"/>
+      </p:ext>
+    </p:extLst>
+  </p:cSld>
+  <p:clrMapOvr>
+    <a:masterClrMapping/>
+  </p:clrMapOvr>
+  <mc:AlternateContent xmlns:mc="http://schemas.openxmlformats.org/markup-compatibility/2006" xmlns:p14="http://schemas.microsoft.com/office/powerpoint/2010/main">
+    <mc:Choice Requires="p14">
+      <p:transition spd="med" p14:dur="700">
+        <p:fade/>
+      </p:transition>
+    </mc:Choice>
+    <mc:Fallback xmlns="">
+      <p:transition spd="med">
+        <p:fade/>
+      </p:transition>
+    </mc:Fallback>
+  </mc:AlternateContent>
+</p:sld>
+</file>
+
+<file path=ppt/slides/slide12.xml><?xml version="1.0" encoding="utf-8"?>
+<p:sld xmlns:a="http://schemas.openxmlformats.org/drawingml/2006/main" xmlns:r="http://schemas.openxmlformats.org/officeDocument/2006/relationships" xmlns:p="http://schemas.openxmlformats.org/presentationml/2006/main">
+  <p:cSld>
+    <p:spTree>
+      <p:nvGrpSpPr>
+        <p:cNvPr id="1" name="">
+          <a:extLst>
+            <a:ext uri="{FF2B5EF4-FFF2-40B4-BE49-F238E27FC236}">
               <a16:creationId xmlns:a16="http://schemas.microsoft.com/office/drawing/2014/main" id="{1DF861B1-E4BD-53FD-D47E-D1700A3133D4}"/>
             </a:ext>
           </a:extLst>
@@ -7202,7 +8245,7 @@
           <a:p>
             <a:fld id="{10F8D90C-592A-4BB3-869D-943E473FE966}" type="datetime1">
               <a:rPr lang="fr-FR" smtClean="0"/>
-              <a:t>01/05/2025</a:t>
+              <a:t>02/05/2025</a:t>
             </a:fld>
             <a:endParaRPr lang="fr-FR" dirty="0"/>
           </a:p>
@@ -7233,7 +8276,7 @@
             <a:fld id="{C014DD1E-5D91-48A3-AD6D-45FBA980D106}" type="slidenum">
               <a:rPr lang="fr-FR" sz="2000" smtClean="0"/>
               <a:pPr algn="r"/>
-              <a:t>10</a:t>
+              <a:t>12</a:t>
             </a:fld>
             <a:endParaRPr lang="fr-FR" sz="2000" dirty="0"/>
           </a:p>
@@ -7656,7 +8699,7 @@
 </p:sld>
 </file>
 
-<file path=ppt/slides/slide11.xml><?xml version="1.0" encoding="utf-8"?>
+<file path=ppt/slides/slide13.xml><?xml version="1.0" encoding="utf-8"?>
 <p:sld xmlns:a="http://schemas.openxmlformats.org/drawingml/2006/main" xmlns:r="http://schemas.openxmlformats.org/officeDocument/2006/relationships" xmlns:p="http://schemas.openxmlformats.org/presentationml/2006/main">
   <p:cSld>
     <p:spTree>
@@ -7696,7 +8739,7 @@
           <a:p>
             <a:fld id="{10F8D90C-592A-4BB3-869D-943E473FE966}" type="datetime1">
               <a:rPr lang="fr-FR" smtClean="0"/>
-              <a:t>01/05/2025</a:t>
+              <a:t>02/05/2025</a:t>
             </a:fld>
             <a:endParaRPr lang="fr-FR" dirty="0"/>
           </a:p>
@@ -7727,7 +8770,7 @@
             <a:fld id="{C014DD1E-5D91-48A3-AD6D-45FBA980D106}" type="slidenum">
               <a:rPr lang="fr-FR" sz="2000" smtClean="0"/>
               <a:pPr algn="r"/>
-              <a:t>11</a:t>
+              <a:t>13</a:t>
             </a:fld>
             <a:endParaRPr lang="fr-FR" sz="2000" dirty="0"/>
           </a:p>
@@ -7762,7 +8805,7 @@
         </p:blipFill>
         <p:spPr bwMode="auto">
           <a:xfrm>
-            <a:off x="4150196" y="1772816"/>
+            <a:off x="2439166" y="1684132"/>
             <a:ext cx="3422057" cy="2360280"/>
           </a:xfrm>
           <a:prstGeom prst="rect">
@@ -7811,7 +8854,7 @@
         </p:blipFill>
         <p:spPr bwMode="auto">
           <a:xfrm>
-            <a:off x="3507498" y="4407312"/>
+            <a:off x="1522394" y="4381892"/>
             <a:ext cx="4707451" cy="902464"/>
           </a:xfrm>
           <a:prstGeom prst="rect">
@@ -7904,6 +8947,36 @@
           </a:p>
         </p:txBody>
       </p:sp>
+      <p:pic>
+        <p:nvPicPr>
+          <p:cNvPr id="4" name="Picture 3">
+            <a:extLst>
+              <a:ext uri="{FF2B5EF4-FFF2-40B4-BE49-F238E27FC236}">
+                <a16:creationId xmlns:a16="http://schemas.microsoft.com/office/drawing/2014/main" id="{3AF2BEB1-2DC8-FC6C-0507-66D376AE05AB}"/>
+              </a:ext>
+            </a:extLst>
+          </p:cNvPr>
+          <p:cNvPicPr>
+            <a:picLocks noChangeAspect="1"/>
+          </p:cNvPicPr>
+          <p:nvPr/>
+        </p:nvPicPr>
+        <p:blipFill>
+          <a:blip r:embed="rId4"/>
+          <a:stretch>
+            <a:fillRect/>
+          </a:stretch>
+        </p:blipFill>
+        <p:spPr>
+          <a:xfrm>
+            <a:off x="6598468" y="2233020"/>
+            <a:ext cx="4707452" cy="3051336"/>
+          </a:xfrm>
+          <a:prstGeom prst="rect">
+            <a:avLst/>
+          </a:prstGeom>
+        </p:spPr>
+      </p:pic>
     </p:spTree>
     <p:extLst>
       <p:ext uri="{BB962C8B-B14F-4D97-AF65-F5344CB8AC3E}">
@@ -7929,7 +9002,7 @@
 </p:sld>
 </file>
 
-<file path=ppt/slides/slide12.xml><?xml version="1.0" encoding="utf-8"?>
+<file path=ppt/slides/slide14.xml><?xml version="1.0" encoding="utf-8"?>
 <p:sld xmlns:a="http://schemas.openxmlformats.org/drawingml/2006/main" xmlns:r="http://schemas.openxmlformats.org/officeDocument/2006/relationships" xmlns:p="http://schemas.openxmlformats.org/presentationml/2006/main">
   <p:cSld>
     <p:spTree>
@@ -9887,7 +10960,7 @@
           <a:p>
             <a:fld id="{10F8D90C-592A-4BB3-869D-943E473FE966}" type="datetime1">
               <a:rPr lang="fr-FR" smtClean="0"/>
-              <a:t>01/05/2025</a:t>
+              <a:t>02/05/2025</a:t>
             </a:fld>
             <a:endParaRPr lang="fr-FR" dirty="0"/>
           </a:p>
@@ -9918,7 +10991,7 @@
             <a:fld id="{C014DD1E-5D91-48A3-AD6D-45FBA980D106}" type="slidenum">
               <a:rPr lang="fr-FR" sz="2000" smtClean="0"/>
               <a:pPr algn="r"/>
-              <a:t>12</a:t>
+              <a:t>14</a:t>
             </a:fld>
             <a:endParaRPr lang="fr-FR" dirty="0"/>
           </a:p>
@@ -9978,7 +11051,7 @@
                 </a:solidFill>
                 <a:latin typeface="Calibri" panose="020F0502020204030204" pitchFamily="34" charset="0"/>
               </a:rPr>
-              <a:t>Synthèse globale des Teste et état actuelle de système</a:t>
+              <a:t>Synthèse globale des Test et état actuelle de système</a:t>
             </a:r>
             <a:endParaRPr lang="fr-FR" b="1" dirty="0">
               <a:solidFill>
@@ -10013,7 +11086,7 @@
 </p:sld>
 </file>
 
-<file path=ppt/slides/slide13.xml><?xml version="1.0" encoding="utf-8"?>
+<file path=ppt/slides/slide15.xml><?xml version="1.0" encoding="utf-8"?>
 <p:sld xmlns:a="http://schemas.openxmlformats.org/drawingml/2006/main" xmlns:r="http://schemas.openxmlformats.org/officeDocument/2006/relationships" xmlns:p="http://schemas.openxmlformats.org/presentationml/2006/main">
   <p:cSld>
     <p:spTree>
@@ -10340,7 +11413,7 @@
           <a:p>
             <a:fld id="{10F8D90C-592A-4BB3-869D-943E473FE966}" type="datetime1">
               <a:rPr lang="fr-FR" smtClean="0"/>
-              <a:t>01/05/2025</a:t>
+              <a:t>02/05/2025</a:t>
             </a:fld>
             <a:endParaRPr lang="fr-FR" dirty="0"/>
           </a:p>
@@ -10371,7 +11444,7 @@
             <a:fld id="{C014DD1E-5D91-48A3-AD6D-45FBA980D106}" type="slidenum">
               <a:rPr lang="fr-FR" sz="2000" smtClean="0"/>
               <a:pPr algn="r"/>
-              <a:t>13</a:t>
+              <a:t>15</a:t>
             </a:fld>
             <a:endParaRPr lang="fr-FR" dirty="0"/>
           </a:p>
@@ -10446,7 +11519,7 @@
 </p:sld>
 </file>
 
-<file path=ppt/slides/slide14.xml><?xml version="1.0" encoding="utf-8"?>
+<file path=ppt/slides/slide16.xml><?xml version="1.0" encoding="utf-8"?>
 <p:sld xmlns:a="http://schemas.openxmlformats.org/drawingml/2006/main" xmlns:r="http://schemas.openxmlformats.org/officeDocument/2006/relationships" xmlns:p="http://schemas.openxmlformats.org/presentationml/2006/main">
   <p:cSld>
     <p:spTree>
@@ -10607,7 +11680,7 @@
           <a:p>
             <a:fld id="{10F8D90C-592A-4BB3-869D-943E473FE966}" type="datetime1">
               <a:rPr lang="fr-FR" smtClean="0"/>
-              <a:t>01/05/2025</a:t>
+              <a:t>02/05/2025</a:t>
             </a:fld>
             <a:endParaRPr lang="fr-FR" dirty="0"/>
           </a:p>
@@ -10638,7 +11711,7 @@
             <a:fld id="{C014DD1E-5D91-48A3-AD6D-45FBA980D106}" type="slidenum">
               <a:rPr lang="fr-FR" sz="2000" smtClean="0"/>
               <a:pPr algn="r"/>
-              <a:t>14</a:t>
+              <a:t>16</a:t>
             </a:fld>
             <a:endParaRPr lang="fr-FR" dirty="0"/>
           </a:p>
@@ -10736,7 +11809,7 @@
 </p:sld>
 </file>
 
-<file path=ppt/slides/slide15.xml><?xml version="1.0" encoding="utf-8"?>
+<file path=ppt/slides/slide17.xml><?xml version="1.0" encoding="utf-8"?>
 <p:sld xmlns:a="http://schemas.openxmlformats.org/drawingml/2006/main" xmlns:r="http://schemas.openxmlformats.org/officeDocument/2006/relationships" xmlns:p="http://schemas.openxmlformats.org/presentationml/2006/main">
   <p:cSld>
     <p:spTree>
@@ -10881,7 +11954,7 @@
           <a:p>
             <a:fld id="{10F8D90C-592A-4BB3-869D-943E473FE966}" type="datetime1">
               <a:rPr lang="fr-FR" smtClean="0"/>
-              <a:t>01/05/2025</a:t>
+              <a:t>02/05/2025</a:t>
             </a:fld>
             <a:endParaRPr lang="fr-FR" dirty="0"/>
           </a:p>
@@ -10912,7 +11985,7 @@
             <a:fld id="{C014DD1E-5D91-48A3-AD6D-45FBA980D106}" type="slidenum">
               <a:rPr lang="fr-FR" sz="2000" smtClean="0"/>
               <a:pPr algn="r"/>
-              <a:t>15</a:t>
+              <a:t>17</a:t>
             </a:fld>
             <a:endParaRPr lang="fr-FR" dirty="0"/>
           </a:p>
@@ -11002,7 +12075,7 @@
 </p:sld>
 </file>
 
-<file path=ppt/slides/slide16.xml><?xml version="1.0" encoding="utf-8"?>
+<file path=ppt/slides/slide18.xml><?xml version="1.0" encoding="utf-8"?>
 <p:sld xmlns:a="http://schemas.openxmlformats.org/drawingml/2006/main" xmlns:r="http://schemas.openxmlformats.org/officeDocument/2006/relationships" xmlns:p="http://schemas.openxmlformats.org/presentationml/2006/main">
   <p:cSld>
     <p:spTree>
@@ -11088,7 +12161,7 @@
           <a:p>
             <a:fld id="{10F8D90C-592A-4BB3-869D-943E473FE966}" type="datetime1">
               <a:rPr lang="fr-FR" smtClean="0"/>
-              <a:t>01/05/2025</a:t>
+              <a:t>02/05/2025</a:t>
             </a:fld>
             <a:endParaRPr lang="fr-FR" dirty="0"/>
           </a:p>
@@ -11119,7 +12192,7 @@
             <a:fld id="{C014DD1E-5D91-48A3-AD6D-45FBA980D106}" type="slidenum">
               <a:rPr lang="fr-FR" sz="2000" smtClean="0"/>
               <a:pPr algn="r"/>
-              <a:t>16</a:t>
+              <a:t>18</a:t>
             </a:fld>
             <a:endParaRPr lang="fr-FR" sz="2000" dirty="0"/>
           </a:p>
@@ -11148,38 +12221,8 @@
         </p:blipFill>
         <p:spPr>
           <a:xfrm>
-            <a:off x="6091553" y="1200305"/>
-            <a:ext cx="5468282" cy="4457389"/>
-          </a:xfrm>
-          <a:prstGeom prst="rect">
-            <a:avLst/>
-          </a:prstGeom>
-        </p:spPr>
-      </p:pic>
-      <p:pic>
-        <p:nvPicPr>
-          <p:cNvPr id="4" name="Picture 3" descr="A computer circuit board with many different components&#10;&#10;AI-generated content may be incorrect.">
-            <a:extLst>
-              <a:ext uri="{FF2B5EF4-FFF2-40B4-BE49-F238E27FC236}">
-                <a16:creationId xmlns:a16="http://schemas.microsoft.com/office/drawing/2014/main" id="{B353D8F3-A43C-CD99-DACF-54427EF98658}"/>
-              </a:ext>
-            </a:extLst>
-          </p:cNvPr>
-          <p:cNvPicPr>
-            <a:picLocks noChangeAspect="1"/>
-          </p:cNvPicPr>
-          <p:nvPr/>
-        </p:nvPicPr>
-        <p:blipFill>
-          <a:blip r:embed="rId3"/>
-          <a:stretch>
-            <a:fillRect/>
-          </a:stretch>
-        </p:blipFill>
-        <p:spPr>
-          <a:xfrm>
-            <a:off x="765820" y="1600886"/>
-            <a:ext cx="4817133" cy="3893322"/>
+            <a:off x="2818047" y="1119854"/>
+            <a:ext cx="6552728" cy="5341359"/>
           </a:xfrm>
           <a:prstGeom prst="rect">
             <a:avLst/>
@@ -11211,7 +12254,829 @@
 </p:sld>
 </file>
 
-<file path=ppt/slides/slide17.xml><?xml version="1.0" encoding="utf-8"?>
+<file path=ppt/slides/slide19.xml><?xml version="1.0" encoding="utf-8"?>
+<p:sld xmlns:a="http://schemas.openxmlformats.org/drawingml/2006/main" xmlns:r="http://schemas.openxmlformats.org/officeDocument/2006/relationships" xmlns:p="http://schemas.openxmlformats.org/presentationml/2006/main">
+  <p:cSld>
+    <p:spTree>
+      <p:nvGrpSpPr>
+        <p:cNvPr id="1" name="">
+          <a:extLst>
+            <a:ext uri="{FF2B5EF4-FFF2-40B4-BE49-F238E27FC236}">
+              <a16:creationId xmlns:a16="http://schemas.microsoft.com/office/drawing/2014/main" id="{70AA23FC-A76A-4D54-FF1C-04F21D3F1916}"/>
+            </a:ext>
+          </a:extLst>
+        </p:cNvPr>
+        <p:cNvGrpSpPr/>
+        <p:nvPr/>
+      </p:nvGrpSpPr>
+      <p:grpSpPr>
+        <a:xfrm>
+          <a:off x="0" y="0"/>
+          <a:ext cx="0" cy="0"/>
+          <a:chOff x="0" y="0"/>
+          <a:chExt cx="0" cy="0"/>
+        </a:xfrm>
+      </p:grpSpPr>
+      <p:sp>
+        <p:nvSpPr>
+          <p:cNvPr id="4" name="Content Placeholder 3">
+            <a:extLst>
+              <a:ext uri="{FF2B5EF4-FFF2-40B4-BE49-F238E27FC236}">
+                <a16:creationId xmlns:a16="http://schemas.microsoft.com/office/drawing/2014/main" id="{536858F8-76F1-475D-3F7A-837AD8526245}"/>
+              </a:ext>
+            </a:extLst>
+          </p:cNvPr>
+          <p:cNvSpPr>
+            <a:spLocks noGrp="1"/>
+          </p:cNvSpPr>
+          <p:nvPr>
+            <p:ph sz="half" idx="2"/>
+          </p:nvPr>
+        </p:nvSpPr>
+        <p:spPr>
+          <a:xfrm>
+            <a:off x="1218883" y="1321232"/>
+            <a:ext cx="10492153" cy="4850968"/>
+          </a:xfrm>
+        </p:spPr>
+        <p:txBody>
+          <a:bodyPr/>
+          <a:lstStyle/>
+          <a:p>
+            <a:r>
+              <a:rPr lang="en-GB" dirty="0">
+                <a:solidFill>
+                  <a:srgbClr val="00B050"/>
+                </a:solidFill>
+              </a:rPr>
+              <a:t>Mixer </a:t>
+            </a:r>
+            <a:r>
+              <a:rPr lang="en-GB" dirty="0" err="1">
+                <a:solidFill>
+                  <a:srgbClr val="00B050"/>
+                </a:solidFill>
+              </a:rPr>
+              <a:t>l’Audio</a:t>
+            </a:r>
+            <a:endParaRPr lang="en-GB" dirty="0">
+              <a:solidFill>
+                <a:srgbClr val="00B050"/>
+              </a:solidFill>
+            </a:endParaRPr>
+          </a:p>
+          <a:p>
+            <a:r>
+              <a:rPr lang="en-GB" dirty="0">
+                <a:solidFill>
+                  <a:srgbClr val="00B050"/>
+                </a:solidFill>
+              </a:rPr>
+              <a:t>Connecter les Instruments</a:t>
+            </a:r>
+          </a:p>
+          <a:p>
+            <a:r>
+              <a:rPr lang="en-GB" dirty="0" err="1">
+                <a:solidFill>
+                  <a:srgbClr val="FFFF00"/>
+                </a:solidFill>
+              </a:rPr>
+              <a:t>Recevoir</a:t>
+            </a:r>
+            <a:r>
+              <a:rPr lang="en-GB" dirty="0">
+                <a:solidFill>
+                  <a:srgbClr val="FFFF00"/>
+                </a:solidFill>
+              </a:rPr>
+              <a:t> les données</a:t>
+            </a:r>
+          </a:p>
+          <a:p>
+            <a:r>
+              <a:rPr lang="en-GB" dirty="0" err="1">
+                <a:solidFill>
+                  <a:srgbClr val="00B050"/>
+                </a:solidFill>
+              </a:rPr>
+              <a:t>Assuer</a:t>
+            </a:r>
+            <a:r>
+              <a:rPr lang="en-GB" dirty="0">
+                <a:solidFill>
+                  <a:srgbClr val="00B050"/>
+                </a:solidFill>
+              </a:rPr>
+              <a:t> la </a:t>
+            </a:r>
+            <a:r>
+              <a:rPr lang="en-GB" dirty="0" err="1">
+                <a:solidFill>
+                  <a:srgbClr val="00B050"/>
+                </a:solidFill>
+              </a:rPr>
+              <a:t>sureté</a:t>
+            </a:r>
+            <a:r>
+              <a:rPr lang="en-GB" dirty="0">
+                <a:solidFill>
+                  <a:srgbClr val="00B050"/>
+                </a:solidFill>
+              </a:rPr>
+              <a:t> du </a:t>
+            </a:r>
+            <a:r>
+              <a:rPr lang="en-GB" dirty="0" err="1">
+                <a:solidFill>
+                  <a:srgbClr val="00B050"/>
+                </a:solidFill>
+              </a:rPr>
+              <a:t>systeme</a:t>
+            </a:r>
+            <a:endParaRPr lang="en-GB" dirty="0">
+              <a:solidFill>
+                <a:srgbClr val="00B050"/>
+              </a:solidFill>
+            </a:endParaRPr>
+          </a:p>
+          <a:p>
+            <a:r>
+              <a:rPr lang="en-GB" dirty="0" err="1">
+                <a:solidFill>
+                  <a:srgbClr val="00B050"/>
+                </a:solidFill>
+              </a:rPr>
+              <a:t>Facilite</a:t>
+            </a:r>
+            <a:r>
+              <a:rPr lang="en-GB" dirty="0">
+                <a:solidFill>
+                  <a:srgbClr val="00B050"/>
+                </a:solidFill>
+              </a:rPr>
+              <a:t> de </a:t>
+            </a:r>
+            <a:r>
+              <a:rPr lang="en-GB" dirty="0" err="1">
+                <a:solidFill>
+                  <a:srgbClr val="00B050"/>
+                </a:solidFill>
+              </a:rPr>
+              <a:t>l’évoluivité</a:t>
+            </a:r>
+            <a:r>
+              <a:rPr lang="en-GB" dirty="0">
+                <a:solidFill>
+                  <a:srgbClr val="00B050"/>
+                </a:solidFill>
+              </a:rPr>
+              <a:t> et la maintenance</a:t>
+            </a:r>
+          </a:p>
+          <a:p>
+            <a:r>
+              <a:rPr lang="en-GB" dirty="0">
+                <a:solidFill>
+                  <a:srgbClr val="FFFF00"/>
+                </a:solidFill>
+              </a:rPr>
+              <a:t>Alimenter le </a:t>
+            </a:r>
+            <a:r>
+              <a:rPr lang="en-GB" dirty="0" err="1">
+                <a:solidFill>
+                  <a:srgbClr val="FFFF00"/>
+                </a:solidFill>
+              </a:rPr>
+              <a:t>système</a:t>
+            </a:r>
+            <a:endParaRPr lang="en-GB" dirty="0">
+              <a:solidFill>
+                <a:srgbClr val="FFFF00"/>
+              </a:solidFill>
+            </a:endParaRPr>
+          </a:p>
+          <a:p>
+            <a:r>
+              <a:rPr lang="en-GB" dirty="0" err="1">
+                <a:solidFill>
+                  <a:srgbClr val="FFFF00"/>
+                </a:solidFill>
+              </a:rPr>
+              <a:t>Envoyer</a:t>
+            </a:r>
+            <a:r>
+              <a:rPr lang="en-GB" dirty="0">
+                <a:solidFill>
+                  <a:srgbClr val="FFFF00"/>
+                </a:solidFill>
+              </a:rPr>
+              <a:t> un signal </a:t>
+            </a:r>
+            <a:r>
+              <a:rPr lang="en-GB" dirty="0" err="1">
+                <a:solidFill>
+                  <a:srgbClr val="FFFF00"/>
+                </a:solidFill>
+              </a:rPr>
+              <a:t>sonore</a:t>
+            </a:r>
+            <a:r>
+              <a:rPr lang="en-GB" dirty="0">
+                <a:solidFill>
+                  <a:srgbClr val="FFFF00"/>
+                </a:solidFill>
+              </a:rPr>
+              <a:t> </a:t>
+            </a:r>
+            <a:r>
+              <a:rPr lang="en-GB" dirty="0" err="1">
+                <a:solidFill>
+                  <a:srgbClr val="FFFF00"/>
+                </a:solidFill>
+              </a:rPr>
+              <a:t>en</a:t>
+            </a:r>
+            <a:r>
+              <a:rPr lang="en-GB" dirty="0">
+                <a:solidFill>
+                  <a:srgbClr val="FFFF00"/>
+                </a:solidFill>
+              </a:rPr>
+              <a:t> sortie.</a:t>
+            </a:r>
+          </a:p>
+          <a:p>
+            <a:r>
+              <a:rPr lang="en-GB" dirty="0">
+                <a:solidFill>
+                  <a:srgbClr val="C00000"/>
+                </a:solidFill>
+              </a:rPr>
+              <a:t>Synchronisation</a:t>
+            </a:r>
+          </a:p>
+          <a:p>
+            <a:endParaRPr lang="en-GB" dirty="0"/>
+          </a:p>
+          <a:p>
+            <a:endParaRPr lang="fr-FR" dirty="0"/>
+          </a:p>
+        </p:txBody>
+      </p:sp>
+      <p:sp>
+        <p:nvSpPr>
+          <p:cNvPr id="7" name="Date Placeholder 6">
+            <a:extLst>
+              <a:ext uri="{FF2B5EF4-FFF2-40B4-BE49-F238E27FC236}">
+                <a16:creationId xmlns:a16="http://schemas.microsoft.com/office/drawing/2014/main" id="{7A8A37D2-ACD1-CE62-CAFE-5C84CD625E72}"/>
+              </a:ext>
+            </a:extLst>
+          </p:cNvPr>
+          <p:cNvSpPr>
+            <a:spLocks noGrp="1"/>
+          </p:cNvSpPr>
+          <p:nvPr>
+            <p:ph type="dt" sz="half" idx="10"/>
+          </p:nvPr>
+        </p:nvSpPr>
+        <p:spPr/>
+        <p:txBody>
+          <a:bodyPr/>
+          <a:lstStyle/>
+          <a:p>
+            <a:fld id="{10F8D90C-592A-4BB3-869D-943E473FE966}" type="datetime1">
+              <a:rPr lang="fr-FR" smtClean="0"/>
+              <a:t>02/05/2025</a:t>
+            </a:fld>
+            <a:endParaRPr lang="fr-FR" dirty="0"/>
+          </a:p>
+        </p:txBody>
+      </p:sp>
+      <p:sp>
+        <p:nvSpPr>
+          <p:cNvPr id="8" name="Slide Number Placeholder 7">
+            <a:extLst>
+              <a:ext uri="{FF2B5EF4-FFF2-40B4-BE49-F238E27FC236}">
+                <a16:creationId xmlns:a16="http://schemas.microsoft.com/office/drawing/2014/main" id="{DE2E85C7-FAD9-15BC-9454-72191D919461}"/>
+              </a:ext>
+            </a:extLst>
+          </p:cNvPr>
+          <p:cNvSpPr>
+            <a:spLocks noGrp="1"/>
+          </p:cNvSpPr>
+          <p:nvPr>
+            <p:ph type="sldNum" sz="quarter" idx="12"/>
+          </p:nvPr>
+        </p:nvSpPr>
+        <p:spPr/>
+        <p:txBody>
+          <a:bodyPr/>
+          <a:lstStyle/>
+          <a:p>
+            <a:pPr algn="r"/>
+            <a:fld id="{C014DD1E-5D91-48A3-AD6D-45FBA980D106}" type="slidenum">
+              <a:rPr lang="fr-FR" sz="2000" smtClean="0"/>
+              <a:pPr algn="r"/>
+              <a:t>19</a:t>
+            </a:fld>
+            <a:endParaRPr lang="fr-FR" sz="2400" dirty="0"/>
+          </a:p>
+        </p:txBody>
+      </p:sp>
+      <p:sp>
+        <p:nvSpPr>
+          <p:cNvPr id="9" name="Title 1">
+            <a:extLst>
+              <a:ext uri="{FF2B5EF4-FFF2-40B4-BE49-F238E27FC236}">
+                <a16:creationId xmlns:a16="http://schemas.microsoft.com/office/drawing/2014/main" id="{57F16CDF-38EC-ECFA-F850-E4081D6A70E9}"/>
+              </a:ext>
+            </a:extLst>
+          </p:cNvPr>
+          <p:cNvSpPr txBox="1">
+            <a:spLocks/>
+          </p:cNvSpPr>
+          <p:nvPr/>
+        </p:nvSpPr>
+        <p:spPr>
+          <a:xfrm>
+            <a:off x="1227435" y="97269"/>
+            <a:ext cx="10360501" cy="1223963"/>
+          </a:xfrm>
+          <a:prstGeom prst="rect">
+            <a:avLst/>
+          </a:prstGeom>
+        </p:spPr>
+        <p:txBody>
+          <a:bodyPr vert="horz" lIns="121899" tIns="60949" rIns="121899" bIns="60949" rtlCol="0" anchor="b">
+            <a:normAutofit/>
+          </a:bodyPr>
+          <a:lstStyle>
+            <a:lvl1pPr algn="l" defTabSz="1218987" rtl="0" eaLnBrk="1" latinLnBrk="0" hangingPunct="1">
+              <a:lnSpc>
+                <a:spcPct val="90000"/>
+              </a:lnSpc>
+              <a:spcBef>
+                <a:spcPct val="0"/>
+              </a:spcBef>
+              <a:buNone/>
+              <a:defRPr sz="3600" kern="1200">
+                <a:solidFill>
+                  <a:schemeClr val="tx1"/>
+                </a:solidFill>
+                <a:latin typeface="+mj-lt"/>
+                <a:ea typeface="+mj-ea"/>
+                <a:cs typeface="+mj-cs"/>
+              </a:defRPr>
+            </a:lvl1pPr>
+          </a:lstStyle>
+          <a:p>
+            <a:r>
+              <a:rPr lang="en-US" sz="4400" b="1" dirty="0">
+                <a:solidFill>
+                  <a:schemeClr val="accent1"/>
+                </a:solidFill>
+              </a:rPr>
+              <a:t>Check List &amp; CDC</a:t>
+            </a:r>
+            <a:endParaRPr lang="fr-FR" sz="4400" b="1" dirty="0"/>
+          </a:p>
+        </p:txBody>
+      </p:sp>
+      <p:sp>
+        <p:nvSpPr>
+          <p:cNvPr id="2" name="Title 1">
+            <a:extLst>
+              <a:ext uri="{FF2B5EF4-FFF2-40B4-BE49-F238E27FC236}">
+                <a16:creationId xmlns:a16="http://schemas.microsoft.com/office/drawing/2014/main" id="{11FEE1E1-E1B0-9A26-56D0-6F36F63833F7}"/>
+              </a:ext>
+            </a:extLst>
+          </p:cNvPr>
+          <p:cNvSpPr txBox="1">
+            <a:spLocks/>
+          </p:cNvSpPr>
+          <p:nvPr/>
+        </p:nvSpPr>
+        <p:spPr>
+          <a:xfrm>
+            <a:off x="8326660" y="4338637"/>
+            <a:ext cx="3547274" cy="1223963"/>
+          </a:xfrm>
+          <a:prstGeom prst="rect">
+            <a:avLst/>
+          </a:prstGeom>
+        </p:spPr>
+        <p:txBody>
+          <a:bodyPr vert="horz" lIns="121899" tIns="60949" rIns="121899" bIns="60949" rtlCol="0" anchor="b">
+            <a:normAutofit/>
+          </a:bodyPr>
+          <a:lstStyle>
+            <a:lvl1pPr algn="l" defTabSz="1218987" rtl="0" eaLnBrk="1" latinLnBrk="0" hangingPunct="1">
+              <a:lnSpc>
+                <a:spcPct val="90000"/>
+              </a:lnSpc>
+              <a:spcBef>
+                <a:spcPct val="0"/>
+              </a:spcBef>
+              <a:buNone/>
+              <a:defRPr sz="3600" kern="1200">
+                <a:solidFill>
+                  <a:schemeClr val="tx1"/>
+                </a:solidFill>
+                <a:latin typeface="+mj-lt"/>
+                <a:ea typeface="+mj-ea"/>
+                <a:cs typeface="+mj-cs"/>
+              </a:defRPr>
+            </a:lvl1pPr>
+          </a:lstStyle>
+          <a:p>
+            <a:endParaRPr lang="fr-FR" sz="4400" b="1" dirty="0"/>
+          </a:p>
+        </p:txBody>
+      </p:sp>
+      <p:sp>
+        <p:nvSpPr>
+          <p:cNvPr id="3" name="TextBox 2">
+            <a:extLst>
+              <a:ext uri="{FF2B5EF4-FFF2-40B4-BE49-F238E27FC236}">
+                <a16:creationId xmlns:a16="http://schemas.microsoft.com/office/drawing/2014/main" id="{466EBC71-532C-9464-C55D-AB4E15324ADC}"/>
+              </a:ext>
+            </a:extLst>
+          </p:cNvPr>
+          <p:cNvSpPr txBox="1"/>
+          <p:nvPr/>
+        </p:nvSpPr>
+        <p:spPr>
+          <a:xfrm>
+            <a:off x="7797312" y="4787205"/>
+            <a:ext cx="4207114" cy="1384995"/>
+          </a:xfrm>
+          <a:prstGeom prst="rect">
+            <a:avLst/>
+          </a:prstGeom>
+          <a:noFill/>
+        </p:spPr>
+        <p:txBody>
+          <a:bodyPr wrap="none" rtlCol="0">
+            <a:spAutoFit/>
+          </a:bodyPr>
+          <a:lstStyle/>
+          <a:p>
+            <a:r>
+              <a:rPr lang="en-GB" sz="2800" dirty="0" err="1">
+                <a:solidFill>
+                  <a:srgbClr val="00B050"/>
+                </a:solidFill>
+              </a:rPr>
+              <a:t>Fonctionne</a:t>
+            </a:r>
+            <a:endParaRPr lang="en-GB" sz="2800" dirty="0">
+              <a:solidFill>
+                <a:srgbClr val="00B050"/>
+              </a:solidFill>
+            </a:endParaRPr>
+          </a:p>
+          <a:p>
+            <a:r>
+              <a:rPr lang="en-GB" sz="2800" dirty="0" err="1">
+                <a:solidFill>
+                  <a:srgbClr val="FFFF00"/>
+                </a:solidFill>
+              </a:rPr>
+              <a:t>Fonctionne</a:t>
+            </a:r>
+            <a:r>
+              <a:rPr lang="en-GB" sz="2800" dirty="0">
+                <a:solidFill>
+                  <a:srgbClr val="FFFF00"/>
+                </a:solidFill>
+              </a:rPr>
+              <a:t> </a:t>
+            </a:r>
+            <a:r>
+              <a:rPr lang="en-GB" sz="2800" dirty="0" err="1">
+                <a:solidFill>
+                  <a:srgbClr val="FFFF00"/>
+                </a:solidFill>
+              </a:rPr>
+              <a:t>en</a:t>
+            </a:r>
+            <a:r>
+              <a:rPr lang="en-GB" sz="2800" dirty="0">
+                <a:solidFill>
+                  <a:srgbClr val="FFFF00"/>
+                </a:solidFill>
+              </a:rPr>
+              <a:t> état </a:t>
+            </a:r>
+            <a:r>
+              <a:rPr lang="en-GB" sz="2800" dirty="0" err="1">
+                <a:solidFill>
+                  <a:srgbClr val="FFFF00"/>
+                </a:solidFill>
+              </a:rPr>
+              <a:t>degradé</a:t>
+            </a:r>
+            <a:endParaRPr lang="en-GB" sz="2800" dirty="0">
+              <a:solidFill>
+                <a:srgbClr val="FFFF00"/>
+              </a:solidFill>
+            </a:endParaRPr>
+          </a:p>
+          <a:p>
+            <a:r>
+              <a:rPr lang="en-GB" sz="2800" dirty="0">
+                <a:solidFill>
+                  <a:srgbClr val="C00000"/>
+                </a:solidFill>
+              </a:rPr>
+              <a:t>Non </a:t>
+            </a:r>
+            <a:r>
+              <a:rPr lang="en-GB" sz="2800" dirty="0" err="1">
+                <a:solidFill>
+                  <a:srgbClr val="C00000"/>
+                </a:solidFill>
+              </a:rPr>
+              <a:t>fonctionnel</a:t>
+            </a:r>
+            <a:endParaRPr lang="fr-FR" sz="2800" dirty="0">
+              <a:solidFill>
+                <a:srgbClr val="C00000"/>
+              </a:solidFill>
+            </a:endParaRPr>
+          </a:p>
+        </p:txBody>
+      </p:sp>
+    </p:spTree>
+    <p:extLst>
+      <p:ext uri="{BB962C8B-B14F-4D97-AF65-F5344CB8AC3E}">
+        <p14:creationId xmlns:p14="http://schemas.microsoft.com/office/powerpoint/2010/main" val="2796311253"/>
+      </p:ext>
+    </p:extLst>
+  </p:cSld>
+  <p:clrMapOvr>
+    <a:masterClrMapping/>
+  </p:clrMapOvr>
+  <mc:AlternateContent xmlns:mc="http://schemas.openxmlformats.org/markup-compatibility/2006" xmlns:p14="http://schemas.microsoft.com/office/powerpoint/2010/main">
+    <mc:Choice Requires="p14">
+      <p:transition spd="med" p14:dur="700">
+        <p:fade/>
+      </p:transition>
+    </mc:Choice>
+    <mc:Fallback xmlns="">
+      <p:transition spd="med">
+        <p:fade/>
+      </p:transition>
+    </mc:Fallback>
+  </mc:AlternateContent>
+</p:sld>
+</file>
+
+<file path=ppt/slides/slide2.xml><?xml version="1.0" encoding="utf-8"?>
+<p:sld xmlns:a="http://schemas.openxmlformats.org/drawingml/2006/main" xmlns:r="http://schemas.openxmlformats.org/officeDocument/2006/relationships" xmlns:p="http://schemas.openxmlformats.org/presentationml/2006/main">
+  <p:cSld>
+    <p:spTree>
+      <p:nvGrpSpPr>
+        <p:cNvPr id="1" name=""/>
+        <p:cNvGrpSpPr/>
+        <p:nvPr/>
+      </p:nvGrpSpPr>
+      <p:grpSpPr>
+        <a:xfrm>
+          <a:off x="0" y="0"/>
+          <a:ext cx="0" cy="0"/>
+          <a:chOff x="0" y="0"/>
+          <a:chExt cx="0" cy="0"/>
+        </a:xfrm>
+      </p:grpSpPr>
+      <p:sp>
+        <p:nvSpPr>
+          <p:cNvPr id="13" name="Titre 12"/>
+          <p:cNvSpPr>
+            <a:spLocks noGrp="1"/>
+          </p:cNvSpPr>
+          <p:nvPr>
+            <p:ph type="title"/>
+          </p:nvPr>
+        </p:nvSpPr>
+        <p:spPr/>
+        <p:txBody>
+          <a:bodyPr rtlCol="0">
+            <a:normAutofit/>
+          </a:bodyPr>
+          <a:lstStyle/>
+          <a:p>
+            <a:pPr rtl="0"/>
+            <a:r>
+              <a:rPr lang="en-GB" sz="4800" b="1" dirty="0" err="1">
+                <a:solidFill>
+                  <a:schemeClr val="accent1"/>
+                </a:solidFill>
+              </a:rPr>
+              <a:t>Sommaire</a:t>
+            </a:r>
+            <a:r>
+              <a:rPr lang="en-GB" sz="4800" b="1" dirty="0">
+                <a:solidFill>
+                  <a:schemeClr val="accent1"/>
+                </a:solidFill>
+              </a:rPr>
+              <a:t> </a:t>
+            </a:r>
+            <a:endParaRPr lang="fr-FR" sz="4800" b="1" dirty="0">
+              <a:solidFill>
+                <a:schemeClr val="accent1"/>
+              </a:solidFill>
+            </a:endParaRPr>
+          </a:p>
+        </p:txBody>
+      </p:sp>
+      <p:sp>
+        <p:nvSpPr>
+          <p:cNvPr id="14" name="Espace réservé du contenu 13"/>
+          <p:cNvSpPr>
+            <a:spLocks noGrp="1"/>
+          </p:cNvSpPr>
+          <p:nvPr>
+            <p:ph idx="1"/>
+          </p:nvPr>
+        </p:nvSpPr>
+        <p:spPr/>
+        <p:txBody>
+          <a:bodyPr rtlCol="0">
+            <a:normAutofit lnSpcReduction="10000"/>
+          </a:bodyPr>
+          <a:lstStyle/>
+          <a:p>
+            <a:pPr marL="514350" indent="-514350" rtl="0">
+              <a:buFont typeface="+mj-lt"/>
+              <a:buAutoNum type="arabicPeriod"/>
+            </a:pPr>
+            <a:r>
+              <a:rPr lang="fr-FR" dirty="0"/>
+              <a:t>Présentation de système </a:t>
+            </a:r>
+          </a:p>
+          <a:p>
+            <a:pPr marL="514350" indent="-514350">
+              <a:buFont typeface="+mj-lt"/>
+              <a:buAutoNum type="arabicPeriod"/>
+            </a:pPr>
+            <a:r>
+              <a:rPr lang="fr-FR" dirty="0"/>
+              <a:t>Détails des sous-systèmes</a:t>
+            </a:r>
+          </a:p>
+          <a:p>
+            <a:pPr marL="514350" indent="-514350">
+              <a:buFont typeface="+mj-lt"/>
+              <a:buAutoNum type="arabicPeriod"/>
+            </a:pPr>
+            <a:r>
+              <a:rPr lang="fr-FR" dirty="0"/>
+              <a:t>Conception et mise en œuvre</a:t>
+            </a:r>
+          </a:p>
+          <a:p>
+            <a:pPr marL="514350" indent="-514350" rtl="0">
+              <a:buFont typeface="+mj-lt"/>
+              <a:buAutoNum type="arabicPeriod"/>
+            </a:pPr>
+            <a:r>
+              <a:rPr lang="fr-FR" dirty="0"/>
+              <a:t>Implantation</a:t>
+            </a:r>
+          </a:p>
+          <a:p>
+            <a:pPr marL="514350" indent="-514350" rtl="0">
+              <a:buFont typeface="+mj-lt"/>
+              <a:buAutoNum type="arabicPeriod"/>
+            </a:pPr>
+            <a:r>
+              <a:rPr lang="fr-FR" dirty="0"/>
+              <a:t>Vérification</a:t>
+            </a:r>
+          </a:p>
+          <a:p>
+            <a:pPr marL="514350" indent="-514350" rtl="0">
+              <a:buFont typeface="+mj-lt"/>
+              <a:buAutoNum type="arabicPeriod"/>
+            </a:pPr>
+            <a:r>
+              <a:rPr lang="fr-FR" dirty="0"/>
+              <a:t>Dysfonctionnements et maintenance</a:t>
+            </a:r>
+          </a:p>
+          <a:p>
+            <a:pPr marL="514350" indent="-514350" rtl="0">
+              <a:buFont typeface="+mj-lt"/>
+              <a:buAutoNum type="arabicPeriod"/>
+            </a:pPr>
+            <a:r>
+              <a:rPr lang="fr-FR" dirty="0"/>
+              <a:t>État actuel du système</a:t>
+            </a:r>
+          </a:p>
+          <a:p>
+            <a:pPr marL="514350" indent="-514350" rtl="0">
+              <a:buFont typeface="+mj-lt"/>
+              <a:buAutoNum type="arabicPeriod"/>
+            </a:pPr>
+            <a:r>
+              <a:rPr lang="fr-FR" dirty="0"/>
+              <a:t>Conclusion et pistes d'amélioration</a:t>
+            </a:r>
+          </a:p>
+        </p:txBody>
+      </p:sp>
+      <p:sp>
+        <p:nvSpPr>
+          <p:cNvPr id="3" name="Date Placeholder 2">
+            <a:extLst>
+              <a:ext uri="{FF2B5EF4-FFF2-40B4-BE49-F238E27FC236}">
+                <a16:creationId xmlns:a16="http://schemas.microsoft.com/office/drawing/2014/main" id="{F775941C-2B69-1A23-7061-1F559602D171}"/>
+              </a:ext>
+            </a:extLst>
+          </p:cNvPr>
+          <p:cNvSpPr>
+            <a:spLocks noGrp="1"/>
+          </p:cNvSpPr>
+          <p:nvPr>
+            <p:ph type="dt" sz="half" idx="10"/>
+          </p:nvPr>
+        </p:nvSpPr>
+        <p:spPr/>
+        <p:txBody>
+          <a:bodyPr/>
+          <a:lstStyle/>
+          <a:p>
+            <a:fld id="{CF3A024A-424E-49EA-8738-237516D3E722}" type="datetime1">
+              <a:rPr lang="fr-FR" smtClean="0"/>
+              <a:t>02/05/2025</a:t>
+            </a:fld>
+            <a:endParaRPr lang="fr-FR" dirty="0"/>
+          </a:p>
+        </p:txBody>
+      </p:sp>
+      <p:sp>
+        <p:nvSpPr>
+          <p:cNvPr id="4" name="Slide Number Placeholder 3">
+            <a:extLst>
+              <a:ext uri="{FF2B5EF4-FFF2-40B4-BE49-F238E27FC236}">
+                <a16:creationId xmlns:a16="http://schemas.microsoft.com/office/drawing/2014/main" id="{CF576F2E-6CB6-A315-AC18-EB241BD3F284}"/>
+              </a:ext>
+            </a:extLst>
+          </p:cNvPr>
+          <p:cNvSpPr>
+            <a:spLocks noGrp="1"/>
+          </p:cNvSpPr>
+          <p:nvPr>
+            <p:ph type="sldNum" sz="quarter" idx="12"/>
+          </p:nvPr>
+        </p:nvSpPr>
+        <p:spPr/>
+        <p:txBody>
+          <a:bodyPr/>
+          <a:lstStyle/>
+          <a:p>
+            <a:pPr algn="r"/>
+            <a:fld id="{C014DD1E-5D91-48A3-AD6D-45FBA980D106}" type="slidenum">
+              <a:rPr lang="fr-FR" sz="2000" smtClean="0"/>
+              <a:pPr algn="r"/>
+              <a:t>2</a:t>
+            </a:fld>
+            <a:endParaRPr lang="fr-FR" sz="2000" dirty="0"/>
+          </a:p>
+        </p:txBody>
+      </p:sp>
+    </p:spTree>
+    <p:extLst>
+      <p:ext uri="{BB962C8B-B14F-4D97-AF65-F5344CB8AC3E}">
+        <p14:creationId xmlns:p14="http://schemas.microsoft.com/office/powerpoint/2010/main" val="3529114326"/>
+      </p:ext>
+    </p:extLst>
+  </p:cSld>
+  <p:clrMapOvr>
+    <a:masterClrMapping/>
+  </p:clrMapOvr>
+  <mc:AlternateContent xmlns:mc="http://schemas.openxmlformats.org/markup-compatibility/2006" xmlns:p14="http://schemas.microsoft.com/office/powerpoint/2010/main">
+    <mc:Choice Requires="p14">
+      <p:transition spd="med" p14:dur="700">
+        <p:fade/>
+      </p:transition>
+    </mc:Choice>
+    <mc:Fallback xmlns="">
+      <p:transition spd="med">
+        <p:fade/>
+      </p:transition>
+    </mc:Fallback>
+  </mc:AlternateContent>
+</p:sld>
+</file>
+
+<file path=ppt/slides/slide20.xml><?xml version="1.0" encoding="utf-8"?>
 <p:sld xmlns:a="http://schemas.openxmlformats.org/drawingml/2006/main" xmlns:r="http://schemas.openxmlformats.org/officeDocument/2006/relationships" xmlns:p="http://schemas.openxmlformats.org/presentationml/2006/main">
   <p:cSld>
     <p:spTree>
@@ -11256,7 +13121,13 @@
           <a:p>
             <a:r>
               <a:rPr lang="fr-FR" dirty="0"/>
-              <a:t>Finir la programmation des </a:t>
+              <a:t>Finir la programmation de ADC </a:t>
+            </a:r>
+          </a:p>
+          <a:p>
+            <a:r>
+              <a:rPr lang="fr-FR" dirty="0"/>
+              <a:t>Intégrer tous les systèmes ensemble</a:t>
             </a:r>
           </a:p>
           <a:p>
@@ -11311,7 +13182,7 @@
           <a:p>
             <a:fld id="{10F8D90C-592A-4BB3-869D-943E473FE966}" type="datetime1">
               <a:rPr lang="fr-FR" smtClean="0"/>
-              <a:t>01/05/2025</a:t>
+              <a:t>02/05/2025</a:t>
             </a:fld>
             <a:endParaRPr lang="fr-FR" dirty="0"/>
           </a:p>
@@ -11342,7 +13213,7 @@
             <a:fld id="{C014DD1E-5D91-48A3-AD6D-45FBA980D106}" type="slidenum">
               <a:rPr lang="fr-FR" sz="2000" smtClean="0"/>
               <a:pPr algn="r"/>
-              <a:t>17</a:t>
+              <a:t>20</a:t>
             </a:fld>
             <a:endParaRPr lang="fr-FR" sz="2400" dirty="0"/>
           </a:p>
@@ -11409,8 +13280,59 @@
                   <a:schemeClr val="accent1"/>
                 </a:solidFill>
               </a:rPr>
-              <a:t> a Faire &amp; </a:t>
-            </a:r>
+              <a:t> a Faire</a:t>
+            </a:r>
+            <a:endParaRPr lang="fr-FR" sz="4400" b="1" dirty="0"/>
+          </a:p>
+        </p:txBody>
+      </p:sp>
+      <p:sp>
+        <p:nvSpPr>
+          <p:cNvPr id="2" name="Title 1">
+            <a:extLst>
+              <a:ext uri="{FF2B5EF4-FFF2-40B4-BE49-F238E27FC236}">
+                <a16:creationId xmlns:a16="http://schemas.microsoft.com/office/drawing/2014/main" id="{7515A89D-BE03-2B61-7E2E-D8A781043D97}"/>
+              </a:ext>
+            </a:extLst>
+          </p:cNvPr>
+          <p:cNvSpPr txBox="1">
+            <a:spLocks/>
+          </p:cNvSpPr>
+          <p:nvPr/>
+        </p:nvSpPr>
+        <p:spPr>
+          <a:xfrm>
+            <a:off x="1218882" y="1844824"/>
+            <a:ext cx="10360501" cy="1223963"/>
+          </a:xfrm>
+          <a:prstGeom prst="rect">
+            <a:avLst/>
+          </a:prstGeom>
+        </p:spPr>
+        <p:txBody>
+          <a:bodyPr vert="horz" lIns="121899" tIns="60949" rIns="121899" bIns="60949" rtlCol="0" anchor="b">
+            <a:normAutofit/>
+          </a:bodyPr>
+          <a:lstStyle>
+            <a:lvl1pPr algn="l" defTabSz="1218987" rtl="0" eaLnBrk="1" latinLnBrk="0" hangingPunct="1">
+              <a:lnSpc>
+                <a:spcPct val="90000"/>
+              </a:lnSpc>
+              <a:spcBef>
+                <a:spcPct val="0"/>
+              </a:spcBef>
+              <a:buNone/>
+              <a:defRPr sz="3600" kern="1200">
+                <a:solidFill>
+                  <a:schemeClr val="tx1"/>
+                </a:solidFill>
+                <a:latin typeface="+mj-lt"/>
+                <a:ea typeface="+mj-ea"/>
+                <a:cs typeface="+mj-cs"/>
+              </a:defRPr>
+            </a:lvl1pPr>
+          </a:lstStyle>
+          <a:p>
             <a:r>
               <a:rPr lang="en-US" sz="4400" b="1" dirty="0" err="1">
                 <a:solidFill>
@@ -11456,7 +13378,7 @@
 </p:sld>
 </file>
 
-<file path=ppt/slides/slide18.xml><?xml version="1.0" encoding="utf-8"?>
+<file path=ppt/slides/slide21.xml><?xml version="1.0" encoding="utf-8"?>
 <p:sld xmlns:a="http://schemas.openxmlformats.org/drawingml/2006/main" xmlns:r="http://schemas.openxmlformats.org/officeDocument/2006/relationships" xmlns:p="http://schemas.openxmlformats.org/presentationml/2006/main">
   <p:cSld>
     <p:spTree>
@@ -11531,7 +13453,7 @@
           <a:p>
             <a:fld id="{07EC882C-578E-43CF-9E65-BCBD84298E0F}" type="datetime1">
               <a:rPr lang="fr-FR" smtClean="0"/>
-              <a:t>01/05/2025</a:t>
+              <a:t>02/05/2025</a:t>
             </a:fld>
             <a:endParaRPr lang="fr-FR" dirty="0"/>
           </a:p>
@@ -11562,7 +13484,7 @@
             <a:fld id="{C014DD1E-5D91-48A3-AD6D-45FBA980D106}" type="slidenum">
               <a:rPr lang="fr-FR" sz="2000" smtClean="0"/>
               <a:pPr algn="r"/>
-              <a:t>18</a:t>
+              <a:t>21</a:t>
             </a:fld>
             <a:endParaRPr lang="fr-FR" dirty="0"/>
           </a:p>
@@ -11593,7 +13515,7 @@
 </p:sld>
 </file>
 
-<file path=ppt/slides/slide19.xml><?xml version="1.0" encoding="utf-8"?>
+<file path=ppt/slides/slide22.xml><?xml version="1.0" encoding="utf-8"?>
 <p:sld xmlns:a="http://schemas.openxmlformats.org/drawingml/2006/main" xmlns:r="http://schemas.openxmlformats.org/officeDocument/2006/relationships" xmlns:p="http://schemas.openxmlformats.org/presentationml/2006/main">
   <p:cSld>
     <p:spTree>
@@ -11683,7 +13605,7 @@
           <a:p>
             <a:fld id="{07EC882C-578E-43CF-9E65-BCBD84298E0F}" type="datetime1">
               <a:rPr lang="fr-FR" smtClean="0"/>
-              <a:t>01/05/2025</a:t>
+              <a:t>02/05/2025</a:t>
             </a:fld>
             <a:endParaRPr lang="fr-FR" dirty="0"/>
           </a:p>
@@ -11714,7 +13636,7 @@
             <a:fld id="{C014DD1E-5D91-48A3-AD6D-45FBA980D106}" type="slidenum">
               <a:rPr lang="fr-FR" sz="2000" smtClean="0"/>
               <a:pPr algn="r"/>
-              <a:t>19</a:t>
+              <a:t>22</a:t>
             </a:fld>
             <a:endParaRPr lang="fr-FR" dirty="0"/>
           </a:p>
@@ -11775,249 +13697,7 @@
 </p:sld>
 </file>
 
-<file path=ppt/slides/slide2.xml><?xml version="1.0" encoding="utf-8"?>
-<p:sld xmlns:a="http://schemas.openxmlformats.org/drawingml/2006/main" xmlns:r="http://schemas.openxmlformats.org/officeDocument/2006/relationships" xmlns:p="http://schemas.openxmlformats.org/presentationml/2006/main">
-  <p:cSld>
-    <p:spTree>
-      <p:nvGrpSpPr>
-        <p:cNvPr id="1" name=""/>
-        <p:cNvGrpSpPr/>
-        <p:nvPr/>
-      </p:nvGrpSpPr>
-      <p:grpSpPr>
-        <a:xfrm>
-          <a:off x="0" y="0"/>
-          <a:ext cx="0" cy="0"/>
-          <a:chOff x="0" y="0"/>
-          <a:chExt cx="0" cy="0"/>
-        </a:xfrm>
-      </p:grpSpPr>
-      <p:sp>
-        <p:nvSpPr>
-          <p:cNvPr id="13" name="Titre 12"/>
-          <p:cNvSpPr>
-            <a:spLocks noGrp="1"/>
-          </p:cNvSpPr>
-          <p:nvPr>
-            <p:ph type="title"/>
-          </p:nvPr>
-        </p:nvSpPr>
-        <p:spPr/>
-        <p:txBody>
-          <a:bodyPr rtlCol="0">
-            <a:normAutofit/>
-          </a:bodyPr>
-          <a:lstStyle/>
-          <a:p>
-            <a:pPr rtl="0"/>
-            <a:r>
-              <a:rPr lang="en-GB" sz="4800" b="1" dirty="0" err="1">
-                <a:solidFill>
-                  <a:schemeClr val="accent1"/>
-                </a:solidFill>
-              </a:rPr>
-              <a:t>Sommaire</a:t>
-            </a:r>
-            <a:r>
-              <a:rPr lang="en-GB" sz="4800" b="1" dirty="0">
-                <a:solidFill>
-                  <a:schemeClr val="accent1"/>
-                </a:solidFill>
-              </a:rPr>
-              <a:t> </a:t>
-            </a:r>
-            <a:endParaRPr lang="fr-FR" sz="4800" b="1" dirty="0">
-              <a:solidFill>
-                <a:schemeClr val="accent1"/>
-              </a:solidFill>
-            </a:endParaRPr>
-          </a:p>
-        </p:txBody>
-      </p:sp>
-      <p:sp>
-        <p:nvSpPr>
-          <p:cNvPr id="14" name="Espace réservé du contenu 13"/>
-          <p:cNvSpPr>
-            <a:spLocks noGrp="1"/>
-          </p:cNvSpPr>
-          <p:nvPr>
-            <p:ph idx="1"/>
-          </p:nvPr>
-        </p:nvSpPr>
-        <p:spPr/>
-        <p:txBody>
-          <a:bodyPr rtlCol="0">
-            <a:normAutofit lnSpcReduction="10000"/>
-          </a:bodyPr>
-          <a:lstStyle/>
-          <a:p>
-            <a:pPr marL="514350" indent="-514350" rtl="0">
-              <a:buFont typeface="+mj-lt"/>
-              <a:buAutoNum type="arabicPeriod"/>
-            </a:pPr>
-            <a:r>
-              <a:rPr lang="fr-FR" dirty="0"/>
-              <a:t>Présentation de système </a:t>
-            </a:r>
-          </a:p>
-          <a:p>
-            <a:pPr marL="514350" indent="-514350">
-              <a:buFont typeface="+mj-lt"/>
-              <a:buAutoNum type="arabicPeriod"/>
-            </a:pPr>
-            <a:r>
-              <a:rPr lang="fr-FR" dirty="0"/>
-              <a:t>Détails des sous-systèmes</a:t>
-            </a:r>
-          </a:p>
-          <a:p>
-            <a:pPr marL="514350" indent="-514350">
-              <a:buFont typeface="+mj-lt"/>
-              <a:buAutoNum type="arabicPeriod"/>
-            </a:pPr>
-            <a:r>
-              <a:rPr lang="fr-FR" dirty="0"/>
-              <a:t>Conception et mise en œuvre</a:t>
-            </a:r>
-          </a:p>
-          <a:p>
-            <a:pPr marL="514350" indent="-514350" rtl="0">
-              <a:buFont typeface="+mj-lt"/>
-              <a:buAutoNum type="arabicPeriod"/>
-            </a:pPr>
-            <a:r>
-              <a:rPr lang="fr-FR" dirty="0"/>
-              <a:t>Implantation</a:t>
-            </a:r>
-          </a:p>
-          <a:p>
-            <a:pPr marL="514350" indent="-514350" rtl="0">
-              <a:buFont typeface="+mj-lt"/>
-              <a:buAutoNum type="arabicPeriod"/>
-            </a:pPr>
-            <a:r>
-              <a:rPr lang="fr-FR" dirty="0"/>
-              <a:t>Vérification</a:t>
-            </a:r>
-          </a:p>
-          <a:p>
-            <a:pPr marL="514350" indent="-514350" rtl="0">
-              <a:buFont typeface="+mj-lt"/>
-              <a:buAutoNum type="arabicPeriod"/>
-            </a:pPr>
-            <a:r>
-              <a:rPr lang="fr-FR" dirty="0"/>
-              <a:t>Dysfonctionnements et maintenance</a:t>
-            </a:r>
-          </a:p>
-          <a:p>
-            <a:pPr marL="514350" indent="-514350" rtl="0">
-              <a:buFont typeface="+mj-lt"/>
-              <a:buAutoNum type="arabicPeriod"/>
-            </a:pPr>
-            <a:r>
-              <a:rPr lang="fr-FR" dirty="0"/>
-              <a:t>État actuel du système</a:t>
-            </a:r>
-          </a:p>
-          <a:p>
-            <a:pPr marL="514350" indent="-514350" rtl="0">
-              <a:buFont typeface="+mj-lt"/>
-              <a:buAutoNum type="arabicPeriod"/>
-            </a:pPr>
-            <a:r>
-              <a:rPr lang="fr-FR" dirty="0"/>
-              <a:t>Conclusion et pistes d'amélioration</a:t>
-            </a:r>
-          </a:p>
-        </p:txBody>
-      </p:sp>
-      <p:sp>
-        <p:nvSpPr>
-          <p:cNvPr id="3" name="Date Placeholder 2">
-            <a:extLst>
-              <a:ext uri="{FF2B5EF4-FFF2-40B4-BE49-F238E27FC236}">
-                <a16:creationId xmlns:a16="http://schemas.microsoft.com/office/drawing/2014/main" id="{F775941C-2B69-1A23-7061-1F559602D171}"/>
-              </a:ext>
-            </a:extLst>
-          </p:cNvPr>
-          <p:cNvSpPr>
-            <a:spLocks noGrp="1"/>
-          </p:cNvSpPr>
-          <p:nvPr>
-            <p:ph type="dt" sz="half" idx="10"/>
-          </p:nvPr>
-        </p:nvSpPr>
-        <p:spPr/>
-        <p:txBody>
-          <a:bodyPr/>
-          <a:lstStyle/>
-          <a:p>
-            <a:fld id="{CF3A024A-424E-49EA-8738-237516D3E722}" type="datetime1">
-              <a:rPr lang="fr-FR" smtClean="0"/>
-              <a:t>01/05/2025</a:t>
-            </a:fld>
-            <a:endParaRPr lang="fr-FR" dirty="0"/>
-          </a:p>
-        </p:txBody>
-      </p:sp>
-      <p:sp>
-        <p:nvSpPr>
-          <p:cNvPr id="4" name="Slide Number Placeholder 3">
-            <a:extLst>
-              <a:ext uri="{FF2B5EF4-FFF2-40B4-BE49-F238E27FC236}">
-                <a16:creationId xmlns:a16="http://schemas.microsoft.com/office/drawing/2014/main" id="{CF576F2E-6CB6-A315-AC18-EB241BD3F284}"/>
-              </a:ext>
-            </a:extLst>
-          </p:cNvPr>
-          <p:cNvSpPr>
-            <a:spLocks noGrp="1"/>
-          </p:cNvSpPr>
-          <p:nvPr>
-            <p:ph type="sldNum" sz="quarter" idx="12"/>
-          </p:nvPr>
-        </p:nvSpPr>
-        <p:spPr/>
-        <p:txBody>
-          <a:bodyPr/>
-          <a:lstStyle/>
-          <a:p>
-            <a:pPr algn="r"/>
-            <a:fld id="{C014DD1E-5D91-48A3-AD6D-45FBA980D106}" type="slidenum">
-              <a:rPr lang="fr-FR" sz="2000" smtClean="0"/>
-              <a:pPr algn="r"/>
-              <a:t>2</a:t>
-            </a:fld>
-            <a:endParaRPr lang="fr-FR" sz="2000" dirty="0"/>
-          </a:p>
-        </p:txBody>
-      </p:sp>
-    </p:spTree>
-    <p:extLst>
-      <p:ext uri="{BB962C8B-B14F-4D97-AF65-F5344CB8AC3E}">
-        <p14:creationId xmlns:p14="http://schemas.microsoft.com/office/powerpoint/2010/main" val="3529114326"/>
-      </p:ext>
-    </p:extLst>
-  </p:cSld>
-  <p:clrMapOvr>
-    <a:masterClrMapping/>
-  </p:clrMapOvr>
-  <mc:AlternateContent xmlns:mc="http://schemas.openxmlformats.org/markup-compatibility/2006" xmlns:p14="http://schemas.microsoft.com/office/powerpoint/2010/main">
-    <mc:Choice Requires="p14">
-      <p:transition spd="med" p14:dur="700">
-        <p:fade/>
-      </p:transition>
-    </mc:Choice>
-    <mc:Fallback xmlns="">
-      <p:transition spd="med">
-        <p:fade/>
-      </p:transition>
-    </mc:Fallback>
-  </mc:AlternateContent>
-</p:sld>
-</file>
-
-<file path=ppt/slides/slide20.xml><?xml version="1.0" encoding="utf-8"?>
+<file path=ppt/slides/slide23.xml><?xml version="1.0" encoding="utf-8"?>
 <p:sld xmlns:a="http://schemas.openxmlformats.org/drawingml/2006/main" xmlns:r="http://schemas.openxmlformats.org/officeDocument/2006/relationships" xmlns:p="http://schemas.openxmlformats.org/presentationml/2006/main">
   <p:cSld>
     <p:spTree>
@@ -12107,7 +13787,7 @@
           <a:p>
             <a:fld id="{07EC882C-578E-43CF-9E65-BCBD84298E0F}" type="datetime1">
               <a:rPr lang="fr-FR" smtClean="0"/>
-              <a:t>01/05/2025</a:t>
+              <a:t>02/05/2025</a:t>
             </a:fld>
             <a:endParaRPr lang="fr-FR" dirty="0"/>
           </a:p>
@@ -12138,7 +13818,7 @@
             <a:fld id="{C014DD1E-5D91-48A3-AD6D-45FBA980D106}" type="slidenum">
               <a:rPr lang="fr-FR" sz="2000" smtClean="0"/>
               <a:pPr algn="r"/>
-              <a:t>20</a:t>
+              <a:t>23</a:t>
             </a:fld>
             <a:endParaRPr lang="fr-FR" dirty="0"/>
           </a:p>
@@ -12279,7 +13959,7 @@
           <a:p>
             <a:fld id="{10F8D90C-592A-4BB3-869D-943E473FE966}" type="datetime1">
               <a:rPr lang="fr-FR" smtClean="0"/>
-              <a:t>01/05/2025</a:t>
+              <a:t>02/05/2025</a:t>
             </a:fld>
             <a:endParaRPr lang="fr-FR" dirty="0"/>
           </a:p>
@@ -12907,6 +14587,326 @@
   <p:cSld>
     <p:spTree>
       <p:nvGrpSpPr>
+        <p:cNvPr id="1" name=""/>
+        <p:cNvGrpSpPr/>
+        <p:nvPr/>
+      </p:nvGrpSpPr>
+      <p:grpSpPr>
+        <a:xfrm>
+          <a:off x="0" y="0"/>
+          <a:ext cx="0" cy="0"/>
+          <a:chOff x="0" y="0"/>
+          <a:chExt cx="0" cy="0"/>
+        </a:xfrm>
+      </p:grpSpPr>
+      <p:sp>
+        <p:nvSpPr>
+          <p:cNvPr id="7" name="Date Placeholder 6">
+            <a:extLst>
+              <a:ext uri="{FF2B5EF4-FFF2-40B4-BE49-F238E27FC236}">
+                <a16:creationId xmlns:a16="http://schemas.microsoft.com/office/drawing/2014/main" id="{2DC76158-E54F-7077-707C-A4425A9BA623}"/>
+              </a:ext>
+            </a:extLst>
+          </p:cNvPr>
+          <p:cNvSpPr>
+            <a:spLocks noGrp="1"/>
+          </p:cNvSpPr>
+          <p:nvPr>
+            <p:ph type="dt" sz="half" idx="10"/>
+          </p:nvPr>
+        </p:nvSpPr>
+        <p:spPr/>
+        <p:txBody>
+          <a:bodyPr/>
+          <a:lstStyle/>
+          <a:p>
+            <a:fld id="{10F8D90C-592A-4BB3-869D-943E473FE966}" type="datetime1">
+              <a:rPr lang="fr-FR" smtClean="0"/>
+              <a:t>02/05/2025</a:t>
+            </a:fld>
+            <a:endParaRPr lang="fr-FR" dirty="0"/>
+          </a:p>
+        </p:txBody>
+      </p:sp>
+      <p:sp>
+        <p:nvSpPr>
+          <p:cNvPr id="8" name="Slide Number Placeholder 7">
+            <a:extLst>
+              <a:ext uri="{FF2B5EF4-FFF2-40B4-BE49-F238E27FC236}">
+                <a16:creationId xmlns:a16="http://schemas.microsoft.com/office/drawing/2014/main" id="{78826BF9-6DFB-B15B-A409-F79C22656145}"/>
+              </a:ext>
+            </a:extLst>
+          </p:cNvPr>
+          <p:cNvSpPr>
+            <a:spLocks noGrp="1"/>
+          </p:cNvSpPr>
+          <p:nvPr>
+            <p:ph type="sldNum" sz="quarter" idx="12"/>
+          </p:nvPr>
+        </p:nvSpPr>
+        <p:spPr/>
+        <p:txBody>
+          <a:bodyPr/>
+          <a:lstStyle/>
+          <a:p>
+            <a:pPr algn="r"/>
+            <a:fld id="{C014DD1E-5D91-48A3-AD6D-45FBA980D106}" type="slidenum">
+              <a:rPr lang="fr-FR" smtClean="0"/>
+              <a:pPr algn="r"/>
+              <a:t>4</a:t>
+            </a:fld>
+            <a:endParaRPr lang="fr-FR" dirty="0"/>
+          </a:p>
+        </p:txBody>
+      </p:sp>
+      <p:pic>
+        <p:nvPicPr>
+          <p:cNvPr id="16" name="Content Placeholder 10">
+            <a:extLst>
+              <a:ext uri="{FF2B5EF4-FFF2-40B4-BE49-F238E27FC236}">
+                <a16:creationId xmlns:a16="http://schemas.microsoft.com/office/drawing/2014/main" id="{BB94A167-96A8-168B-55D6-169DE1E854D5}"/>
+              </a:ext>
+            </a:extLst>
+          </p:cNvPr>
+          <p:cNvPicPr>
+            <a:picLocks noChangeAspect="1"/>
+          </p:cNvPicPr>
+          <p:nvPr/>
+        </p:nvPicPr>
+        <p:blipFill>
+          <a:blip r:embed="rId2">
+            <a:extLst>
+              <a:ext uri="{28A0092B-C50C-407E-A947-70E740481C1C}">
+                <a14:useLocalDpi xmlns:a14="http://schemas.microsoft.com/office/drawing/2010/main" val="0"/>
+              </a:ext>
+            </a:extLst>
+          </a:blip>
+          <a:stretch>
+            <a:fillRect/>
+          </a:stretch>
+        </p:blipFill>
+        <p:spPr>
+          <a:xfrm>
+            <a:off x="1935622" y="1196752"/>
+            <a:ext cx="8317579" cy="4772287"/>
+          </a:xfrm>
+          <a:prstGeom prst="rect">
+            <a:avLst/>
+          </a:prstGeom>
+        </p:spPr>
+      </p:pic>
+      <p:sp>
+        <p:nvSpPr>
+          <p:cNvPr id="20" name="Titre 1">
+            <a:extLst>
+              <a:ext uri="{FF2B5EF4-FFF2-40B4-BE49-F238E27FC236}">
+                <a16:creationId xmlns:a16="http://schemas.microsoft.com/office/drawing/2014/main" id="{C39ECDD1-CCB4-A2B6-3CFF-CE9BF0FDF5CD}"/>
+              </a:ext>
+            </a:extLst>
+          </p:cNvPr>
+          <p:cNvSpPr>
+            <a:spLocks noGrp="1"/>
+          </p:cNvSpPr>
+          <p:nvPr>
+            <p:ph type="title"/>
+          </p:nvPr>
+        </p:nvSpPr>
+        <p:spPr>
+          <a:xfrm>
+            <a:off x="914161" y="-110335"/>
+            <a:ext cx="10360501" cy="1223963"/>
+          </a:xfrm>
+        </p:spPr>
+        <p:txBody>
+          <a:bodyPr rtlCol="0">
+            <a:normAutofit/>
+          </a:bodyPr>
+          <a:lstStyle/>
+          <a:p>
+            <a:pPr rtl="0"/>
+            <a:r>
+              <a:rPr lang="en-US" sz="4400" b="1" dirty="0">
+                <a:solidFill>
+                  <a:schemeClr val="accent1"/>
+                </a:solidFill>
+              </a:rPr>
+              <a:t>FAST</a:t>
+            </a:r>
+            <a:endParaRPr lang="fr-FR" sz="4400" b="1" dirty="0">
+              <a:solidFill>
+                <a:schemeClr val="accent1"/>
+              </a:solidFill>
+            </a:endParaRPr>
+          </a:p>
+        </p:txBody>
+      </p:sp>
+    </p:spTree>
+    <p:extLst>
+      <p:ext uri="{BB962C8B-B14F-4D97-AF65-F5344CB8AC3E}">
+        <p14:creationId xmlns:p14="http://schemas.microsoft.com/office/powerpoint/2010/main" val="2877027844"/>
+      </p:ext>
+    </p:extLst>
+  </p:cSld>
+  <p:clrMapOvr>
+    <a:masterClrMapping/>
+  </p:clrMapOvr>
+  <mc:AlternateContent xmlns:mc="http://schemas.openxmlformats.org/markup-compatibility/2006" xmlns:p14="http://schemas.microsoft.com/office/powerpoint/2010/main">
+    <mc:Choice Requires="p14">
+      <p:transition spd="med" p14:dur="700">
+        <p:fade/>
+      </p:transition>
+    </mc:Choice>
+    <mc:Fallback xmlns="">
+      <p:transition spd="med">
+        <p:fade/>
+      </p:transition>
+    </mc:Fallback>
+  </mc:AlternateContent>
+</p:sld>
+</file>
+
+<file path=ppt/slides/slide5.xml><?xml version="1.0" encoding="utf-8"?>
+<p:sld xmlns:a="http://schemas.openxmlformats.org/drawingml/2006/main" xmlns:r="http://schemas.openxmlformats.org/officeDocument/2006/relationships" xmlns:p="http://schemas.openxmlformats.org/presentationml/2006/main">
+  <p:cSld>
+    <p:spTree>
+      <p:nvGrpSpPr>
+        <p:cNvPr id="1" name=""/>
+        <p:cNvGrpSpPr/>
+        <p:nvPr/>
+      </p:nvGrpSpPr>
+      <p:grpSpPr>
+        <a:xfrm>
+          <a:off x="0" y="0"/>
+          <a:ext cx="0" cy="0"/>
+          <a:chOff x="0" y="0"/>
+          <a:chExt cx="0" cy="0"/>
+        </a:xfrm>
+      </p:grpSpPr>
+      <p:pic>
+        <p:nvPicPr>
+          <p:cNvPr id="10" name="Content Placeholder 9">
+            <a:extLst>
+              <a:ext uri="{FF2B5EF4-FFF2-40B4-BE49-F238E27FC236}">
+                <a16:creationId xmlns:a16="http://schemas.microsoft.com/office/drawing/2014/main" id="{478E7859-9C38-3835-A3D2-9F81480CF6C3}"/>
+              </a:ext>
+            </a:extLst>
+          </p:cNvPr>
+          <p:cNvPicPr>
+            <a:picLocks noGrp="1" noChangeAspect="1"/>
+          </p:cNvPicPr>
+          <p:nvPr>
+            <p:ph sz="half" idx="2"/>
+          </p:nvPr>
+        </p:nvPicPr>
+        <p:blipFill>
+          <a:blip r:embed="rId2">
+            <a:extLst>
+              <a:ext uri="{28A0092B-C50C-407E-A947-70E740481C1C}">
+                <a14:useLocalDpi xmlns:a14="http://schemas.microsoft.com/office/drawing/2010/main" val="0"/>
+              </a:ext>
+            </a:extLst>
+          </a:blip>
+          <a:stretch>
+            <a:fillRect/>
+          </a:stretch>
+        </p:blipFill>
+        <p:spPr>
+          <a:xfrm>
+            <a:off x="1935623" y="136523"/>
+            <a:ext cx="8317578" cy="6033213"/>
+          </a:xfrm>
+        </p:spPr>
+      </p:pic>
+      <p:sp>
+        <p:nvSpPr>
+          <p:cNvPr id="7" name="Date Placeholder 6">
+            <a:extLst>
+              <a:ext uri="{FF2B5EF4-FFF2-40B4-BE49-F238E27FC236}">
+                <a16:creationId xmlns:a16="http://schemas.microsoft.com/office/drawing/2014/main" id="{A01A85C8-E32F-0304-713F-2B847F8421AD}"/>
+              </a:ext>
+            </a:extLst>
+          </p:cNvPr>
+          <p:cNvSpPr>
+            <a:spLocks noGrp="1"/>
+          </p:cNvSpPr>
+          <p:nvPr>
+            <p:ph type="dt" sz="half" idx="10"/>
+          </p:nvPr>
+        </p:nvSpPr>
+        <p:spPr/>
+        <p:txBody>
+          <a:bodyPr/>
+          <a:lstStyle/>
+          <a:p>
+            <a:fld id="{10F8D90C-592A-4BB3-869D-943E473FE966}" type="datetime1">
+              <a:rPr lang="fr-FR" smtClean="0"/>
+              <a:t>02/05/2025</a:t>
+            </a:fld>
+            <a:endParaRPr lang="fr-FR" dirty="0"/>
+          </a:p>
+        </p:txBody>
+      </p:sp>
+      <p:sp>
+        <p:nvSpPr>
+          <p:cNvPr id="8" name="Slide Number Placeholder 7">
+            <a:extLst>
+              <a:ext uri="{FF2B5EF4-FFF2-40B4-BE49-F238E27FC236}">
+                <a16:creationId xmlns:a16="http://schemas.microsoft.com/office/drawing/2014/main" id="{C80AF4E3-F889-9494-B422-3A5EA34F1E1F}"/>
+              </a:ext>
+            </a:extLst>
+          </p:cNvPr>
+          <p:cNvSpPr>
+            <a:spLocks noGrp="1"/>
+          </p:cNvSpPr>
+          <p:nvPr>
+            <p:ph type="sldNum" sz="quarter" idx="12"/>
+          </p:nvPr>
+        </p:nvSpPr>
+        <p:spPr/>
+        <p:txBody>
+          <a:bodyPr/>
+          <a:lstStyle/>
+          <a:p>
+            <a:pPr algn="r"/>
+            <a:fld id="{C014DD1E-5D91-48A3-AD6D-45FBA980D106}" type="slidenum">
+              <a:rPr lang="fr-FR" smtClean="0"/>
+              <a:pPr algn="r"/>
+              <a:t>5</a:t>
+            </a:fld>
+            <a:endParaRPr lang="fr-FR" dirty="0"/>
+          </a:p>
+        </p:txBody>
+      </p:sp>
+    </p:spTree>
+    <p:extLst>
+      <p:ext uri="{BB962C8B-B14F-4D97-AF65-F5344CB8AC3E}">
+        <p14:creationId xmlns:p14="http://schemas.microsoft.com/office/powerpoint/2010/main" val="459590912"/>
+      </p:ext>
+    </p:extLst>
+  </p:cSld>
+  <p:clrMapOvr>
+    <a:masterClrMapping/>
+  </p:clrMapOvr>
+  <mc:AlternateContent xmlns:mc="http://schemas.openxmlformats.org/markup-compatibility/2006" xmlns:p14="http://schemas.microsoft.com/office/powerpoint/2010/main">
+    <mc:Choice Requires="p14">
+      <p:transition spd="med" p14:dur="700">
+        <p:fade/>
+      </p:transition>
+    </mc:Choice>
+    <mc:Fallback xmlns="">
+      <p:transition spd="med">
+        <p:fade/>
+      </p:transition>
+    </mc:Fallback>
+  </mc:AlternateContent>
+</p:sld>
+</file>
+
+<file path=ppt/slides/slide6.xml><?xml version="1.0" encoding="utf-8"?>
+<p:sld xmlns:a="http://schemas.openxmlformats.org/drawingml/2006/main" xmlns:r="http://schemas.openxmlformats.org/officeDocument/2006/relationships" xmlns:p="http://schemas.openxmlformats.org/presentationml/2006/main">
+  <p:cSld>
+    <p:spTree>
+      <p:nvGrpSpPr>
         <p:cNvPr id="1" name="">
           <a:extLst>
             <a:ext uri="{FF2B5EF4-FFF2-40B4-BE49-F238E27FC236}">
@@ -12925,6 +14925,104 @@
           <a:chExt cx="0" cy="0"/>
         </a:xfrm>
       </p:grpSpPr>
+      <p:sp>
+        <p:nvSpPr>
+          <p:cNvPr id="4" name="Rectangle 3">
+            <a:extLst>
+              <a:ext uri="{FF2B5EF4-FFF2-40B4-BE49-F238E27FC236}">
+                <a16:creationId xmlns:a16="http://schemas.microsoft.com/office/drawing/2014/main" id="{3AA39142-3313-99EF-86FE-38E1B614DE1B}"/>
+              </a:ext>
+            </a:extLst>
+          </p:cNvPr>
+          <p:cNvSpPr/>
+          <p:nvPr/>
+        </p:nvSpPr>
+        <p:spPr>
+          <a:xfrm>
+            <a:off x="5662364" y="1340768"/>
+            <a:ext cx="1656184" cy="4176464"/>
+          </a:xfrm>
+          <a:prstGeom prst="rect">
+            <a:avLst/>
+          </a:prstGeom>
+          <a:solidFill>
+            <a:schemeClr val="accent2"/>
+          </a:solidFill>
+        </p:spPr>
+        <p:style>
+          <a:lnRef idx="2">
+            <a:schemeClr val="accent1">
+              <a:shade val="50000"/>
+            </a:schemeClr>
+          </a:lnRef>
+          <a:fillRef idx="1">
+            <a:schemeClr val="accent1"/>
+          </a:fillRef>
+          <a:effectRef idx="0">
+            <a:schemeClr val="accent1"/>
+          </a:effectRef>
+          <a:fontRef idx="minor">
+            <a:schemeClr val="lt1"/>
+          </a:fontRef>
+        </p:style>
+        <p:txBody>
+          <a:bodyPr rtlCol="0" anchor="ctr"/>
+          <a:lstStyle/>
+          <a:p>
+            <a:pPr algn="ctr"/>
+            <a:endParaRPr lang="fr-FR" sz="2800"/>
+          </a:p>
+        </p:txBody>
+      </p:sp>
+      <p:sp>
+        <p:nvSpPr>
+          <p:cNvPr id="3" name="Rectangle 2">
+            <a:extLst>
+              <a:ext uri="{FF2B5EF4-FFF2-40B4-BE49-F238E27FC236}">
+                <a16:creationId xmlns:a16="http://schemas.microsoft.com/office/drawing/2014/main" id="{A9E04BDD-1218-202A-C020-3998C33D5017}"/>
+              </a:ext>
+            </a:extLst>
+          </p:cNvPr>
+          <p:cNvSpPr/>
+          <p:nvPr/>
+        </p:nvSpPr>
+        <p:spPr>
+          <a:xfrm>
+            <a:off x="3718148" y="1340768"/>
+            <a:ext cx="1728192" cy="4320480"/>
+          </a:xfrm>
+          <a:prstGeom prst="rect">
+            <a:avLst/>
+          </a:prstGeom>
+          <a:solidFill>
+            <a:srgbClr val="92D050"/>
+          </a:solidFill>
+        </p:spPr>
+        <p:style>
+          <a:lnRef idx="2">
+            <a:schemeClr val="accent1">
+              <a:shade val="50000"/>
+            </a:schemeClr>
+          </a:lnRef>
+          <a:fillRef idx="1">
+            <a:schemeClr val="accent1"/>
+          </a:fillRef>
+          <a:effectRef idx="0">
+            <a:schemeClr val="accent1"/>
+          </a:effectRef>
+          <a:fontRef idx="minor">
+            <a:schemeClr val="lt1"/>
+          </a:fontRef>
+        </p:style>
+        <p:txBody>
+          <a:bodyPr rtlCol="0" anchor="ctr"/>
+          <a:lstStyle/>
+          <a:p>
+            <a:pPr algn="ctr"/>
+            <a:endParaRPr lang="fr-FR" sz="2800"/>
+          </a:p>
+        </p:txBody>
+      </p:sp>
       <p:sp>
         <p:nvSpPr>
           <p:cNvPr id="2" name="Title 1">
@@ -12987,7 +15085,7 @@
           <a:p>
             <a:fld id="{10F8D90C-592A-4BB3-869D-943E473FE966}" type="datetime1">
               <a:rPr lang="fr-FR" smtClean="0"/>
-              <a:t>01/05/2025</a:t>
+              <a:t>02/05/2025</a:t>
             </a:fld>
             <a:endParaRPr lang="fr-FR" dirty="0"/>
           </a:p>
@@ -13018,7 +15116,7 @@
             <a:fld id="{C014DD1E-5D91-48A3-AD6D-45FBA980D106}" type="slidenum">
               <a:rPr lang="fr-FR" sz="2000" smtClean="0"/>
               <a:pPr algn="r"/>
-              <a:t>4</a:t>
+              <a:t>6</a:t>
             </a:fld>
             <a:endParaRPr lang="fr-FR" sz="2000" dirty="0"/>
           </a:p>
@@ -13052,7 +15150,7 @@
         </p:blipFill>
         <p:spPr>
           <a:xfrm>
-            <a:off x="1302559" y="1119854"/>
+            <a:off x="1302559" y="1272172"/>
             <a:ext cx="9472373" cy="5541204"/>
           </a:xfrm>
           <a:prstGeom prst="rect">
@@ -13085,322 +15183,7 @@
 </p:sld>
 </file>
 
-<file path=ppt/slides/slide5.xml><?xml version="1.0" encoding="utf-8"?>
-<p:sld xmlns:a="http://schemas.openxmlformats.org/drawingml/2006/main" xmlns:r="http://schemas.openxmlformats.org/officeDocument/2006/relationships" xmlns:p="http://schemas.openxmlformats.org/presentationml/2006/main">
-  <p:cSld>
-    <p:spTree>
-      <p:nvGrpSpPr>
-        <p:cNvPr id="1" name="">
-          <a:extLst>
-            <a:ext uri="{FF2B5EF4-FFF2-40B4-BE49-F238E27FC236}">
-              <a16:creationId xmlns:a16="http://schemas.microsoft.com/office/drawing/2014/main" id="{9514F553-10E4-343F-9D78-850A354B903B}"/>
-            </a:ext>
-          </a:extLst>
-        </p:cNvPr>
-        <p:cNvGrpSpPr/>
-        <p:nvPr/>
-      </p:nvGrpSpPr>
-      <p:grpSpPr>
-        <a:xfrm>
-          <a:off x="0" y="0"/>
-          <a:ext cx="0" cy="0"/>
-          <a:chOff x="0" y="0"/>
-          <a:chExt cx="0" cy="0"/>
-        </a:xfrm>
-      </p:grpSpPr>
-      <p:sp>
-        <p:nvSpPr>
-          <p:cNvPr id="2" name="Title 1">
-            <a:extLst>
-              <a:ext uri="{FF2B5EF4-FFF2-40B4-BE49-F238E27FC236}">
-                <a16:creationId xmlns:a16="http://schemas.microsoft.com/office/drawing/2014/main" id="{BB5BE115-D9B7-3F88-C136-3C908E9036CB}"/>
-              </a:ext>
-            </a:extLst>
-          </p:cNvPr>
-          <p:cNvSpPr>
-            <a:spLocks noGrp="1"/>
-          </p:cNvSpPr>
-          <p:nvPr>
-            <p:ph type="title"/>
-          </p:nvPr>
-        </p:nvSpPr>
-        <p:spPr>
-          <a:xfrm>
-            <a:off x="914161" y="-104109"/>
-            <a:ext cx="10360501" cy="1223963"/>
-          </a:xfrm>
-        </p:spPr>
-        <p:txBody>
-          <a:bodyPr>
-            <a:normAutofit/>
-          </a:bodyPr>
-          <a:lstStyle/>
-          <a:p>
-            <a:r>
-              <a:rPr lang="fr-FR" sz="4400" b="1" dirty="0">
-                <a:solidFill>
-                  <a:schemeClr val="accent1"/>
-                </a:solidFill>
-              </a:rPr>
-              <a:t>Conception</a:t>
-            </a:r>
-            <a:endParaRPr lang="fr-FR" sz="4400" dirty="0"/>
-          </a:p>
-        </p:txBody>
-      </p:sp>
-      <p:sp>
-        <p:nvSpPr>
-          <p:cNvPr id="7" name="Date Placeholder 6">
-            <a:extLst>
-              <a:ext uri="{FF2B5EF4-FFF2-40B4-BE49-F238E27FC236}">
-                <a16:creationId xmlns:a16="http://schemas.microsoft.com/office/drawing/2014/main" id="{B68DB298-B6E3-7F2D-80AB-E65507193440}"/>
-              </a:ext>
-            </a:extLst>
-          </p:cNvPr>
-          <p:cNvSpPr>
-            <a:spLocks noGrp="1"/>
-          </p:cNvSpPr>
-          <p:nvPr>
-            <p:ph type="dt" sz="half" idx="10"/>
-          </p:nvPr>
-        </p:nvSpPr>
-        <p:spPr/>
-        <p:txBody>
-          <a:bodyPr/>
-          <a:lstStyle/>
-          <a:p>
-            <a:fld id="{10F8D90C-592A-4BB3-869D-943E473FE966}" type="datetime1">
-              <a:rPr lang="fr-FR" smtClean="0"/>
-              <a:t>01/05/2025</a:t>
-            </a:fld>
-            <a:endParaRPr lang="fr-FR" dirty="0"/>
-          </a:p>
-        </p:txBody>
-      </p:sp>
-      <p:sp>
-        <p:nvSpPr>
-          <p:cNvPr id="8" name="Slide Number Placeholder 7">
-            <a:extLst>
-              <a:ext uri="{FF2B5EF4-FFF2-40B4-BE49-F238E27FC236}">
-                <a16:creationId xmlns:a16="http://schemas.microsoft.com/office/drawing/2014/main" id="{3BB79E4A-7A88-7C1F-5314-2E63890BC045}"/>
-              </a:ext>
-            </a:extLst>
-          </p:cNvPr>
-          <p:cNvSpPr>
-            <a:spLocks noGrp="1"/>
-          </p:cNvSpPr>
-          <p:nvPr>
-            <p:ph type="sldNum" sz="quarter" idx="12"/>
-          </p:nvPr>
-        </p:nvSpPr>
-        <p:spPr/>
-        <p:txBody>
-          <a:bodyPr/>
-          <a:lstStyle/>
-          <a:p>
-            <a:pPr algn="r"/>
-            <a:fld id="{C014DD1E-5D91-48A3-AD6D-45FBA980D106}" type="slidenum">
-              <a:rPr lang="fr-FR" sz="2000" smtClean="0"/>
-              <a:pPr algn="r"/>
-              <a:t>5</a:t>
-            </a:fld>
-            <a:endParaRPr lang="fr-FR" sz="2000" dirty="0"/>
-          </a:p>
-        </p:txBody>
-      </p:sp>
-      <p:pic>
-        <p:nvPicPr>
-          <p:cNvPr id="3" name="Picture 2">
-            <a:extLst>
-              <a:ext uri="{FF2B5EF4-FFF2-40B4-BE49-F238E27FC236}">
-                <a16:creationId xmlns:a16="http://schemas.microsoft.com/office/drawing/2014/main" id="{61670684-1FCD-435A-24F1-4A6EC8FAA36D}"/>
-              </a:ext>
-            </a:extLst>
-          </p:cNvPr>
-          <p:cNvPicPr>
-            <a:picLocks noChangeAspect="1"/>
-          </p:cNvPicPr>
-          <p:nvPr/>
-        </p:nvPicPr>
-        <p:blipFill>
-          <a:blip r:embed="rId2">
-            <a:extLst>
-              <a:ext uri="{28A0092B-C50C-407E-A947-70E740481C1C}">
-                <a14:useLocalDpi xmlns:a14="http://schemas.microsoft.com/office/drawing/2010/main" val="0"/>
-              </a:ext>
-            </a:extLst>
-          </a:blip>
-          <a:srcRect/>
-          <a:stretch>
-            <a:fillRect/>
-          </a:stretch>
-        </p:blipFill>
-        <p:spPr bwMode="auto">
-          <a:xfrm>
-            <a:off x="6094411" y="620688"/>
-            <a:ext cx="2434828" cy="2372910"/>
-          </a:xfrm>
-          <a:prstGeom prst="rect">
-            <a:avLst/>
-          </a:prstGeom>
-          <a:noFill/>
-          <a:ln>
-            <a:noFill/>
-          </a:ln>
-        </p:spPr>
-      </p:pic>
-      <p:pic>
-        <p:nvPicPr>
-          <p:cNvPr id="5" name="Picture 4">
-            <a:extLst>
-              <a:ext uri="{FF2B5EF4-FFF2-40B4-BE49-F238E27FC236}">
-                <a16:creationId xmlns:a16="http://schemas.microsoft.com/office/drawing/2014/main" id="{20BF3905-B21C-2370-20DD-A9F0C932D392}"/>
-              </a:ext>
-            </a:extLst>
-          </p:cNvPr>
-          <p:cNvPicPr>
-            <a:picLocks noChangeAspect="1"/>
-          </p:cNvPicPr>
-          <p:nvPr/>
-        </p:nvPicPr>
-        <p:blipFill>
-          <a:blip r:embed="rId3">
-            <a:extLst>
-              <a:ext uri="{28A0092B-C50C-407E-A947-70E740481C1C}">
-                <a14:useLocalDpi xmlns:a14="http://schemas.microsoft.com/office/drawing/2010/main" val="0"/>
-              </a:ext>
-            </a:extLst>
-          </a:blip>
-          <a:stretch>
-            <a:fillRect/>
-          </a:stretch>
-        </p:blipFill>
-        <p:spPr>
-          <a:xfrm>
-            <a:off x="1149244" y="2094365"/>
-            <a:ext cx="4608512" cy="3158950"/>
-          </a:xfrm>
-          <a:prstGeom prst="rect">
-            <a:avLst/>
-          </a:prstGeom>
-        </p:spPr>
-      </p:pic>
-      <p:pic>
-        <p:nvPicPr>
-          <p:cNvPr id="6" name="Picture 5">
-            <a:extLst>
-              <a:ext uri="{FF2B5EF4-FFF2-40B4-BE49-F238E27FC236}">
-                <a16:creationId xmlns:a16="http://schemas.microsoft.com/office/drawing/2014/main" id="{BBA61A62-887E-176E-2A09-A52A2F48AAC7}"/>
-              </a:ext>
-            </a:extLst>
-          </p:cNvPr>
-          <p:cNvPicPr>
-            <a:picLocks noChangeAspect="1"/>
-          </p:cNvPicPr>
-          <p:nvPr/>
-        </p:nvPicPr>
-        <p:blipFill>
-          <a:blip r:embed="rId4"/>
-          <a:stretch>
-            <a:fillRect/>
-          </a:stretch>
-        </p:blipFill>
-        <p:spPr>
-          <a:xfrm>
-            <a:off x="8854434" y="586402"/>
-            <a:ext cx="2879183" cy="2407196"/>
-          </a:xfrm>
-          <a:prstGeom prst="rect">
-            <a:avLst/>
-          </a:prstGeom>
-        </p:spPr>
-      </p:pic>
-      <p:pic>
-        <p:nvPicPr>
-          <p:cNvPr id="9" name="Picture 8">
-            <a:extLst>
-              <a:ext uri="{FF2B5EF4-FFF2-40B4-BE49-F238E27FC236}">
-                <a16:creationId xmlns:a16="http://schemas.microsoft.com/office/drawing/2014/main" id="{DA543D8A-FC66-08E1-8205-A28C99F53D8C}"/>
-              </a:ext>
-            </a:extLst>
-          </p:cNvPr>
-          <p:cNvPicPr>
-            <a:picLocks noChangeAspect="1"/>
-          </p:cNvPicPr>
-          <p:nvPr/>
-        </p:nvPicPr>
-        <p:blipFill>
-          <a:blip r:embed="rId5"/>
-          <a:stretch>
-            <a:fillRect/>
-          </a:stretch>
-        </p:blipFill>
-        <p:spPr>
-          <a:xfrm>
-            <a:off x="6008665" y="3429000"/>
-            <a:ext cx="2623030" cy="2286662"/>
-          </a:xfrm>
-          <a:prstGeom prst="rect">
-            <a:avLst/>
-          </a:prstGeom>
-        </p:spPr>
-      </p:pic>
-      <p:pic>
-        <p:nvPicPr>
-          <p:cNvPr id="11" name="Picture 10">
-            <a:extLst>
-              <a:ext uri="{FF2B5EF4-FFF2-40B4-BE49-F238E27FC236}">
-                <a16:creationId xmlns:a16="http://schemas.microsoft.com/office/drawing/2014/main" id="{F9262E66-D4A6-430A-5247-EFA96A1F8674}"/>
-              </a:ext>
-            </a:extLst>
-          </p:cNvPr>
-          <p:cNvPicPr>
-            <a:picLocks noChangeAspect="1"/>
-          </p:cNvPicPr>
-          <p:nvPr/>
-        </p:nvPicPr>
-        <p:blipFill>
-          <a:blip r:embed="rId6"/>
-          <a:stretch>
-            <a:fillRect/>
-          </a:stretch>
-        </p:blipFill>
-        <p:spPr>
-          <a:xfrm>
-            <a:off x="8865894" y="3243573"/>
-            <a:ext cx="3009244" cy="2565391"/>
-          </a:xfrm>
-          <a:prstGeom prst="rect">
-            <a:avLst/>
-          </a:prstGeom>
-        </p:spPr>
-      </p:pic>
-    </p:spTree>
-    <p:extLst>
-      <p:ext uri="{BB962C8B-B14F-4D97-AF65-F5344CB8AC3E}">
-        <p14:creationId xmlns:p14="http://schemas.microsoft.com/office/powerpoint/2010/main" val="3043309872"/>
-      </p:ext>
-    </p:extLst>
-  </p:cSld>
-  <p:clrMapOvr>
-    <a:masterClrMapping/>
-  </p:clrMapOvr>
-  <mc:AlternateContent xmlns:mc="http://schemas.openxmlformats.org/markup-compatibility/2006" xmlns:p14="http://schemas.microsoft.com/office/powerpoint/2010/main">
-    <mc:Choice Requires="p14">
-      <p:transition spd="med" p14:dur="700">
-        <p:fade/>
-      </p:transition>
-    </mc:Choice>
-    <mc:Fallback xmlns="">
-      <p:transition spd="med">
-        <p:fade/>
-      </p:transition>
-    </mc:Fallback>
-  </mc:AlternateContent>
-</p:sld>
-</file>
-
-<file path=ppt/slides/slide6.xml><?xml version="1.0" encoding="utf-8"?>
+<file path=ppt/slides/slide7.xml><?xml version="1.0" encoding="utf-8"?>
 <p:sld xmlns:a="http://schemas.openxmlformats.org/drawingml/2006/main" xmlns:r="http://schemas.openxmlformats.org/officeDocument/2006/relationships" xmlns:p="http://schemas.openxmlformats.org/presentationml/2006/main">
   <p:cSld>
     <p:spTree>
@@ -13485,7 +15268,7 @@
           <a:p>
             <a:fld id="{10F8D90C-592A-4BB3-869D-943E473FE966}" type="datetime1">
               <a:rPr lang="fr-FR" smtClean="0"/>
-              <a:t>01/05/2025</a:t>
+              <a:t>02/05/2025</a:t>
             </a:fld>
             <a:endParaRPr lang="fr-FR" dirty="0"/>
           </a:p>
@@ -13516,7 +15299,7 @@
             <a:fld id="{C014DD1E-5D91-48A3-AD6D-45FBA980D106}" type="slidenum">
               <a:rPr lang="fr-FR" sz="2000" smtClean="0"/>
               <a:pPr algn="r"/>
-              <a:t>6</a:t>
+              <a:t>7</a:t>
             </a:fld>
             <a:endParaRPr lang="fr-FR" sz="2000" dirty="0"/>
           </a:p>
@@ -13538,7 +15321,7 @@
         </p:nvSpPr>
         <p:spPr>
           <a:xfrm>
-            <a:off x="1190971" y="1331676"/>
+            <a:off x="1125860" y="1156202"/>
             <a:ext cx="10360501" cy="4545595"/>
           </a:xfrm>
           <a:prstGeom prst="rect">
@@ -13839,6 +15622,23 @@
               <a:buChar char="•"/>
             </a:pPr>
             <a:r>
+              <a:rPr lang="fr-FR" sz="2300" dirty="0">
+                <a:solidFill>
+                  <a:schemeClr val="tx1"/>
+                </a:solidFill>
+              </a:rPr>
+              <a:t>Raspberry Pi 4B</a:t>
+            </a:r>
+          </a:p>
+          <a:p>
+            <a:pPr marL="1066693" lvl="1" indent="-457200">
+              <a:spcAft>
+                <a:spcPts val="800"/>
+              </a:spcAft>
+              <a:buFont typeface="Arial" panose="020B0604020202020204" pitchFamily="34" charset="0"/>
+              <a:buChar char="•"/>
+            </a:pPr>
+            <a:r>
               <a:rPr lang="fr-FR" sz="2400" b="0" dirty="0">
                 <a:solidFill>
                   <a:schemeClr val="tx1"/>
@@ -13984,7 +15784,7 @@
 </p:sld>
 </file>
 
-<file path=ppt/slides/slide7.xml><?xml version="1.0" encoding="utf-8"?>
+<file path=ppt/slides/slide8.xml><?xml version="1.0" encoding="utf-8"?>
 <p:sld xmlns:a="http://schemas.openxmlformats.org/drawingml/2006/main" xmlns:r="http://schemas.openxmlformats.org/officeDocument/2006/relationships" xmlns:p="http://schemas.openxmlformats.org/presentationml/2006/main">
   <p:cSld>
     <p:spTree>
@@ -14070,7 +15870,7 @@
           <a:p>
             <a:fld id="{10F8D90C-592A-4BB3-869D-943E473FE966}" type="datetime1">
               <a:rPr lang="fr-FR" smtClean="0"/>
-              <a:t>01/05/2025</a:t>
+              <a:t>02/05/2025</a:t>
             </a:fld>
             <a:endParaRPr lang="fr-FR" dirty="0"/>
           </a:p>
@@ -14101,7 +15901,7 @@
             <a:fld id="{C014DD1E-5D91-48A3-AD6D-45FBA980D106}" type="slidenum">
               <a:rPr lang="fr-FR" sz="2000" smtClean="0"/>
               <a:pPr algn="r"/>
-              <a:t>7</a:t>
+              <a:t>8</a:t>
             </a:fld>
             <a:endParaRPr lang="fr-FR" sz="2000" dirty="0"/>
           </a:p>
@@ -14123,14 +15923,13 @@
         </p:nvPicPr>
         <p:blipFill>
           <a:blip r:embed="rId2"/>
-          <a:stretch>
-            <a:fillRect/>
-          </a:stretch>
+          <a:srcRect l="1" r="50013"/>
+          <a:stretch/>
         </p:blipFill>
         <p:spPr>
           <a:xfrm>
-            <a:off x="1586068" y="3397374"/>
-            <a:ext cx="4249306" cy="2426217"/>
+            <a:off x="6346648" y="3605624"/>
+            <a:ext cx="2124028" cy="2426217"/>
           </a:xfrm>
           <a:prstGeom prst="rect">
             <a:avLst/>
@@ -14153,14 +15952,13 @@
         </p:nvPicPr>
         <p:blipFill>
           <a:blip r:embed="rId3"/>
-          <a:stretch>
-            <a:fillRect/>
-          </a:stretch>
+          <a:srcRect r="52446"/>
+          <a:stretch/>
         </p:blipFill>
         <p:spPr>
           <a:xfrm>
-            <a:off x="6507282" y="917768"/>
-            <a:ext cx="4573258" cy="2378639"/>
+            <a:off x="9192766" y="792655"/>
+            <a:ext cx="2174763" cy="2378639"/>
           </a:xfrm>
           <a:prstGeom prst="rect">
             <a:avLst/>
@@ -14183,14 +15981,13 @@
         </p:nvPicPr>
         <p:blipFill>
           <a:blip r:embed="rId4"/>
-          <a:stretch>
-            <a:fillRect/>
-          </a:stretch>
+          <a:srcRect r="51945"/>
+          <a:stretch/>
         </p:blipFill>
         <p:spPr>
           <a:xfrm>
-            <a:off x="1428604" y="1002783"/>
-            <a:ext cx="4564235" cy="2293624"/>
+            <a:off x="6346648" y="835163"/>
+            <a:ext cx="2193344" cy="2293624"/>
           </a:xfrm>
           <a:prstGeom prst="rect">
             <a:avLst/>
@@ -14219,8 +16016,8 @@
         </p:blipFill>
         <p:spPr>
           <a:xfrm rot="16200000">
-            <a:off x="6503382" y="3799078"/>
-            <a:ext cx="2155926" cy="1990301"/>
+            <a:off x="8925733" y="3641011"/>
+            <a:ext cx="2551452" cy="2355441"/>
           </a:xfrm>
           <a:prstGeom prst="rect">
             <a:avLst/>
@@ -14229,10 +16026,10 @@
       </p:pic>
       <p:pic>
         <p:nvPicPr>
-          <p:cNvPr id="24" name="Picture 23">
+          <p:cNvPr id="5" name="Picture 4">
             <a:extLst>
               <a:ext uri="{FF2B5EF4-FFF2-40B4-BE49-F238E27FC236}">
-                <a16:creationId xmlns:a16="http://schemas.microsoft.com/office/drawing/2014/main" id="{79E0DA6C-D2BB-DE7F-227E-E6377B978A63}"/>
+                <a16:creationId xmlns:a16="http://schemas.microsoft.com/office/drawing/2014/main" id="{20BF3905-B21C-2370-20DD-A9F0C932D392}"/>
               </a:ext>
             </a:extLst>
           </p:cNvPr>
@@ -14242,15 +16039,21 @@
           <p:nvPr/>
         </p:nvPicPr>
         <p:blipFill>
-          <a:blip r:embed="rId6"/>
+          <a:blip r:embed="rId6">
+            <a:extLst>
+              <a:ext uri="{28A0092B-C50C-407E-A947-70E740481C1C}">
+                <a14:useLocalDpi xmlns:a14="http://schemas.microsoft.com/office/drawing/2010/main" val="0"/>
+              </a:ext>
+            </a:extLst>
+          </a:blip>
           <a:stretch>
             <a:fillRect/>
           </a:stretch>
         </p:blipFill>
         <p:spPr>
-          <a:xfrm rot="5400000">
-            <a:off x="8885522" y="3831229"/>
-            <a:ext cx="2168720" cy="1990300"/>
+          <a:xfrm>
+            <a:off x="1149244" y="1849525"/>
+            <a:ext cx="4608512" cy="3158950"/>
           </a:xfrm>
           <a:prstGeom prst="rect">
             <a:avLst/>
@@ -14282,15 +16085,15 @@
 </p:sld>
 </file>
 
-<file path=ppt/slides/slide8.xml><?xml version="1.0" encoding="utf-8"?>
-<p:sld xmlns:a="http://schemas.openxmlformats.org/drawingml/2006/main" xmlns:r="http://schemas.openxmlformats.org/officeDocument/2006/relationships" xmlns:p="http://schemas.openxmlformats.org/presentationml/2006/main">
+<file path=ppt/slides/slide9.xml><?xml version="1.0" encoding="utf-8"?>
+<p:sld xmlns:a="http://schemas.openxmlformats.org/drawingml/2006/main" xmlns:r="http://schemas.openxmlformats.org/officeDocument/2006/relationships" xmlns:p="http://schemas.openxmlformats.org/presentationml/2006/main" show="0">
   <p:cSld>
     <p:spTree>
       <p:nvGrpSpPr>
         <p:cNvPr id="1" name="">
           <a:extLst>
             <a:ext uri="{FF2B5EF4-FFF2-40B4-BE49-F238E27FC236}">
-              <a16:creationId xmlns:a16="http://schemas.microsoft.com/office/drawing/2014/main" id="{1E8F1013-5BD0-92FD-E656-43A21555CFEA}"/>
+              <a16:creationId xmlns:a16="http://schemas.microsoft.com/office/drawing/2014/main" id="{9514F553-10E4-343F-9D78-850A354B903B}"/>
             </a:ext>
           </a:extLst>
         </p:cNvPr>
@@ -14310,7 +16113,7 @@
           <p:cNvPr id="2" name="Title 1">
             <a:extLst>
               <a:ext uri="{FF2B5EF4-FFF2-40B4-BE49-F238E27FC236}">
-                <a16:creationId xmlns:a16="http://schemas.microsoft.com/office/drawing/2014/main" id="{0E5C5D86-C650-1D4F-60F0-5F74D39FEB75}"/>
+                <a16:creationId xmlns:a16="http://schemas.microsoft.com/office/drawing/2014/main" id="{BB5BE115-D9B7-3F88-C136-3C908E9036CB}"/>
               </a:ext>
             </a:extLst>
           </p:cNvPr>
@@ -14350,7 +16153,7 @@
           <p:cNvPr id="7" name="Date Placeholder 6">
             <a:extLst>
               <a:ext uri="{FF2B5EF4-FFF2-40B4-BE49-F238E27FC236}">
-                <a16:creationId xmlns:a16="http://schemas.microsoft.com/office/drawing/2014/main" id="{F3E4CEF6-0463-3DF3-3A0C-68B1ECBC3D7F}"/>
+                <a16:creationId xmlns:a16="http://schemas.microsoft.com/office/drawing/2014/main" id="{B68DB298-B6E3-7F2D-80AB-E65507193440}"/>
               </a:ext>
             </a:extLst>
           </p:cNvPr>
@@ -14368,7 +16171,7 @@
           <a:p>
             <a:fld id="{10F8D90C-592A-4BB3-869D-943E473FE966}" type="datetime1">
               <a:rPr lang="fr-FR" smtClean="0"/>
-              <a:t>01/05/2025</a:t>
+              <a:t>02/05/2025</a:t>
             </a:fld>
             <a:endParaRPr lang="fr-FR" dirty="0"/>
           </a:p>
@@ -14379,7 +16182,7 @@
           <p:cNvPr id="8" name="Slide Number Placeholder 7">
             <a:extLst>
               <a:ext uri="{FF2B5EF4-FFF2-40B4-BE49-F238E27FC236}">
-                <a16:creationId xmlns:a16="http://schemas.microsoft.com/office/drawing/2014/main" id="{E4E39261-32E1-0791-2C3E-3B9134B3EAA6}"/>
+                <a16:creationId xmlns:a16="http://schemas.microsoft.com/office/drawing/2014/main" id="{3BB79E4A-7A88-7C1F-5314-2E63890BC045}"/>
               </a:ext>
             </a:extLst>
           </p:cNvPr>
@@ -14399,7 +16202,7 @@
             <a:fld id="{C014DD1E-5D91-48A3-AD6D-45FBA980D106}" type="slidenum">
               <a:rPr lang="fr-FR" sz="2000" smtClean="0"/>
               <a:pPr algn="r"/>
-              <a:t>8</a:t>
+              <a:t>9</a:t>
             </a:fld>
             <a:endParaRPr lang="fr-FR" sz="2000" dirty="0"/>
           </a:p>
@@ -14407,41 +16210,51 @@
       </p:sp>
       <p:pic>
         <p:nvPicPr>
-          <p:cNvPr id="3" name="Content Placeholder 2" descr="A computer generated image of a circuit board&#10;&#10;AI-generated content may be incorrect.">
+          <p:cNvPr id="3" name="Picture 2">
             <a:extLst>
               <a:ext uri="{FF2B5EF4-FFF2-40B4-BE49-F238E27FC236}">
-                <a16:creationId xmlns:a16="http://schemas.microsoft.com/office/drawing/2014/main" id="{1C76FD4F-85DE-2528-3CEB-D01686BFCC10}"/>
+                <a16:creationId xmlns:a16="http://schemas.microsoft.com/office/drawing/2014/main" id="{61670684-1FCD-435A-24F1-4A6EC8FAA36D}"/>
               </a:ext>
             </a:extLst>
           </p:cNvPr>
           <p:cNvPicPr>
-            <a:picLocks noGrp="1" noChangeAspect="1"/>
+            <a:picLocks noChangeAspect="1"/>
           </p:cNvPicPr>
-          <p:nvPr>
-            <p:ph sz="half" idx="2"/>
-          </p:nvPr>
+          <p:nvPr/>
         </p:nvPicPr>
         <p:blipFill>
-          <a:blip r:embed="rId2"/>
-          <a:srcRect l="6706" r="6935"/>
-          <a:stretch/>
+          <a:blip r:embed="rId2">
+            <a:extLst>
+              <a:ext uri="{28A0092B-C50C-407E-A947-70E740481C1C}">
+                <a14:useLocalDpi xmlns:a14="http://schemas.microsoft.com/office/drawing/2010/main" val="0"/>
+              </a:ext>
+            </a:extLst>
+          </a:blip>
+          <a:srcRect/>
+          <a:stretch>
+            <a:fillRect/>
+          </a:stretch>
         </p:blipFill>
-        <p:spPr>
+        <p:spPr bwMode="auto">
           <a:xfrm>
-            <a:off x="6091553" y="1200305"/>
-            <a:ext cx="5468282" cy="4457389"/>
+            <a:off x="3086468" y="1167793"/>
+            <a:ext cx="2434828" cy="2372910"/>
           </a:xfrm>
           <a:prstGeom prst="rect">
             <a:avLst/>
           </a:prstGeom>
+          <a:noFill/>
+          <a:ln>
+            <a:noFill/>
+          </a:ln>
         </p:spPr>
       </p:pic>
       <p:pic>
         <p:nvPicPr>
-          <p:cNvPr id="4" name="Picture 3" descr="A computer circuit board with many different components&#10;&#10;AI-generated content may be incorrect.">
+          <p:cNvPr id="6" name="Picture 5">
             <a:extLst>
               <a:ext uri="{FF2B5EF4-FFF2-40B4-BE49-F238E27FC236}">
-                <a16:creationId xmlns:a16="http://schemas.microsoft.com/office/drawing/2014/main" id="{B148C019-1EB0-5059-B09F-013EB2987F30}"/>
+                <a16:creationId xmlns:a16="http://schemas.microsoft.com/office/drawing/2014/main" id="{BBA61A62-887E-176E-2A09-A52A2F48AAC7}"/>
               </a:ext>
             </a:extLst>
           </p:cNvPr>
@@ -14458,8 +16271,68 @@
         </p:blipFill>
         <p:spPr>
           <a:xfrm>
-            <a:off x="765820" y="1600886"/>
-            <a:ext cx="4817133" cy="3893322"/>
+            <a:off x="6958508" y="1181615"/>
+            <a:ext cx="2879183" cy="2407196"/>
+          </a:xfrm>
+          <a:prstGeom prst="rect">
+            <a:avLst/>
+          </a:prstGeom>
+        </p:spPr>
+      </p:pic>
+      <p:pic>
+        <p:nvPicPr>
+          <p:cNvPr id="9" name="Picture 8">
+            <a:extLst>
+              <a:ext uri="{FF2B5EF4-FFF2-40B4-BE49-F238E27FC236}">
+                <a16:creationId xmlns:a16="http://schemas.microsoft.com/office/drawing/2014/main" id="{DA543D8A-FC66-08E1-8205-A28C99F53D8C}"/>
+              </a:ext>
+            </a:extLst>
+          </p:cNvPr>
+          <p:cNvPicPr>
+            <a:picLocks noChangeAspect="1"/>
+          </p:cNvPicPr>
+          <p:nvPr/>
+        </p:nvPicPr>
+        <p:blipFill>
+          <a:blip r:embed="rId4"/>
+          <a:stretch>
+            <a:fillRect/>
+          </a:stretch>
+        </p:blipFill>
+        <p:spPr>
+          <a:xfrm>
+            <a:off x="2011416" y="3717032"/>
+            <a:ext cx="2623030" cy="2286662"/>
+          </a:xfrm>
+          <a:prstGeom prst="rect">
+            <a:avLst/>
+          </a:prstGeom>
+        </p:spPr>
+      </p:pic>
+      <p:pic>
+        <p:nvPicPr>
+          <p:cNvPr id="11" name="Picture 10">
+            <a:extLst>
+              <a:ext uri="{FF2B5EF4-FFF2-40B4-BE49-F238E27FC236}">
+                <a16:creationId xmlns:a16="http://schemas.microsoft.com/office/drawing/2014/main" id="{F9262E66-D4A6-430A-5247-EFA96A1F8674}"/>
+              </a:ext>
+            </a:extLst>
+          </p:cNvPr>
+          <p:cNvPicPr>
+            <a:picLocks noChangeAspect="1"/>
+          </p:cNvPicPr>
+          <p:nvPr/>
+        </p:nvPicPr>
+        <p:blipFill>
+          <a:blip r:embed="rId5"/>
+          <a:stretch>
+            <a:fillRect/>
+          </a:stretch>
+        </p:blipFill>
+        <p:spPr>
+          <a:xfrm>
+            <a:off x="6094411" y="3650573"/>
+            <a:ext cx="3009244" cy="2565391"/>
           </a:xfrm>
           <a:prstGeom prst="rect">
             <a:avLst/>
@@ -14469,539 +16342,7 @@
     </p:spTree>
     <p:extLst>
       <p:ext uri="{BB962C8B-B14F-4D97-AF65-F5344CB8AC3E}">
-        <p14:creationId xmlns:p14="http://schemas.microsoft.com/office/powerpoint/2010/main" val="930243773"/>
-      </p:ext>
-    </p:extLst>
-  </p:cSld>
-  <p:clrMapOvr>
-    <a:masterClrMapping/>
-  </p:clrMapOvr>
-  <mc:AlternateContent xmlns:mc="http://schemas.openxmlformats.org/markup-compatibility/2006" xmlns:p14="http://schemas.microsoft.com/office/powerpoint/2010/main">
-    <mc:Choice Requires="p14">
-      <p:transition spd="med" p14:dur="700">
-        <p:fade/>
-      </p:transition>
-    </mc:Choice>
-    <mc:Fallback xmlns="">
-      <p:transition spd="med">
-        <p:fade/>
-      </p:transition>
-    </mc:Fallback>
-  </mc:AlternateContent>
-</p:sld>
-</file>
-
-<file path=ppt/slides/slide9.xml><?xml version="1.0" encoding="utf-8"?>
-<p:sld xmlns:a="http://schemas.openxmlformats.org/drawingml/2006/main" xmlns:r="http://schemas.openxmlformats.org/officeDocument/2006/relationships" xmlns:p="http://schemas.openxmlformats.org/presentationml/2006/main">
-  <p:cSld>
-    <p:spTree>
-      <p:nvGrpSpPr>
-        <p:cNvPr id="1" name="">
-          <a:extLst>
-            <a:ext uri="{FF2B5EF4-FFF2-40B4-BE49-F238E27FC236}">
-              <a16:creationId xmlns:a16="http://schemas.microsoft.com/office/drawing/2014/main" id="{F6F1CE0A-1120-DFA4-B19D-209FB47BC8EE}"/>
-            </a:ext>
-          </a:extLst>
-        </p:cNvPr>
-        <p:cNvGrpSpPr/>
-        <p:nvPr/>
-      </p:nvGrpSpPr>
-      <p:grpSpPr>
-        <a:xfrm>
-          <a:off x="0" y="0"/>
-          <a:ext cx="0" cy="0"/>
-          <a:chOff x="0" y="0"/>
-          <a:chExt cx="0" cy="0"/>
-        </a:xfrm>
-      </p:grpSpPr>
-      <p:sp>
-        <p:nvSpPr>
-          <p:cNvPr id="2" name="Title 1">
-            <a:extLst>
-              <a:ext uri="{FF2B5EF4-FFF2-40B4-BE49-F238E27FC236}">
-                <a16:creationId xmlns:a16="http://schemas.microsoft.com/office/drawing/2014/main" id="{0D75051E-A06C-8A7E-3782-A35F9425B1C9}"/>
-              </a:ext>
-            </a:extLst>
-          </p:cNvPr>
-          <p:cNvSpPr>
-            <a:spLocks noGrp="1"/>
-          </p:cNvSpPr>
-          <p:nvPr>
-            <p:ph type="title"/>
-          </p:nvPr>
-        </p:nvSpPr>
-        <p:spPr>
-          <a:xfrm>
-            <a:off x="914161" y="-104109"/>
-            <a:ext cx="10360501" cy="1223963"/>
-          </a:xfrm>
-        </p:spPr>
-        <p:txBody>
-          <a:bodyPr>
-            <a:normAutofit/>
-          </a:bodyPr>
-          <a:lstStyle/>
-          <a:p>
-            <a:r>
-              <a:rPr lang="fr-FR" sz="4400" b="1" dirty="0">
-                <a:solidFill>
-                  <a:schemeClr val="accent1"/>
-                </a:solidFill>
-              </a:rPr>
-              <a:t>Vérification</a:t>
-            </a:r>
-          </a:p>
-        </p:txBody>
-      </p:sp>
-      <p:sp>
-        <p:nvSpPr>
-          <p:cNvPr id="7" name="Date Placeholder 6">
-            <a:extLst>
-              <a:ext uri="{FF2B5EF4-FFF2-40B4-BE49-F238E27FC236}">
-                <a16:creationId xmlns:a16="http://schemas.microsoft.com/office/drawing/2014/main" id="{FA0E684A-4C01-EA2D-87EC-9464713B7519}"/>
-              </a:ext>
-            </a:extLst>
-          </p:cNvPr>
-          <p:cNvSpPr>
-            <a:spLocks noGrp="1"/>
-          </p:cNvSpPr>
-          <p:nvPr>
-            <p:ph type="dt" sz="half" idx="10"/>
-          </p:nvPr>
-        </p:nvSpPr>
-        <p:spPr/>
-        <p:txBody>
-          <a:bodyPr/>
-          <a:lstStyle/>
-          <a:p>
-            <a:fld id="{10F8D90C-592A-4BB3-869D-943E473FE966}" type="datetime1">
-              <a:rPr lang="fr-FR" smtClean="0"/>
-              <a:t>01/05/2025</a:t>
-            </a:fld>
-            <a:endParaRPr lang="fr-FR" dirty="0"/>
-          </a:p>
-        </p:txBody>
-      </p:sp>
-      <p:sp>
-        <p:nvSpPr>
-          <p:cNvPr id="8" name="Slide Number Placeholder 7">
-            <a:extLst>
-              <a:ext uri="{FF2B5EF4-FFF2-40B4-BE49-F238E27FC236}">
-                <a16:creationId xmlns:a16="http://schemas.microsoft.com/office/drawing/2014/main" id="{1D46981B-22CC-2C69-2B2C-AAE2DC49C56C}"/>
-              </a:ext>
-            </a:extLst>
-          </p:cNvPr>
-          <p:cNvSpPr>
-            <a:spLocks noGrp="1"/>
-          </p:cNvSpPr>
-          <p:nvPr>
-            <p:ph type="sldNum" sz="quarter" idx="12"/>
-          </p:nvPr>
-        </p:nvSpPr>
-        <p:spPr/>
-        <p:txBody>
-          <a:bodyPr/>
-          <a:lstStyle/>
-          <a:p>
-            <a:pPr algn="r"/>
-            <a:fld id="{C014DD1E-5D91-48A3-AD6D-45FBA980D106}" type="slidenum">
-              <a:rPr lang="fr-FR" sz="2000" smtClean="0"/>
-              <a:pPr algn="r"/>
-              <a:t>9</a:t>
-            </a:fld>
-            <a:endParaRPr lang="fr-FR" sz="2000" dirty="0"/>
-          </a:p>
-        </p:txBody>
-      </p:sp>
-      <p:sp>
-        <p:nvSpPr>
-          <p:cNvPr id="3" name="Espace réservé du contenu 2">
-            <a:extLst>
-              <a:ext uri="{FF2B5EF4-FFF2-40B4-BE49-F238E27FC236}">
-                <a16:creationId xmlns:a16="http://schemas.microsoft.com/office/drawing/2014/main" id="{85C2CE01-9046-6255-F2E0-0A495BBDEF5E}"/>
-              </a:ext>
-            </a:extLst>
-          </p:cNvPr>
-          <p:cNvSpPr txBox="1">
-            <a:spLocks/>
-          </p:cNvSpPr>
-          <p:nvPr/>
-        </p:nvSpPr>
-        <p:spPr>
-          <a:xfrm>
-            <a:off x="1218882" y="1193372"/>
-            <a:ext cx="10736089" cy="2736304"/>
-          </a:xfrm>
-          <a:prstGeom prst="rect">
-            <a:avLst/>
-          </a:prstGeom>
-        </p:spPr>
-        <p:txBody>
-          <a:bodyPr vert="horz" lIns="121899" tIns="60949" rIns="121899" bIns="60949" rtlCol="0" anchor="t">
-            <a:noAutofit/>
-          </a:bodyPr>
-          <a:lstStyle>
-            <a:lvl1pPr marL="0" indent="0" algn="l" defTabSz="1218987" rtl="0" eaLnBrk="1" latinLnBrk="0" hangingPunct="1">
-              <a:lnSpc>
-                <a:spcPct val="90000"/>
-              </a:lnSpc>
-              <a:spcBef>
-                <a:spcPts val="0"/>
-              </a:spcBef>
-              <a:buClr>
-                <a:schemeClr val="accent1"/>
-              </a:buClr>
-              <a:buSzPct val="100000"/>
-              <a:buFont typeface="Arial" pitchFamily="34" charset="0"/>
-              <a:buNone/>
-              <a:defRPr sz="2800" b="0" kern="1200" cap="all" spc="200" baseline="0">
-                <a:solidFill>
-                  <a:schemeClr val="accent1"/>
-                </a:solidFill>
-                <a:latin typeface="+mn-lt"/>
-                <a:ea typeface="+mn-ea"/>
-                <a:cs typeface="+mn-cs"/>
-              </a:defRPr>
-            </a:lvl1pPr>
-            <a:lvl2pPr marL="609493" indent="0" algn="l" defTabSz="1218987" rtl="0" eaLnBrk="1" latinLnBrk="0" hangingPunct="1">
-              <a:lnSpc>
-                <a:spcPct val="90000"/>
-              </a:lnSpc>
-              <a:spcBef>
-                <a:spcPts val="800"/>
-              </a:spcBef>
-              <a:buClr>
-                <a:schemeClr val="accent1"/>
-              </a:buClr>
-              <a:buSzPct val="80000"/>
-              <a:buFont typeface="Arial" pitchFamily="34" charset="0"/>
-              <a:buNone/>
-              <a:defRPr sz="2700" b="1" kern="1200">
-                <a:solidFill>
-                  <a:schemeClr val="tx1"/>
-                </a:solidFill>
-                <a:latin typeface="+mn-lt"/>
-                <a:ea typeface="+mn-ea"/>
-                <a:cs typeface="+mn-cs"/>
-              </a:defRPr>
-            </a:lvl2pPr>
-            <a:lvl3pPr marL="1218987" indent="0" algn="l" defTabSz="1218987" rtl="0" eaLnBrk="1" latinLnBrk="0" hangingPunct="1">
-              <a:lnSpc>
-                <a:spcPct val="90000"/>
-              </a:lnSpc>
-              <a:spcBef>
-                <a:spcPts val="800"/>
-              </a:spcBef>
-              <a:buClr>
-                <a:schemeClr val="accent1"/>
-              </a:buClr>
-              <a:buSzPct val="80000"/>
-              <a:buFont typeface="Arial" pitchFamily="34" charset="0"/>
-              <a:buNone/>
-              <a:defRPr sz="2400" b="1" kern="1200">
-                <a:solidFill>
-                  <a:schemeClr val="tx1"/>
-                </a:solidFill>
-                <a:latin typeface="+mn-lt"/>
-                <a:ea typeface="+mn-ea"/>
-                <a:cs typeface="+mn-cs"/>
-              </a:defRPr>
-            </a:lvl3pPr>
-            <a:lvl4pPr marL="1828480" indent="0" algn="l" defTabSz="1218987" rtl="0" eaLnBrk="1" latinLnBrk="0" hangingPunct="1">
-              <a:lnSpc>
-                <a:spcPct val="90000"/>
-              </a:lnSpc>
-              <a:spcBef>
-                <a:spcPts val="800"/>
-              </a:spcBef>
-              <a:buClr>
-                <a:schemeClr val="accent1"/>
-              </a:buClr>
-              <a:buSzPct val="80000"/>
-              <a:buFont typeface="Arial" pitchFamily="34" charset="0"/>
-              <a:buNone/>
-              <a:defRPr sz="2100" b="1" kern="1200">
-                <a:solidFill>
-                  <a:schemeClr val="tx1"/>
-                </a:solidFill>
-                <a:latin typeface="+mn-lt"/>
-                <a:ea typeface="+mn-ea"/>
-                <a:cs typeface="+mn-cs"/>
-              </a:defRPr>
-            </a:lvl4pPr>
-            <a:lvl5pPr marL="2437973" indent="0" algn="l" defTabSz="1218987" rtl="0" eaLnBrk="1" latinLnBrk="0" hangingPunct="1">
-              <a:lnSpc>
-                <a:spcPct val="90000"/>
-              </a:lnSpc>
-              <a:spcBef>
-                <a:spcPts val="800"/>
-              </a:spcBef>
-              <a:buClr>
-                <a:schemeClr val="accent1"/>
-              </a:buClr>
-              <a:buSzPct val="80000"/>
-              <a:buFont typeface="Arial" pitchFamily="34" charset="0"/>
-              <a:buNone/>
-              <a:defRPr sz="2100" b="1" kern="1200">
-                <a:solidFill>
-                  <a:schemeClr val="tx1"/>
-                </a:solidFill>
-                <a:latin typeface="+mn-lt"/>
-                <a:ea typeface="+mn-ea"/>
-                <a:cs typeface="+mn-cs"/>
-              </a:defRPr>
-            </a:lvl5pPr>
-            <a:lvl6pPr marL="3047467" indent="0" algn="l" defTabSz="1218987" rtl="0" eaLnBrk="1" latinLnBrk="0" hangingPunct="1">
-              <a:lnSpc>
-                <a:spcPct val="90000"/>
-              </a:lnSpc>
-              <a:spcBef>
-                <a:spcPts val="800"/>
-              </a:spcBef>
-              <a:buClr>
-                <a:schemeClr val="accent1"/>
-              </a:buClr>
-              <a:buSzPct val="80000"/>
-              <a:buFont typeface="Arial" pitchFamily="34" charset="0"/>
-              <a:buNone/>
-              <a:defRPr sz="2100" b="1" kern="1200">
-                <a:solidFill>
-                  <a:schemeClr val="tx1"/>
-                </a:solidFill>
-                <a:latin typeface="+mn-lt"/>
-                <a:ea typeface="+mn-ea"/>
-                <a:cs typeface="+mn-cs"/>
-              </a:defRPr>
-            </a:lvl6pPr>
-            <a:lvl7pPr marL="3656960" indent="0" algn="l" defTabSz="1218987" rtl="0" eaLnBrk="1" latinLnBrk="0" hangingPunct="1">
-              <a:lnSpc>
-                <a:spcPct val="90000"/>
-              </a:lnSpc>
-              <a:spcBef>
-                <a:spcPts val="800"/>
-              </a:spcBef>
-              <a:buClr>
-                <a:schemeClr val="accent1"/>
-              </a:buClr>
-              <a:buSzPct val="80000"/>
-              <a:buFont typeface="Arial" pitchFamily="34" charset="0"/>
-              <a:buNone/>
-              <a:defRPr sz="2100" b="1" kern="1200">
-                <a:solidFill>
-                  <a:schemeClr val="tx1"/>
-                </a:solidFill>
-                <a:latin typeface="+mn-lt"/>
-                <a:ea typeface="+mn-ea"/>
-                <a:cs typeface="+mn-cs"/>
-              </a:defRPr>
-            </a:lvl7pPr>
-            <a:lvl8pPr marL="4266453" indent="0" algn="l" defTabSz="1218987" rtl="0" eaLnBrk="1" latinLnBrk="0" hangingPunct="1">
-              <a:lnSpc>
-                <a:spcPct val="90000"/>
-              </a:lnSpc>
-              <a:spcBef>
-                <a:spcPts val="800"/>
-              </a:spcBef>
-              <a:buClr>
-                <a:schemeClr val="accent1"/>
-              </a:buClr>
-              <a:buSzPct val="80000"/>
-              <a:buFont typeface="Arial" pitchFamily="34" charset="0"/>
-              <a:buNone/>
-              <a:defRPr sz="2100" b="1" kern="1200" baseline="0">
-                <a:solidFill>
-                  <a:schemeClr val="tx1"/>
-                </a:solidFill>
-                <a:latin typeface="+mn-lt"/>
-                <a:ea typeface="+mn-ea"/>
-                <a:cs typeface="+mn-cs"/>
-              </a:defRPr>
-            </a:lvl8pPr>
-            <a:lvl9pPr marL="4875947" indent="0" algn="l" defTabSz="1218987" rtl="0" eaLnBrk="1" latinLnBrk="0" hangingPunct="1">
-              <a:lnSpc>
-                <a:spcPct val="90000"/>
-              </a:lnSpc>
-              <a:spcBef>
-                <a:spcPts val="800"/>
-              </a:spcBef>
-              <a:buClr>
-                <a:schemeClr val="accent1"/>
-              </a:buClr>
-              <a:buSzPct val="80000"/>
-              <a:buFont typeface="Arial" pitchFamily="34" charset="0"/>
-              <a:buNone/>
-              <a:defRPr sz="2100" b="1" kern="1200" baseline="0">
-                <a:solidFill>
-                  <a:schemeClr val="tx1"/>
-                </a:solidFill>
-                <a:latin typeface="+mn-lt"/>
-                <a:ea typeface="+mn-ea"/>
-                <a:cs typeface="+mn-cs"/>
-              </a:defRPr>
-            </a:lvl9pPr>
-          </a:lstStyle>
-          <a:p>
-            <a:pPr marL="457200" indent="-457200">
-              <a:spcAft>
-                <a:spcPts val="800"/>
-              </a:spcAft>
-              <a:buFont typeface="Arial" panose="020B0604020202020204" pitchFamily="34" charset="0"/>
-              <a:buChar char="•"/>
-            </a:pPr>
-            <a:r>
-              <a:rPr lang="fr-FR" dirty="0"/>
-              <a:t>Approche PDCA (Plan – Do – Check – </a:t>
-            </a:r>
-            <a:r>
-              <a:rPr lang="fr-FR" dirty="0" err="1"/>
-              <a:t>Act</a:t>
-            </a:r>
-            <a:r>
-              <a:rPr lang="fr-FR" dirty="0"/>
-              <a:t>) :</a:t>
-            </a:r>
-          </a:p>
-          <a:p>
-            <a:pPr marL="1066693" lvl="1" indent="-457200">
-              <a:spcAft>
-                <a:spcPts val="800"/>
-              </a:spcAft>
-              <a:buFont typeface="Arial" panose="020B0604020202020204" pitchFamily="34" charset="0"/>
-              <a:buChar char="•"/>
-            </a:pPr>
-            <a:r>
-              <a:rPr lang="fr-FR" sz="2400" b="0" dirty="0">
-                <a:solidFill>
-                  <a:schemeClr val="tx1"/>
-                </a:solidFill>
-              </a:rPr>
-              <a:t>Plan : Planifier : définition des objectifs de tests et critères de validation</a:t>
-            </a:r>
-          </a:p>
-          <a:p>
-            <a:pPr marL="1066693" lvl="1" indent="-457200">
-              <a:spcAft>
-                <a:spcPts val="800"/>
-              </a:spcAft>
-              <a:buFont typeface="Arial" panose="020B0604020202020204" pitchFamily="34" charset="0"/>
-              <a:buChar char="•"/>
-            </a:pPr>
-            <a:r>
-              <a:rPr lang="fr-FR" sz="2400" b="0" dirty="0">
-                <a:solidFill>
-                  <a:schemeClr val="tx1"/>
-                </a:solidFill>
-              </a:rPr>
-              <a:t>Do : Déployer : exécution des tests unitaires et d'intégration</a:t>
-            </a:r>
-          </a:p>
-          <a:p>
-            <a:pPr marL="1066693" lvl="1" indent="-457200">
-              <a:spcAft>
-                <a:spcPts val="800"/>
-              </a:spcAft>
-              <a:buFont typeface="Arial" panose="020B0604020202020204" pitchFamily="34" charset="0"/>
-              <a:buChar char="•"/>
-            </a:pPr>
-            <a:r>
-              <a:rPr lang="fr-FR" sz="2400" b="0" dirty="0">
-                <a:solidFill>
-                  <a:schemeClr val="tx1"/>
-                </a:solidFill>
-              </a:rPr>
-              <a:t>Check : Contrôler : analyse des résultats, identification des écarts</a:t>
-            </a:r>
-          </a:p>
-          <a:p>
-            <a:pPr marL="1066693" lvl="1" indent="-457200">
-              <a:spcAft>
-                <a:spcPts val="800"/>
-              </a:spcAft>
-              <a:buFont typeface="Arial" panose="020B0604020202020204" pitchFamily="34" charset="0"/>
-              <a:buChar char="•"/>
-            </a:pPr>
-            <a:r>
-              <a:rPr lang="fr-FR" sz="2400" b="0" dirty="0" err="1">
-                <a:solidFill>
-                  <a:schemeClr val="tx1"/>
-                </a:solidFill>
-              </a:rPr>
-              <a:t>Act</a:t>
-            </a:r>
-            <a:r>
-              <a:rPr lang="fr-FR" sz="2400" b="0" dirty="0">
-                <a:solidFill>
-                  <a:schemeClr val="tx1"/>
-                </a:solidFill>
-              </a:rPr>
-              <a:t> : Ajuster : actions correctives et amélioration continue</a:t>
-            </a:r>
-          </a:p>
-          <a:p>
-            <a:pPr marL="1066693" lvl="1" indent="-457200">
-              <a:spcAft>
-                <a:spcPts val="800"/>
-              </a:spcAft>
-              <a:buFont typeface="Arial" panose="020B0604020202020204" pitchFamily="34" charset="0"/>
-              <a:buChar char="•"/>
-            </a:pPr>
-            <a:endParaRPr lang="fr-FR" sz="2400" b="0" dirty="0">
-              <a:solidFill>
-                <a:schemeClr val="tx1"/>
-              </a:solidFill>
-            </a:endParaRPr>
-          </a:p>
-        </p:txBody>
-      </p:sp>
-      <p:pic>
-        <p:nvPicPr>
-          <p:cNvPr id="1026" name="Picture 2" descr="Cycle PDCA ou Roue de deming">
-            <a:extLst>
-              <a:ext uri="{FF2B5EF4-FFF2-40B4-BE49-F238E27FC236}">
-                <a16:creationId xmlns:a16="http://schemas.microsoft.com/office/drawing/2014/main" id="{47F24401-7EEC-32C6-9B20-D2AD80489470}"/>
-              </a:ext>
-            </a:extLst>
-          </p:cNvPr>
-          <p:cNvPicPr>
-            <a:picLocks noChangeAspect="1" noChangeArrowheads="1"/>
-          </p:cNvPicPr>
-          <p:nvPr/>
-        </p:nvPicPr>
-        <p:blipFill rotWithShape="1">
-          <a:blip r:embed="rId3">
-            <a:extLst>
-              <a:ext uri="{28A0092B-C50C-407E-A947-70E740481C1C}">
-                <a14:useLocalDpi xmlns:a14="http://schemas.microsoft.com/office/drawing/2010/main" val="0"/>
-              </a:ext>
-            </a:extLst>
-          </a:blip>
-          <a:srcRect l="18966" r="20207"/>
-          <a:stretch/>
-        </p:blipFill>
-        <p:spPr bwMode="auto">
-          <a:xfrm>
-            <a:off x="4654252" y="4003194"/>
-            <a:ext cx="2592288" cy="2400299"/>
-          </a:xfrm>
-          <a:prstGeom prst="rect">
-            <a:avLst/>
-          </a:prstGeom>
-          <a:noFill/>
-          <a:extLst>
-            <a:ext uri="{909E8E84-426E-40DD-AFC4-6F175D3DCCD1}">
-              <a14:hiddenFill xmlns:a14="http://schemas.microsoft.com/office/drawing/2010/main">
-                <a:solidFill>
-                  <a:srgbClr val="FFFFFF"/>
-                </a:solidFill>
-              </a14:hiddenFill>
-            </a:ext>
-          </a:extLst>
-        </p:spPr>
-      </p:pic>
-    </p:spTree>
-    <p:extLst>
-      <p:ext uri="{BB962C8B-B14F-4D97-AF65-F5344CB8AC3E}">
-        <p14:creationId xmlns:p14="http://schemas.microsoft.com/office/powerpoint/2010/main" val="1102197686"/>
+        <p14:creationId xmlns:p14="http://schemas.microsoft.com/office/powerpoint/2010/main" val="3043309872"/>
       </p:ext>
     </p:extLst>
   </p:cSld>
